--- a/exports/pptx/lessons/middle-module-07-eleven-multiplication/day-04-three-digit.pptx
+++ b/exports/pptx/lessons/middle-module-07-eleven-multiplication/day-04-three-digit.pptx
@@ -18,9 +18,16 @@
     <p:sldId id="266" r:id="rId12"/>
     <p:sldId id="267" r:id="rId13"/>
     <p:sldId id="268" r:id="rId14"/>
+    <p:sldId id="269" r:id="rId15"/>
+    <p:sldId id="270" r:id="rId16"/>
+    <p:sldId id="271" r:id="rId17"/>
+    <p:sldId id="272" r:id="rId18"/>
+    <p:sldId id="273" r:id="rId19"/>
+    <p:sldId id="274" r:id="rId20"/>
+    <p:sldId id="275" r:id="rId21"/>
   </p:sldIdLst>
   <p:notesMasterIdLst>
-    <p:notesMasterId r:id="rId15"/>
+    <p:notesMasterId r:id="rId22"/>
   </p:notesMasterIdLst>
   <p:sldSz cx="9144000" cy="5143500"/>
   <p:notesSz cx="5143500" cy="9144000"/>
@@ -908,6 +915,534 @@
 </p:notes>
 </file>
 
+<file path=ppt/notesSlides/notesSlide14.xml><?xml version="1.0" encoding="utf-8"?>
+<p:notes xmlns:a="http://schemas.openxmlformats.org/drawingml/2006/main" xmlns:r="http://schemas.openxmlformats.org/officeDocument/2006/relationships" xmlns:p="http://schemas.openxmlformats.org/presentationml/2006/main">
+  <p:cSld>
+    <p:spTree>
+      <p:nvGrpSpPr>
+        <p:cNvPr id="1" name=""/>
+        <p:cNvGrpSpPr/>
+        <p:nvPr/>
+      </p:nvGrpSpPr>
+      <p:grpSpPr>
+        <a:xfrm>
+          <a:off x="0" y="0"/>
+          <a:ext cx="0" cy="0"/>
+          <a:chOff x="0" y="0"/>
+          <a:chExt cx="0" cy="0"/>
+        </a:xfrm>
+      </p:grpSpPr>
+      <p:sp>
+        <p:nvSpPr>
+          <p:cNvPr id="2" name="Slide Image Placeholder 1"/>
+          <p:cNvSpPr>
+            <a:spLocks noGrp="1" noRot="1" noChangeAspect="1"/>
+          </p:cNvSpPr>
+          <p:nvPr>
+            <p:ph type="sldImg"/>
+          </p:nvPr>
+        </p:nvSpPr>
+        <p:spPr/>
+      </p:sp>
+      <p:sp>
+        <p:nvSpPr>
+          <p:cNvPr id="3" name="Notes Placeholder 2"/>
+          <p:cNvSpPr>
+            <a:spLocks noGrp="1"/>
+          </p:cNvSpPr>
+          <p:nvPr>
+            <p:ph type="body" idx="1"/>
+          </p:nvPr>
+        </p:nvSpPr>
+        <p:spPr/>
+        <p:txBody>
+          <a:bodyPr/>
+          <a:lstStyle/>
+          <a:p>
+            <a:r>
+              <a:rPr lang="en-US" dirty="0"/>
+              <a:t/>
+            </a:r>
+            <a:endParaRPr lang="en-US" dirty="0"/>
+          </a:p>
+        </p:txBody>
+      </p:sp>
+      <p:sp>
+        <p:nvSpPr>
+          <p:cNvPr id="4" name="Slide Number Placeholder 3"/>
+          <p:cNvSpPr>
+            <a:spLocks noGrp="1"/>
+          </p:cNvSpPr>
+          <p:nvPr>
+            <p:ph type="sldNum" sz="quarter" idx="10"/>
+          </p:nvPr>
+        </p:nvSpPr>
+        <p:spPr/>
+        <p:txBody>
+          <a:bodyPr/>
+          <a:lstStyle/>
+          <a:p>
+            <a:fld id="{F7021451-1387-4CA6-816F-3879F97B5CBC}" type="slidenum">
+              <a:rPr lang="en-US"/>
+              <a:t>14</a:t>
+            </a:fld>
+            <a:endParaRPr lang="en-US"/>
+          </a:p>
+        </p:txBody>
+      </p:sp>
+    </p:spTree>
+    <p:extLst>
+      <p:ext uri="{BB962C8B-B14F-4D97-AF65-F5344CB8AC3E}">
+        <p14:creationId xmlns:p14="http://schemas.microsoft.com/office/powerpoint/2010/main" val="1024086991"/>
+      </p:ext>
+    </p:extLst>
+  </p:cSld>
+  <p:clrMapOvr>
+    <a:masterClrMapping/>
+  </p:clrMapOvr>
+</p:notes>
+</file>
+
+<file path=ppt/notesSlides/notesSlide15.xml><?xml version="1.0" encoding="utf-8"?>
+<p:notes xmlns:a="http://schemas.openxmlformats.org/drawingml/2006/main" xmlns:r="http://schemas.openxmlformats.org/officeDocument/2006/relationships" xmlns:p="http://schemas.openxmlformats.org/presentationml/2006/main">
+  <p:cSld>
+    <p:spTree>
+      <p:nvGrpSpPr>
+        <p:cNvPr id="1" name=""/>
+        <p:cNvGrpSpPr/>
+        <p:nvPr/>
+      </p:nvGrpSpPr>
+      <p:grpSpPr>
+        <a:xfrm>
+          <a:off x="0" y="0"/>
+          <a:ext cx="0" cy="0"/>
+          <a:chOff x="0" y="0"/>
+          <a:chExt cx="0" cy="0"/>
+        </a:xfrm>
+      </p:grpSpPr>
+      <p:sp>
+        <p:nvSpPr>
+          <p:cNvPr id="2" name="Slide Image Placeholder 1"/>
+          <p:cNvSpPr>
+            <a:spLocks noGrp="1" noRot="1" noChangeAspect="1"/>
+          </p:cNvSpPr>
+          <p:nvPr>
+            <p:ph type="sldImg"/>
+          </p:nvPr>
+        </p:nvSpPr>
+        <p:spPr/>
+      </p:sp>
+      <p:sp>
+        <p:nvSpPr>
+          <p:cNvPr id="3" name="Notes Placeholder 2"/>
+          <p:cNvSpPr>
+            <a:spLocks noGrp="1"/>
+          </p:cNvSpPr>
+          <p:nvPr>
+            <p:ph type="body" idx="1"/>
+          </p:nvPr>
+        </p:nvSpPr>
+        <p:spPr/>
+        <p:txBody>
+          <a:bodyPr/>
+          <a:lstStyle/>
+          <a:p>
+            <a:r>
+              <a:rPr lang="en-US" dirty="0"/>
+              <a:t/>
+            </a:r>
+            <a:endParaRPr lang="en-US" dirty="0"/>
+          </a:p>
+        </p:txBody>
+      </p:sp>
+      <p:sp>
+        <p:nvSpPr>
+          <p:cNvPr id="4" name="Slide Number Placeholder 3"/>
+          <p:cNvSpPr>
+            <a:spLocks noGrp="1"/>
+          </p:cNvSpPr>
+          <p:nvPr>
+            <p:ph type="sldNum" sz="quarter" idx="10"/>
+          </p:nvPr>
+        </p:nvSpPr>
+        <p:spPr/>
+        <p:txBody>
+          <a:bodyPr/>
+          <a:lstStyle/>
+          <a:p>
+            <a:fld id="{F7021451-1387-4CA6-816F-3879F97B5CBC}" type="slidenum">
+              <a:rPr lang="en-US"/>
+              <a:t>15</a:t>
+            </a:fld>
+            <a:endParaRPr lang="en-US"/>
+          </a:p>
+        </p:txBody>
+      </p:sp>
+    </p:spTree>
+    <p:extLst>
+      <p:ext uri="{BB962C8B-B14F-4D97-AF65-F5344CB8AC3E}">
+        <p14:creationId xmlns:p14="http://schemas.microsoft.com/office/powerpoint/2010/main" val="1024086991"/>
+      </p:ext>
+    </p:extLst>
+  </p:cSld>
+  <p:clrMapOvr>
+    <a:masterClrMapping/>
+  </p:clrMapOvr>
+</p:notes>
+</file>
+
+<file path=ppt/notesSlides/notesSlide16.xml><?xml version="1.0" encoding="utf-8"?>
+<p:notes xmlns:a="http://schemas.openxmlformats.org/drawingml/2006/main" xmlns:r="http://schemas.openxmlformats.org/officeDocument/2006/relationships" xmlns:p="http://schemas.openxmlformats.org/presentationml/2006/main">
+  <p:cSld>
+    <p:spTree>
+      <p:nvGrpSpPr>
+        <p:cNvPr id="1" name=""/>
+        <p:cNvGrpSpPr/>
+        <p:nvPr/>
+      </p:nvGrpSpPr>
+      <p:grpSpPr>
+        <a:xfrm>
+          <a:off x="0" y="0"/>
+          <a:ext cx="0" cy="0"/>
+          <a:chOff x="0" y="0"/>
+          <a:chExt cx="0" cy="0"/>
+        </a:xfrm>
+      </p:grpSpPr>
+      <p:sp>
+        <p:nvSpPr>
+          <p:cNvPr id="2" name="Slide Image Placeholder 1"/>
+          <p:cNvSpPr>
+            <a:spLocks noGrp="1" noRot="1" noChangeAspect="1"/>
+          </p:cNvSpPr>
+          <p:nvPr>
+            <p:ph type="sldImg"/>
+          </p:nvPr>
+        </p:nvSpPr>
+        <p:spPr/>
+      </p:sp>
+      <p:sp>
+        <p:nvSpPr>
+          <p:cNvPr id="3" name="Notes Placeholder 2"/>
+          <p:cNvSpPr>
+            <a:spLocks noGrp="1"/>
+          </p:cNvSpPr>
+          <p:nvPr>
+            <p:ph type="body" idx="1"/>
+          </p:nvPr>
+        </p:nvSpPr>
+        <p:spPr/>
+        <p:txBody>
+          <a:bodyPr/>
+          <a:lstStyle/>
+          <a:p>
+            <a:r>
+              <a:rPr lang="en-US" dirty="0"/>
+              <a:t/>
+            </a:r>
+            <a:endParaRPr lang="en-US" dirty="0"/>
+          </a:p>
+        </p:txBody>
+      </p:sp>
+      <p:sp>
+        <p:nvSpPr>
+          <p:cNvPr id="4" name="Slide Number Placeholder 3"/>
+          <p:cNvSpPr>
+            <a:spLocks noGrp="1"/>
+          </p:cNvSpPr>
+          <p:nvPr>
+            <p:ph type="sldNum" sz="quarter" idx="10"/>
+          </p:nvPr>
+        </p:nvSpPr>
+        <p:spPr/>
+        <p:txBody>
+          <a:bodyPr/>
+          <a:lstStyle/>
+          <a:p>
+            <a:fld id="{F7021451-1387-4CA6-816F-3879F97B5CBC}" type="slidenum">
+              <a:rPr lang="en-US"/>
+              <a:t>16</a:t>
+            </a:fld>
+            <a:endParaRPr lang="en-US"/>
+          </a:p>
+        </p:txBody>
+      </p:sp>
+    </p:spTree>
+    <p:extLst>
+      <p:ext uri="{BB962C8B-B14F-4D97-AF65-F5344CB8AC3E}">
+        <p14:creationId xmlns:p14="http://schemas.microsoft.com/office/powerpoint/2010/main" val="1024086991"/>
+      </p:ext>
+    </p:extLst>
+  </p:cSld>
+  <p:clrMapOvr>
+    <a:masterClrMapping/>
+  </p:clrMapOvr>
+</p:notes>
+</file>
+
+<file path=ppt/notesSlides/notesSlide17.xml><?xml version="1.0" encoding="utf-8"?>
+<p:notes xmlns:a="http://schemas.openxmlformats.org/drawingml/2006/main" xmlns:r="http://schemas.openxmlformats.org/officeDocument/2006/relationships" xmlns:p="http://schemas.openxmlformats.org/presentationml/2006/main">
+  <p:cSld>
+    <p:spTree>
+      <p:nvGrpSpPr>
+        <p:cNvPr id="1" name=""/>
+        <p:cNvGrpSpPr/>
+        <p:nvPr/>
+      </p:nvGrpSpPr>
+      <p:grpSpPr>
+        <a:xfrm>
+          <a:off x="0" y="0"/>
+          <a:ext cx="0" cy="0"/>
+          <a:chOff x="0" y="0"/>
+          <a:chExt cx="0" cy="0"/>
+        </a:xfrm>
+      </p:grpSpPr>
+      <p:sp>
+        <p:nvSpPr>
+          <p:cNvPr id="2" name="Slide Image Placeholder 1"/>
+          <p:cNvSpPr>
+            <a:spLocks noGrp="1" noRot="1" noChangeAspect="1"/>
+          </p:cNvSpPr>
+          <p:nvPr>
+            <p:ph type="sldImg"/>
+          </p:nvPr>
+        </p:nvSpPr>
+        <p:spPr/>
+      </p:sp>
+      <p:sp>
+        <p:nvSpPr>
+          <p:cNvPr id="3" name="Notes Placeholder 2"/>
+          <p:cNvSpPr>
+            <a:spLocks noGrp="1"/>
+          </p:cNvSpPr>
+          <p:nvPr>
+            <p:ph type="body" idx="1"/>
+          </p:nvPr>
+        </p:nvSpPr>
+        <p:spPr/>
+        <p:txBody>
+          <a:bodyPr/>
+          <a:lstStyle/>
+          <a:p>
+            <a:r>
+              <a:rPr lang="en-US" dirty="0"/>
+              <a:t/>
+            </a:r>
+            <a:endParaRPr lang="en-US" dirty="0"/>
+          </a:p>
+        </p:txBody>
+      </p:sp>
+      <p:sp>
+        <p:nvSpPr>
+          <p:cNvPr id="4" name="Slide Number Placeholder 3"/>
+          <p:cNvSpPr>
+            <a:spLocks noGrp="1"/>
+          </p:cNvSpPr>
+          <p:nvPr>
+            <p:ph type="sldNum" sz="quarter" idx="10"/>
+          </p:nvPr>
+        </p:nvSpPr>
+        <p:spPr/>
+        <p:txBody>
+          <a:bodyPr/>
+          <a:lstStyle/>
+          <a:p>
+            <a:fld id="{F7021451-1387-4CA6-816F-3879F97B5CBC}" type="slidenum">
+              <a:rPr lang="en-US"/>
+              <a:t>17</a:t>
+            </a:fld>
+            <a:endParaRPr lang="en-US"/>
+          </a:p>
+        </p:txBody>
+      </p:sp>
+    </p:spTree>
+    <p:extLst>
+      <p:ext uri="{BB962C8B-B14F-4D97-AF65-F5344CB8AC3E}">
+        <p14:creationId xmlns:p14="http://schemas.microsoft.com/office/powerpoint/2010/main" val="1024086991"/>
+      </p:ext>
+    </p:extLst>
+  </p:cSld>
+  <p:clrMapOvr>
+    <a:masterClrMapping/>
+  </p:clrMapOvr>
+</p:notes>
+</file>
+
+<file path=ppt/notesSlides/notesSlide18.xml><?xml version="1.0" encoding="utf-8"?>
+<p:notes xmlns:a="http://schemas.openxmlformats.org/drawingml/2006/main" xmlns:r="http://schemas.openxmlformats.org/officeDocument/2006/relationships" xmlns:p="http://schemas.openxmlformats.org/presentationml/2006/main">
+  <p:cSld>
+    <p:spTree>
+      <p:nvGrpSpPr>
+        <p:cNvPr id="1" name=""/>
+        <p:cNvGrpSpPr/>
+        <p:nvPr/>
+      </p:nvGrpSpPr>
+      <p:grpSpPr>
+        <a:xfrm>
+          <a:off x="0" y="0"/>
+          <a:ext cx="0" cy="0"/>
+          <a:chOff x="0" y="0"/>
+          <a:chExt cx="0" cy="0"/>
+        </a:xfrm>
+      </p:grpSpPr>
+      <p:sp>
+        <p:nvSpPr>
+          <p:cNvPr id="2" name="Slide Image Placeholder 1"/>
+          <p:cNvSpPr>
+            <a:spLocks noGrp="1" noRot="1" noChangeAspect="1"/>
+          </p:cNvSpPr>
+          <p:nvPr>
+            <p:ph type="sldImg"/>
+          </p:nvPr>
+        </p:nvSpPr>
+        <p:spPr/>
+      </p:sp>
+      <p:sp>
+        <p:nvSpPr>
+          <p:cNvPr id="3" name="Notes Placeholder 2"/>
+          <p:cNvSpPr>
+            <a:spLocks noGrp="1"/>
+          </p:cNvSpPr>
+          <p:nvPr>
+            <p:ph type="body" idx="1"/>
+          </p:nvPr>
+        </p:nvSpPr>
+        <p:spPr/>
+        <p:txBody>
+          <a:bodyPr/>
+          <a:lstStyle/>
+          <a:p>
+            <a:r>
+              <a:rPr lang="en-US" dirty="0"/>
+              <a:t/>
+            </a:r>
+            <a:endParaRPr lang="en-US" dirty="0"/>
+          </a:p>
+        </p:txBody>
+      </p:sp>
+      <p:sp>
+        <p:nvSpPr>
+          <p:cNvPr id="4" name="Slide Number Placeholder 3"/>
+          <p:cNvSpPr>
+            <a:spLocks noGrp="1"/>
+          </p:cNvSpPr>
+          <p:nvPr>
+            <p:ph type="sldNum" sz="quarter" idx="10"/>
+          </p:nvPr>
+        </p:nvSpPr>
+        <p:spPr/>
+        <p:txBody>
+          <a:bodyPr/>
+          <a:lstStyle/>
+          <a:p>
+            <a:fld id="{F7021451-1387-4CA6-816F-3879F97B5CBC}" type="slidenum">
+              <a:rPr lang="en-US"/>
+              <a:t>18</a:t>
+            </a:fld>
+            <a:endParaRPr lang="en-US"/>
+          </a:p>
+        </p:txBody>
+      </p:sp>
+    </p:spTree>
+    <p:extLst>
+      <p:ext uri="{BB962C8B-B14F-4D97-AF65-F5344CB8AC3E}">
+        <p14:creationId xmlns:p14="http://schemas.microsoft.com/office/powerpoint/2010/main" val="1024086991"/>
+      </p:ext>
+    </p:extLst>
+  </p:cSld>
+  <p:clrMapOvr>
+    <a:masterClrMapping/>
+  </p:clrMapOvr>
+</p:notes>
+</file>
+
+<file path=ppt/notesSlides/notesSlide19.xml><?xml version="1.0" encoding="utf-8"?>
+<p:notes xmlns:a="http://schemas.openxmlformats.org/drawingml/2006/main" xmlns:r="http://schemas.openxmlformats.org/officeDocument/2006/relationships" xmlns:p="http://schemas.openxmlformats.org/presentationml/2006/main">
+  <p:cSld>
+    <p:spTree>
+      <p:nvGrpSpPr>
+        <p:cNvPr id="1" name=""/>
+        <p:cNvGrpSpPr/>
+        <p:nvPr/>
+      </p:nvGrpSpPr>
+      <p:grpSpPr>
+        <a:xfrm>
+          <a:off x="0" y="0"/>
+          <a:ext cx="0" cy="0"/>
+          <a:chOff x="0" y="0"/>
+          <a:chExt cx="0" cy="0"/>
+        </a:xfrm>
+      </p:grpSpPr>
+      <p:sp>
+        <p:nvSpPr>
+          <p:cNvPr id="2" name="Slide Image Placeholder 1"/>
+          <p:cNvSpPr>
+            <a:spLocks noGrp="1" noRot="1" noChangeAspect="1"/>
+          </p:cNvSpPr>
+          <p:nvPr>
+            <p:ph type="sldImg"/>
+          </p:nvPr>
+        </p:nvSpPr>
+        <p:spPr/>
+      </p:sp>
+      <p:sp>
+        <p:nvSpPr>
+          <p:cNvPr id="3" name="Notes Placeholder 2"/>
+          <p:cNvSpPr>
+            <a:spLocks noGrp="1"/>
+          </p:cNvSpPr>
+          <p:nvPr>
+            <p:ph type="body" idx="1"/>
+          </p:nvPr>
+        </p:nvSpPr>
+        <p:spPr/>
+        <p:txBody>
+          <a:bodyPr/>
+          <a:lstStyle/>
+          <a:p>
+            <a:r>
+              <a:rPr lang="en-US" dirty="0"/>
+              <a:t/>
+            </a:r>
+            <a:endParaRPr lang="en-US" dirty="0"/>
+          </a:p>
+        </p:txBody>
+      </p:sp>
+      <p:sp>
+        <p:nvSpPr>
+          <p:cNvPr id="4" name="Slide Number Placeholder 3"/>
+          <p:cNvSpPr>
+            <a:spLocks noGrp="1"/>
+          </p:cNvSpPr>
+          <p:nvPr>
+            <p:ph type="sldNum" sz="quarter" idx="10"/>
+          </p:nvPr>
+        </p:nvSpPr>
+        <p:spPr/>
+        <p:txBody>
+          <a:bodyPr/>
+          <a:lstStyle/>
+          <a:p>
+            <a:fld id="{F7021451-1387-4CA6-816F-3879F97B5CBC}" type="slidenum">
+              <a:rPr lang="en-US"/>
+              <a:t>19</a:t>
+            </a:fld>
+            <a:endParaRPr lang="en-US"/>
+          </a:p>
+        </p:txBody>
+      </p:sp>
+    </p:spTree>
+    <p:extLst>
+      <p:ext uri="{BB962C8B-B14F-4D97-AF65-F5344CB8AC3E}">
+        <p14:creationId xmlns:p14="http://schemas.microsoft.com/office/powerpoint/2010/main" val="1024086991"/>
+      </p:ext>
+    </p:extLst>
+  </p:cSld>
+  <p:clrMapOvr>
+    <a:masterClrMapping/>
+  </p:clrMapOvr>
+</p:notes>
+</file>
+
 <file path=ppt/notesSlides/notesSlide2.xml><?xml version="1.0" encoding="utf-8"?>
 <p:notes xmlns:a="http://schemas.openxmlformats.org/drawingml/2006/main" xmlns:r="http://schemas.openxmlformats.org/officeDocument/2006/relationships" xmlns:p="http://schemas.openxmlformats.org/presentationml/2006/main">
   <p:cSld>
@@ -978,6 +1513,94 @@
             <a:fld id="{F7021451-1387-4CA6-816F-3879F97B5CBC}" type="slidenum">
               <a:rPr lang="en-US"/>
               <a:t>2</a:t>
+            </a:fld>
+            <a:endParaRPr lang="en-US"/>
+          </a:p>
+        </p:txBody>
+      </p:sp>
+    </p:spTree>
+    <p:extLst>
+      <p:ext uri="{BB962C8B-B14F-4D97-AF65-F5344CB8AC3E}">
+        <p14:creationId xmlns:p14="http://schemas.microsoft.com/office/powerpoint/2010/main" val="1024086991"/>
+      </p:ext>
+    </p:extLst>
+  </p:cSld>
+  <p:clrMapOvr>
+    <a:masterClrMapping/>
+  </p:clrMapOvr>
+</p:notes>
+</file>
+
+<file path=ppt/notesSlides/notesSlide20.xml><?xml version="1.0" encoding="utf-8"?>
+<p:notes xmlns:a="http://schemas.openxmlformats.org/drawingml/2006/main" xmlns:r="http://schemas.openxmlformats.org/officeDocument/2006/relationships" xmlns:p="http://schemas.openxmlformats.org/presentationml/2006/main">
+  <p:cSld>
+    <p:spTree>
+      <p:nvGrpSpPr>
+        <p:cNvPr id="1" name=""/>
+        <p:cNvGrpSpPr/>
+        <p:nvPr/>
+      </p:nvGrpSpPr>
+      <p:grpSpPr>
+        <a:xfrm>
+          <a:off x="0" y="0"/>
+          <a:ext cx="0" cy="0"/>
+          <a:chOff x="0" y="0"/>
+          <a:chExt cx="0" cy="0"/>
+        </a:xfrm>
+      </p:grpSpPr>
+      <p:sp>
+        <p:nvSpPr>
+          <p:cNvPr id="2" name="Slide Image Placeholder 1"/>
+          <p:cNvSpPr>
+            <a:spLocks noGrp="1" noRot="1" noChangeAspect="1"/>
+          </p:cNvSpPr>
+          <p:nvPr>
+            <p:ph type="sldImg"/>
+          </p:nvPr>
+        </p:nvSpPr>
+        <p:spPr/>
+      </p:sp>
+      <p:sp>
+        <p:nvSpPr>
+          <p:cNvPr id="3" name="Notes Placeholder 2"/>
+          <p:cNvSpPr>
+            <a:spLocks noGrp="1"/>
+          </p:cNvSpPr>
+          <p:nvPr>
+            <p:ph type="body" idx="1"/>
+          </p:nvPr>
+        </p:nvSpPr>
+        <p:spPr/>
+        <p:txBody>
+          <a:bodyPr/>
+          <a:lstStyle/>
+          <a:p>
+            <a:r>
+              <a:rPr lang="en-US" dirty="0"/>
+              <a:t/>
+            </a:r>
+            <a:endParaRPr lang="en-US" dirty="0"/>
+          </a:p>
+        </p:txBody>
+      </p:sp>
+      <p:sp>
+        <p:nvSpPr>
+          <p:cNvPr id="4" name="Slide Number Placeholder 3"/>
+          <p:cNvSpPr>
+            <a:spLocks noGrp="1"/>
+          </p:cNvSpPr>
+          <p:nvPr>
+            <p:ph type="sldNum" sz="quarter" idx="10"/>
+          </p:nvPr>
+        </p:nvSpPr>
+        <p:spPr/>
+        <p:txBody>
+          <a:bodyPr/>
+          <a:lstStyle/>
+          <a:p>
+            <a:fld id="{F7021451-1387-4CA6-816F-3879F97B5CBC}" type="slidenum">
+              <a:rPr lang="en-US"/>
+              <a:t>20</a:t>
             </a:fld>
             <a:endParaRPr lang="en-US"/>
           </a:p>
@@ -2235,102 +2858,6 @@
         </p:nvSpPr>
         <p:spPr>
           <a:xfrm>
-            <a:off x="406301" y="1223963"/>
-            <a:ext cx="8498026" cy="274290"/>
-          </a:xfrm>
-          <a:prstGeom prst="rect">
-            <a:avLst/>
-          </a:prstGeom>
-          <a:noFill/>
-          <a:ln/>
-        </p:spPr>
-        <p:txBody>
-          <a:bodyPr wrap="square" lIns="0" tIns="0" rIns="0" bIns="0" rtlCol="0" anchor="t"/>
-          <a:lstStyle/>
-          <a:p>
-            <a:pPr algn="l" indent="0" marL="0">
-              <a:lnSpc>
-                <a:spcPts val="2160"/>
-              </a:lnSpc>
-              <a:spcBef>
-                <a:spcPts val="600"/>
-              </a:spcBef>
-              <a:spcAft>
-                <a:spcPts val="800"/>
-              </a:spcAft>
-              <a:buNone/>
-            </a:pPr>
-            <a:r>
-              <a:rPr lang="en-US" sz="1800" b="1" dirty="0">
-                <a:solidFill>
-                  <a:srgbClr val="FE4447"/>
-                </a:solidFill>
-                <a:latin typeface="Georgia" pitchFamily="34" charset="0"/>
-                <a:ea typeface="Georgia" pitchFamily="34" charset="-122"/>
-                <a:cs typeface="Georgia" pitchFamily="34" charset="-120"/>
-              </a:rPr>
-              <a:t>Learning objective</a:t>
-            </a:r>
-            <a:endParaRPr lang="en-US" sz="1800" dirty="0"/>
-          </a:p>
-        </p:txBody>
-      </p:sp>
-      <p:sp>
-        <p:nvSpPr>
-          <p:cNvPr id="6" name="Text 4"/>
-          <p:cNvSpPr/>
-          <p:nvPr/>
-        </p:nvSpPr>
-        <p:spPr>
-          <a:xfrm>
-            <a:off x="406301" y="1637854"/>
-            <a:ext cx="8498026" cy="426541"/>
-          </a:xfrm>
-          <a:prstGeom prst="rect">
-            <a:avLst/>
-          </a:prstGeom>
-          <a:noFill/>
-          <a:ln/>
-        </p:spPr>
-        <p:txBody>
-          <a:bodyPr wrap="square" lIns="0" tIns="0" rIns="0" bIns="0" rtlCol="0" anchor="t"/>
-          <a:lstStyle/>
-          <a:p>
-            <a:pPr algn="l" indent="0" marL="0">
-              <a:lnSpc>
-                <a:spcPts val="1680"/>
-              </a:lnSpc>
-              <a:spcBef>
-                <a:spcPts val="300"/>
-              </a:spcBef>
-              <a:spcAft>
-                <a:spcPts val="300"/>
-              </a:spcAft>
-              <a:buNone/>
-            </a:pPr>
-            <a:r>
-              <a:rPr lang="en-US" sz="1200" dirty="0">
-                <a:solidFill>
-                  <a:srgbClr val="1C2833"/>
-                </a:solidFill>
-                <a:latin typeface="Arial" pitchFamily="34" charset="0"/>
-                <a:ea typeface="Arial" pitchFamily="34" charset="-122"/>
-                <a:cs typeface="Arial" pitchFamily="34" charset="-120"/>
-              </a:rPr>
-              <a:t>By the end of this lesson, students will compute any 3-digit × 11 product using the running "neighbour-sum" pattern, including carry cases, and will complete Part A of the formative quiz.</a:t>
-            </a:r>
-            <a:endParaRPr lang="en-US" sz="1200" dirty="0"/>
-          </a:p>
-        </p:txBody>
-      </p:sp>
-      <p:sp>
-        <p:nvSpPr>
-          <p:cNvPr id="7" name="Text 5"/>
-          <p:cNvSpPr/>
-          <p:nvPr/>
-        </p:nvSpPr>
-        <p:spPr>
-          <a:xfrm>
             <a:off x="406301" y="4434929"/>
             <a:ext cx="8498026" cy="213271"/>
           </a:xfrm>
@@ -2475,7 +3002,7 @@
                 <a:ea typeface="Georgia" pitchFamily="34" charset="-122"/>
                 <a:cs typeface="Georgia" pitchFamily="34" charset="-120"/>
               </a:rPr>
-              <a:t>Homework</a:t>
+              <a:t>Core (18 min) — The 3-digit pattern (cont.)</a:t>
             </a:r>
             <a:endParaRPr lang="en-US" sz="1800" dirty="0"/>
           </a:p>
@@ -2489,8 +3016,8 @@
         </p:nvSpPr>
         <p:spPr>
           <a:xfrm>
-            <a:off x="406301" y="870942"/>
-            <a:ext cx="8498026" cy="213271"/>
+            <a:off x="634901" y="883593"/>
+            <a:ext cx="8102798" cy="281880"/>
           </a:xfrm>
           <a:prstGeom prst="rect">
             <a:avLst/>
@@ -2502,20 +3029,18 @@
           <a:bodyPr wrap="square" lIns="0" tIns="0" rIns="0" bIns="0" rtlCol="0" anchor="t"/>
           <a:lstStyle/>
           <a:p>
-            <a:pPr algn="l" indent="0" marL="0">
-              <a:lnSpc>
-                <a:spcPts val="1680"/>
-              </a:lnSpc>
-              <a:spcBef>
-                <a:spcPts val="300"/>
-              </a:spcBef>
-              <a:spcAft>
-                <a:spcPts val="300"/>
-              </a:spcAft>
-              <a:buNone/>
-            </a:pPr>
-            <a:r>
-              <a:rPr lang="en-US" sz="1200" dirty="0">
+            <a:pPr algn="l" marL="342900" indent="-342900">
+              <a:lnSpc>
+                <a:spcPts val="1620"/>
+              </a:lnSpc>
+              <a:spcAft>
+                <a:spcPts val="300"/>
+              </a:spcAft>
+              <a:buSzPct val="100000"/>
+              <a:buChar char="•"/>
+            </a:pPr>
+            <a:r>
+              <a:rPr lang="en-US" sz="1200" b="1" dirty="0">
                 <a:solidFill>
                   <a:srgbClr val="1C2833"/>
                 </a:solidFill>
@@ -2523,7 +3048,7 @@
                 <a:ea typeface="Arial" pitchFamily="34" charset="-122"/>
                 <a:cs typeface="Arial" pitchFamily="34" charset="-120"/>
               </a:rPr>
-              <a:t>– Solve 10 three-digit × 11 problems on the back of today's worksheet. Time yourself — goal: under 90 seconds total.</a:t>
+              <a:t>Worked example with carry: 567 × 11.</a:t>
             </a:r>
             <a:endParaRPr lang="en-US" sz="1200" dirty="0"/>
           </a:p>
@@ -2532,6 +3057,279 @@
       <p:sp>
         <p:nvSpPr>
           <p:cNvPr id="5" name="Text 3"/>
+          <p:cNvSpPr/>
+          <p:nvPr/>
+        </p:nvSpPr>
+        <p:spPr>
+          <a:xfrm>
+            <a:off x="406301" y="1266974"/>
+            <a:ext cx="8331398" cy="777627"/>
+          </a:xfrm>
+          <a:prstGeom prst="rect">
+            <a:avLst/>
+          </a:prstGeom>
+          <a:solidFill>
+            <a:srgbClr val="F4F8F9"/>
+          </a:solidFill>
+          <a:ln/>
+        </p:spPr>
+        <p:txBody>
+          <a:bodyPr wrap="square" rtlCol="0" anchor="ctr"/>
+          <a:lstStyle/>
+          <a:p>
+            <a:pPr indent="0" marL="0">
+              <a:buNone/>
+            </a:pPr>
+            <a:endParaRPr lang="en-US" dirty="0"/>
+          </a:p>
+        </p:txBody>
+      </p:sp>
+      <p:sp>
+        <p:nvSpPr>
+          <p:cNvPr id="6" name="Shape 4"/>
+          <p:cNvSpPr/>
+          <p:nvPr/>
+        </p:nvSpPr>
+        <p:spPr>
+          <a:xfrm>
+            <a:off x="430113" y="1266974"/>
+            <a:ext cx="0" cy="777627"/>
+          </a:xfrm>
+          <a:prstGeom prst="line">
+            <a:avLst/>
+          </a:prstGeom>
+          <a:noFill/>
+          <a:ln w="47625">
+            <a:solidFill>
+              <a:srgbClr val="277884"/>
+            </a:solidFill>
+            <a:prstDash val="solid"/>
+          </a:ln>
+        </p:spPr>
+      </p:sp>
+      <p:sp>
+        <p:nvSpPr>
+          <p:cNvPr id="7" name="Text 5"/>
+          <p:cNvSpPr/>
+          <p:nvPr/>
+        </p:nvSpPr>
+        <p:spPr>
+          <a:xfrm>
+            <a:off x="631627" y="1393924"/>
+            <a:ext cx="8086939" cy="174575"/>
+          </a:xfrm>
+          <a:prstGeom prst="rect">
+            <a:avLst/>
+          </a:prstGeom>
+          <a:noFill/>
+          <a:ln/>
+        </p:spPr>
+        <p:txBody>
+          <a:bodyPr wrap="square" lIns="0" tIns="0" rIns="0" bIns="0" rtlCol="0" anchor="t"/>
+          <a:lstStyle/>
+          <a:p>
+            <a:pPr algn="l" indent="0" marL="0">
+              <a:lnSpc>
+                <a:spcPts val="1375"/>
+              </a:lnSpc>
+              <a:buNone/>
+            </a:pPr>
+            <a:r>
+              <a:rPr lang="en-US" sz="1100" dirty="0">
+                <a:solidFill>
+                  <a:srgbClr val="1C2833"/>
+                </a:solidFill>
+                <a:latin typeface="Courier New" pitchFamily="34" charset="0"/>
+                <a:ea typeface="Courier New" pitchFamily="34" charset="-122"/>
+                <a:cs typeface="Courier New" pitchFamily="34" charset="-120"/>
+              </a:rPr>
+              <a:t>5  _  _  7</a:t>
+            </a:r>
+            <a:endParaRPr lang="en-US" sz="1100" dirty="0"/>
+          </a:p>
+        </p:txBody>
+      </p:sp>
+      <p:sp>
+        <p:nvSpPr>
+          <p:cNvPr id="8" name="Text 6"/>
+          <p:cNvSpPr/>
+          <p:nvPr/>
+        </p:nvSpPr>
+        <p:spPr>
+          <a:xfrm>
+            <a:off x="631627" y="1568500"/>
+            <a:ext cx="8086939" cy="174575"/>
+          </a:xfrm>
+          <a:prstGeom prst="rect">
+            <a:avLst/>
+          </a:prstGeom>
+          <a:noFill/>
+          <a:ln/>
+        </p:spPr>
+        <p:txBody>
+          <a:bodyPr wrap="square" lIns="0" tIns="0" rIns="0" bIns="0" rtlCol="0" anchor="t"/>
+          <a:lstStyle/>
+          <a:p>
+            <a:pPr algn="l" indent="0" marL="0">
+              <a:lnSpc>
+                <a:spcPts val="1375"/>
+              </a:lnSpc>
+              <a:buNone/>
+            </a:pPr>
+            <a:r>
+              <a:rPr lang="en-US" sz="1100" dirty="0">
+                <a:solidFill>
+                  <a:srgbClr val="1C2833"/>
+                </a:solidFill>
+                <a:latin typeface="Courier New" pitchFamily="34" charset="0"/>
+                <a:ea typeface="Courier New" pitchFamily="34" charset="-122"/>
+                <a:cs typeface="Courier New" pitchFamily="34" charset="-120"/>
+              </a:rPr>
+              <a:t>5 + 6 = 11   ← carry case</a:t>
+            </a:r>
+            <a:endParaRPr lang="en-US" sz="1100" dirty="0"/>
+          </a:p>
+        </p:txBody>
+      </p:sp>
+      <p:sp>
+        <p:nvSpPr>
+          <p:cNvPr id="9" name="Text 7"/>
+          <p:cNvSpPr/>
+          <p:nvPr/>
+        </p:nvSpPr>
+        <p:spPr>
+          <a:xfrm>
+            <a:off x="631627" y="1743075"/>
+            <a:ext cx="8086939" cy="174575"/>
+          </a:xfrm>
+          <a:prstGeom prst="rect">
+            <a:avLst/>
+          </a:prstGeom>
+          <a:noFill/>
+          <a:ln/>
+        </p:spPr>
+        <p:txBody>
+          <a:bodyPr wrap="square" lIns="0" tIns="0" rIns="0" bIns="0" rtlCol="0" anchor="t"/>
+          <a:lstStyle/>
+          <a:p>
+            <a:pPr algn="l" indent="0" marL="0">
+              <a:lnSpc>
+                <a:spcPts val="1375"/>
+              </a:lnSpc>
+              <a:buNone/>
+            </a:pPr>
+            <a:r>
+              <a:rPr lang="en-US" sz="1100" dirty="0">
+                <a:solidFill>
+                  <a:srgbClr val="1C2833"/>
+                </a:solidFill>
+                <a:latin typeface="Courier New" pitchFamily="34" charset="0"/>
+                <a:ea typeface="Courier New" pitchFamily="34" charset="-122"/>
+                <a:cs typeface="Courier New" pitchFamily="34" charset="-120"/>
+              </a:rPr>
+              <a:t>6 + 7 = 13   ← carry case</a:t>
+            </a:r>
+            <a:endParaRPr lang="en-US" sz="1100" dirty="0"/>
+          </a:p>
+        </p:txBody>
+      </p:sp>
+      <p:sp>
+        <p:nvSpPr>
+          <p:cNvPr id="10" name="Text 8"/>
+          <p:cNvSpPr/>
+          <p:nvPr/>
+        </p:nvSpPr>
+        <p:spPr>
+          <a:xfrm>
+            <a:off x="406301" y="2133451"/>
+            <a:ext cx="8498026" cy="213271"/>
+          </a:xfrm>
+          <a:prstGeom prst="rect">
+            <a:avLst/>
+          </a:prstGeom>
+          <a:noFill/>
+          <a:ln/>
+        </p:spPr>
+        <p:txBody>
+          <a:bodyPr wrap="square" lIns="0" tIns="0" rIns="0" bIns="0" rtlCol="0" anchor="t"/>
+          <a:lstStyle/>
+          <a:p>
+            <a:pPr algn="l" indent="0" marL="0">
+              <a:lnSpc>
+                <a:spcPts val="1680"/>
+              </a:lnSpc>
+              <a:spcBef>
+                <a:spcPts val="300"/>
+              </a:spcBef>
+              <a:spcAft>
+                <a:spcPts val="300"/>
+              </a:spcAft>
+              <a:buNone/>
+            </a:pPr>
+            <a:r>
+              <a:rPr lang="en-US" sz="1200" dirty="0">
+                <a:solidFill>
+                  <a:srgbClr val="1C2833"/>
+                </a:solidFill>
+                <a:latin typeface="Arial" pitchFamily="34" charset="0"/>
+                <a:ea typeface="Arial" pitchFamily="34" charset="-122"/>
+                <a:cs typeface="Arial" pitchFamily="34" charset="-120"/>
+              </a:rPr>
+              <a:t>Strategy: work </a:t>
+            </a:r>
+            <a:pPr algn="l" indent="0" marL="0">
+              <a:lnSpc>
+                <a:spcPts val="1680"/>
+              </a:lnSpc>
+              <a:spcBef>
+                <a:spcPts val="300"/>
+              </a:spcBef>
+              <a:spcAft>
+                <a:spcPts val="300"/>
+              </a:spcAft>
+              <a:buNone/>
+            </a:pPr>
+            <a:r>
+              <a:rPr lang="en-US" sz="1200" b="1" dirty="0">
+                <a:solidFill>
+                  <a:srgbClr val="1C2833"/>
+                </a:solidFill>
+                <a:latin typeface="Arial" pitchFamily="34" charset="0"/>
+                <a:ea typeface="Arial" pitchFamily="34" charset="-122"/>
+                <a:cs typeface="Arial" pitchFamily="34" charset="-120"/>
+              </a:rPr>
+              <a:t>right to left</a:t>
+            </a:r>
+            <a:pPr algn="l" indent="0" marL="0">
+              <a:lnSpc>
+                <a:spcPts val="1680"/>
+              </a:lnSpc>
+              <a:spcBef>
+                <a:spcPts val="300"/>
+              </a:spcBef>
+              <a:spcAft>
+                <a:spcPts val="300"/>
+              </a:spcAft>
+              <a:buNone/>
+            </a:pPr>
+            <a:r>
+              <a:rPr lang="en-US" sz="1200" dirty="0">
+                <a:solidFill>
+                  <a:srgbClr val="1C2833"/>
+                </a:solidFill>
+                <a:latin typeface="Arial" pitchFamily="34" charset="0"/>
+                <a:ea typeface="Arial" pitchFamily="34" charset="-122"/>
+                <a:cs typeface="Arial" pitchFamily="34" charset="-120"/>
+              </a:rPr>
+              <a:t> to handle carries properly.</a:t>
+            </a:r>
+            <a:endParaRPr lang="en-US" sz="1200" dirty="0"/>
+          </a:p>
+        </p:txBody>
+      </p:sp>
+      <p:sp>
+        <p:nvSpPr>
+          <p:cNvPr id="11" name="Text 9"/>
           <p:cNvSpPr/>
           <p:nvPr/>
         </p:nvSpPr>
@@ -2681,7 +3479,7 @@
                 <a:ea typeface="Georgia" pitchFamily="34" charset="-122"/>
                 <a:cs typeface="Georgia" pitchFamily="34" charset="-120"/>
               </a:rPr>
-              <a:t>Differentiation</a:t>
+              <a:t>Core (18 min) — The 3-digit pattern (cont.)</a:t>
             </a:r>
             <a:endParaRPr lang="en-US" sz="1800" dirty="0"/>
           </a:p>
@@ -2695,31 +3493,296 @@
         </p:nvSpPr>
         <p:spPr>
           <a:xfrm>
-            <a:off x="634901" y="883593"/>
-            <a:ext cx="8102798" cy="525661"/>
-          </a:xfrm>
-          <a:prstGeom prst="rect">
+            <a:off x="406301" y="883593"/>
+            <a:ext cx="8331398" cy="1126778"/>
+          </a:xfrm>
+          <a:prstGeom prst="rect">
+            <a:avLst/>
+          </a:prstGeom>
+          <a:solidFill>
+            <a:srgbClr val="F4F8F9"/>
+          </a:solidFill>
+          <a:ln/>
+        </p:spPr>
+        <p:txBody>
+          <a:bodyPr wrap="square" rtlCol="0" anchor="ctr"/>
+          <a:lstStyle/>
+          <a:p>
+            <a:pPr indent="0" marL="0">
+              <a:buNone/>
+            </a:pPr>
+            <a:endParaRPr lang="en-US" dirty="0"/>
+          </a:p>
+        </p:txBody>
+      </p:sp>
+      <p:sp>
+        <p:nvSpPr>
+          <p:cNvPr id="5" name="Shape 3"/>
+          <p:cNvSpPr/>
+          <p:nvPr/>
+        </p:nvSpPr>
+        <p:spPr>
+          <a:xfrm>
+            <a:off x="430113" y="883593"/>
+            <a:ext cx="0" cy="1126778"/>
+          </a:xfrm>
+          <a:prstGeom prst="line">
             <a:avLst/>
           </a:prstGeom>
           <a:noFill/>
+          <a:ln w="47625">
+            <a:solidFill>
+              <a:srgbClr val="277884"/>
+            </a:solidFill>
+            <a:prstDash val="solid"/>
+          </a:ln>
+        </p:spPr>
+      </p:sp>
+      <p:sp>
+        <p:nvSpPr>
+          <p:cNvPr id="6" name="Text 4"/>
+          <p:cNvSpPr/>
+          <p:nvPr/>
+        </p:nvSpPr>
+        <p:spPr>
+          <a:xfrm>
+            <a:off x="631627" y="1010543"/>
+            <a:ext cx="8086939" cy="174575"/>
+          </a:xfrm>
+          <a:prstGeom prst="rect">
+            <a:avLst/>
+          </a:prstGeom>
+          <a:noFill/>
           <a:ln/>
         </p:spPr>
         <p:txBody>
           <a:bodyPr wrap="square" lIns="0" tIns="0" rIns="0" bIns="0" rtlCol="0" anchor="t"/>
           <a:lstStyle/>
           <a:p>
-            <a:pPr algn="l" marL="342900" indent="-342900">
-              <a:lnSpc>
-                <a:spcPts val="1620"/>
-              </a:lnSpc>
-              <a:spcAft>
-                <a:spcPts val="300"/>
-              </a:spcAft>
-              <a:buSzPct val="100000"/>
-              <a:buChar char="•"/>
-            </a:pPr>
-            <a:r>
-              <a:rPr lang="en-US" sz="1200" b="1" dirty="0">
+            <a:pPr algn="l" indent="0" marL="0">
+              <a:lnSpc>
+                <a:spcPts val="1375"/>
+              </a:lnSpc>
+              <a:buNone/>
+            </a:pPr>
+            <a:r>
+              <a:rPr lang="en-US" sz="1100" dirty="0">
+                <a:solidFill>
+                  <a:srgbClr val="1C2833"/>
+                </a:solidFill>
+                <a:latin typeface="Courier New" pitchFamily="34" charset="0"/>
+                <a:ea typeface="Courier New" pitchFamily="34" charset="-122"/>
+                <a:cs typeface="Courier New" pitchFamily="34" charset="-120"/>
+              </a:rPr>
+              <a:t>Units: 7.</a:t>
+            </a:r>
+            <a:endParaRPr lang="en-US" sz="1100" dirty="0"/>
+          </a:p>
+        </p:txBody>
+      </p:sp>
+      <p:sp>
+        <p:nvSpPr>
+          <p:cNvPr id="7" name="Text 5"/>
+          <p:cNvSpPr/>
+          <p:nvPr/>
+        </p:nvSpPr>
+        <p:spPr>
+          <a:xfrm>
+            <a:off x="631627" y="1185118"/>
+            <a:ext cx="8086939" cy="174575"/>
+          </a:xfrm>
+          <a:prstGeom prst="rect">
+            <a:avLst/>
+          </a:prstGeom>
+          <a:noFill/>
+          <a:ln/>
+        </p:spPr>
+        <p:txBody>
+          <a:bodyPr wrap="square" lIns="0" tIns="0" rIns="0" bIns="0" rtlCol="0" anchor="t"/>
+          <a:lstStyle/>
+          <a:p>
+            <a:pPr algn="l" indent="0" marL="0">
+              <a:lnSpc>
+                <a:spcPts val="1375"/>
+              </a:lnSpc>
+              <a:buNone/>
+            </a:pPr>
+            <a:r>
+              <a:rPr lang="en-US" sz="1100" dirty="0">
+                <a:solidFill>
+                  <a:srgbClr val="1C2833"/>
+                </a:solidFill>
+                <a:latin typeface="Courier New" pitchFamily="34" charset="0"/>
+                <a:ea typeface="Courier New" pitchFamily="34" charset="-122"/>
+                <a:cs typeface="Courier New" pitchFamily="34" charset="-120"/>
+              </a:rPr>
+              <a:t>Tens: b + c = 6 + 7 = 13. Write 3, carry 1.</a:t>
+            </a:r>
+            <a:endParaRPr lang="en-US" sz="1100" dirty="0"/>
+          </a:p>
+        </p:txBody>
+      </p:sp>
+      <p:sp>
+        <p:nvSpPr>
+          <p:cNvPr id="8" name="Text 6"/>
+          <p:cNvSpPr/>
+          <p:nvPr/>
+        </p:nvSpPr>
+        <p:spPr>
+          <a:xfrm>
+            <a:off x="631627" y="1359694"/>
+            <a:ext cx="8086939" cy="174575"/>
+          </a:xfrm>
+          <a:prstGeom prst="rect">
+            <a:avLst/>
+          </a:prstGeom>
+          <a:noFill/>
+          <a:ln/>
+        </p:spPr>
+        <p:txBody>
+          <a:bodyPr wrap="square" lIns="0" tIns="0" rIns="0" bIns="0" rtlCol="0" anchor="t"/>
+          <a:lstStyle/>
+          <a:p>
+            <a:pPr algn="l" indent="0" marL="0">
+              <a:lnSpc>
+                <a:spcPts val="1375"/>
+              </a:lnSpc>
+              <a:buNone/>
+            </a:pPr>
+            <a:r>
+              <a:rPr lang="en-US" sz="1100" dirty="0">
+                <a:solidFill>
+                  <a:srgbClr val="1C2833"/>
+                </a:solidFill>
+                <a:latin typeface="Courier New" pitchFamily="34" charset="0"/>
+                <a:ea typeface="Courier New" pitchFamily="34" charset="-122"/>
+                <a:cs typeface="Courier New" pitchFamily="34" charset="-120"/>
+              </a:rPr>
+              <a:t>Hundreds: a + b + carry = 5 + 6 + 1 = 12. Write 2, carry 1.</a:t>
+            </a:r>
+            <a:endParaRPr lang="en-US" sz="1100" dirty="0"/>
+          </a:p>
+        </p:txBody>
+      </p:sp>
+      <p:sp>
+        <p:nvSpPr>
+          <p:cNvPr id="9" name="Text 7"/>
+          <p:cNvSpPr/>
+          <p:nvPr/>
+        </p:nvSpPr>
+        <p:spPr>
+          <a:xfrm>
+            <a:off x="631627" y="1534269"/>
+            <a:ext cx="8086939" cy="174575"/>
+          </a:xfrm>
+          <a:prstGeom prst="rect">
+            <a:avLst/>
+          </a:prstGeom>
+          <a:noFill/>
+          <a:ln/>
+        </p:spPr>
+        <p:txBody>
+          <a:bodyPr wrap="square" lIns="0" tIns="0" rIns="0" bIns="0" rtlCol="0" anchor="t"/>
+          <a:lstStyle/>
+          <a:p>
+            <a:pPr algn="l" indent="0" marL="0">
+              <a:lnSpc>
+                <a:spcPts val="1375"/>
+              </a:lnSpc>
+              <a:buNone/>
+            </a:pPr>
+            <a:r>
+              <a:rPr lang="en-US" sz="1100" dirty="0">
+                <a:solidFill>
+                  <a:srgbClr val="1C2833"/>
+                </a:solidFill>
+                <a:latin typeface="Courier New" pitchFamily="34" charset="0"/>
+                <a:ea typeface="Courier New" pitchFamily="34" charset="-122"/>
+                <a:cs typeface="Courier New" pitchFamily="34" charset="-120"/>
+              </a:rPr>
+              <a:t>Thousands: a + carry = 5 + 1 = 6.</a:t>
+            </a:r>
+            <a:endParaRPr lang="en-US" sz="1100" dirty="0"/>
+          </a:p>
+        </p:txBody>
+      </p:sp>
+      <p:sp>
+        <p:nvSpPr>
+          <p:cNvPr id="10" name="Text 8"/>
+          <p:cNvSpPr/>
+          <p:nvPr/>
+        </p:nvSpPr>
+        <p:spPr>
+          <a:xfrm>
+            <a:off x="631627" y="1708845"/>
+            <a:ext cx="8086939" cy="174575"/>
+          </a:xfrm>
+          <a:prstGeom prst="rect">
+            <a:avLst/>
+          </a:prstGeom>
+          <a:noFill/>
+          <a:ln/>
+        </p:spPr>
+        <p:txBody>
+          <a:bodyPr wrap="square" lIns="0" tIns="0" rIns="0" bIns="0" rtlCol="0" anchor="t"/>
+          <a:lstStyle/>
+          <a:p>
+            <a:pPr algn="l" indent="0" marL="0">
+              <a:lnSpc>
+                <a:spcPts val="1375"/>
+              </a:lnSpc>
+              <a:buNone/>
+            </a:pPr>
+            <a:r>
+              <a:rPr lang="en-US" sz="1100" dirty="0">
+                <a:solidFill>
+                  <a:srgbClr val="1C2833"/>
+                </a:solidFill>
+                <a:latin typeface="Courier New" pitchFamily="34" charset="0"/>
+                <a:ea typeface="Courier New" pitchFamily="34" charset="-122"/>
+                <a:cs typeface="Courier New" pitchFamily="34" charset="-120"/>
+              </a:rPr>
+              <a:t>Answer:    6  2  3  7   →   6237.</a:t>
+            </a:r>
+            <a:endParaRPr lang="en-US" sz="1100" dirty="0"/>
+          </a:p>
+        </p:txBody>
+      </p:sp>
+      <p:sp>
+        <p:nvSpPr>
+          <p:cNvPr id="11" name="Text 9"/>
+          <p:cNvSpPr/>
+          <p:nvPr/>
+        </p:nvSpPr>
+        <p:spPr>
+          <a:xfrm>
+            <a:off x="406301" y="2099221"/>
+            <a:ext cx="8498026" cy="213271"/>
+          </a:xfrm>
+          <a:prstGeom prst="rect">
+            <a:avLst/>
+          </a:prstGeom>
+          <a:noFill/>
+          <a:ln/>
+        </p:spPr>
+        <p:txBody>
+          <a:bodyPr wrap="square" lIns="0" tIns="0" rIns="0" bIns="0" rtlCol="0" anchor="t"/>
+          <a:lstStyle/>
+          <a:p>
+            <a:pPr algn="l" indent="0" marL="0">
+              <a:lnSpc>
+                <a:spcPts val="1680"/>
+              </a:lnSpc>
+              <a:spcBef>
+                <a:spcPts val="300"/>
+              </a:spcBef>
+              <a:spcAft>
+                <a:spcPts val="300"/>
+              </a:spcAft>
+              <a:buNone/>
+            </a:pPr>
+            <a:r>
+              <a:rPr lang="en-US" sz="1200" dirty="0">
                 <a:solidFill>
                   <a:srgbClr val="1C2833"/>
                 </a:solidFill>
@@ -2727,19 +3790,22 @@
                 <a:ea typeface="Arial" pitchFamily="34" charset="-122"/>
                 <a:cs typeface="Arial" pitchFamily="34" charset="-120"/>
               </a:rPr>
-              <a:t>Tier up:</a:t>
-            </a:r>
-            <a:pPr algn="l" indent="0" marL="0">
-              <a:lnSpc>
-                <a:spcPts val="1620"/>
-              </a:lnSpc>
-              <a:spcAft>
-                <a:spcPts val="300"/>
-              </a:spcAft>
-              <a:buNone/>
-            </a:pPr>
-            <a:r>
-              <a:rPr lang="en-US" sz="1200" dirty="0">
+              <a:t>Check: 567 × 11 = 5670 + 567 = </a:t>
+            </a:r>
+            <a:pPr algn="l" indent="0" marL="0">
+              <a:lnSpc>
+                <a:spcPts val="1680"/>
+              </a:lnSpc>
+              <a:spcBef>
+                <a:spcPts val="300"/>
+              </a:spcBef>
+              <a:spcAft>
+                <a:spcPts val="300"/>
+              </a:spcAft>
+              <a:buNone/>
+            </a:pPr>
+            <a:r>
+              <a:rPr lang="en-US" sz="1200" b="1" dirty="0">
                 <a:solidFill>
                   <a:srgbClr val="1C2833"/>
                 </a:solidFill>
@@ -2747,23 +3813,22 @@
                 <a:ea typeface="Arial" pitchFamily="34" charset="-122"/>
                 <a:cs typeface="Arial" pitchFamily="34" charset="-120"/>
               </a:rPr>
-              <a:t> Try a 4-digit × 11 problem. Derive the pattern first (the identity will give you 5 terms). Test on 2345 × 11.</a:t>
-            </a:r>
-            <a:endParaRPr lang="en-US" sz="1200" dirty="0"/>
-          </a:p>
-          <a:p>
-            <a:pPr algn="l" marL="342900" indent="-342900">
-              <a:lnSpc>
-                <a:spcPts val="1620"/>
-              </a:lnSpc>
-              <a:spcAft>
-                <a:spcPts val="300"/>
-              </a:spcAft>
-              <a:buSzPct val="100000"/>
-              <a:buChar char="•"/>
-            </a:pPr>
-            <a:r>
-              <a:rPr lang="en-US" sz="1200" b="1" dirty="0">
+              <a:t>6237</a:t>
+            </a:r>
+            <a:pPr algn="l" indent="0" marL="0">
+              <a:lnSpc>
+                <a:spcPts val="1680"/>
+              </a:lnSpc>
+              <a:spcBef>
+                <a:spcPts val="300"/>
+              </a:spcBef>
+              <a:spcAft>
+                <a:spcPts val="300"/>
+              </a:spcAft>
+              <a:buNone/>
+            </a:pPr>
+            <a:r>
+              <a:rPr lang="en-US" sz="1200" dirty="0">
                 <a:solidFill>
                   <a:srgbClr val="1C2833"/>
                 </a:solidFill>
@@ -2771,27 +3836,7 @@
                 <a:ea typeface="Arial" pitchFamily="34" charset="-122"/>
                 <a:cs typeface="Arial" pitchFamily="34" charset="-120"/>
               </a:rPr>
-              <a:t>Tier down:</a:t>
-            </a:r>
-            <a:pPr algn="l" indent="0" marL="0">
-              <a:lnSpc>
-                <a:spcPts val="1620"/>
-              </a:lnSpc>
-              <a:spcAft>
-                <a:spcPts val="300"/>
-              </a:spcAft>
-              <a:buNone/>
-            </a:pPr>
-            <a:r>
-              <a:rPr lang="en-US" sz="1200" dirty="0">
-                <a:solidFill>
-                  <a:srgbClr val="1C2833"/>
-                </a:solidFill>
-                <a:latin typeface="Arial" pitchFamily="34" charset="0"/>
-                <a:ea typeface="Arial" pitchFamily="34" charset="-122"/>
-                <a:cs typeface="Arial" pitchFamily="34" charset="-120"/>
-              </a:rPr>
-              <a:t> Stay on 2-digit × 11 problems with carries; build speed there before adding the 3-digit layer.</a:t>
+              <a:t>. ✓</a:t>
             </a:r>
             <a:endParaRPr lang="en-US" sz="1200" dirty="0"/>
           </a:p>
@@ -2799,7 +3844,7 @@
       </p:sp>
       <p:sp>
         <p:nvSpPr>
-          <p:cNvPr id="5" name="Text 3"/>
+          <p:cNvPr id="12" name="Text 10"/>
           <p:cNvSpPr/>
           <p:nvPr/>
         </p:nvSpPr>
@@ -2949,7 +3994,7 @@
                 <a:ea typeface="Georgia" pitchFamily="34" charset="-122"/>
                 <a:cs typeface="Georgia" pitchFamily="34" charset="-120"/>
               </a:rPr>
-              <a:t>Teacher notes</a:t>
+              <a:t>Core (18 min) — The 3-digit pattern (cont.)</a:t>
             </a:r>
             <a:endParaRPr lang="en-US" sz="1800" dirty="0"/>
           </a:p>
@@ -2963,8 +4008,8 @@
         </p:nvSpPr>
         <p:spPr>
           <a:xfrm>
-            <a:off x="406301" y="870942"/>
-            <a:ext cx="8498026" cy="853083"/>
+            <a:off x="634901" y="883593"/>
+            <a:ext cx="8102798" cy="281880"/>
           </a:xfrm>
           <a:prstGeom prst="rect">
             <a:avLst/>
@@ -2976,20 +4021,18 @@
           <a:bodyPr wrap="square" lIns="0" tIns="0" rIns="0" bIns="0" rtlCol="0" anchor="t"/>
           <a:lstStyle/>
           <a:p>
-            <a:pPr algn="l" indent="0" marL="0">
-              <a:lnSpc>
-                <a:spcPts val="1680"/>
-              </a:lnSpc>
-              <a:spcBef>
-                <a:spcPts val="300"/>
-              </a:spcBef>
-              <a:spcAft>
-                <a:spcPts val="300"/>
-              </a:spcAft>
-              <a:buNone/>
-            </a:pPr>
-            <a:r>
-              <a:rPr lang="en-US" sz="1200" dirty="0">
+            <a:pPr algn="l" marL="342900" indent="-342900">
+              <a:lnSpc>
+                <a:spcPts val="1620"/>
+              </a:lnSpc>
+              <a:spcAft>
+                <a:spcPts val="300"/>
+              </a:spcAft>
+              <a:buSzPct val="100000"/>
+              <a:buChar char="•"/>
+            </a:pPr>
+            <a:r>
+              <a:rPr lang="en-US" sz="1200" b="1" dirty="0">
                 <a:solidFill>
                   <a:srgbClr val="1C2833"/>
                 </a:solidFill>
@@ -2997,22 +4040,19 @@
                 <a:ea typeface="Arial" pitchFamily="34" charset="-122"/>
                 <a:cs typeface="Arial" pitchFamily="34" charset="-120"/>
               </a:rPr>
-              <a:t>– The right-to-left direction for carry handling is the key procedural insight. Some students will try left-to-right and run into trouble; redirect them. – For 567 × 11, the cascading carries (13 in tens, 12 in hundreds) are dramatic. Use that example. – The pattern is sometimes taught with "underline carries" notation; we use right-to-left because it generalises better to </a:t>
-            </a:r>
-            <a:pPr algn="l" indent="0" marL="0">
-              <a:lnSpc>
-                <a:spcPts val="1680"/>
-              </a:lnSpc>
-              <a:spcBef>
-                <a:spcPts val="300"/>
-              </a:spcBef>
-              <a:spcAft>
-                <a:spcPts val="300"/>
-              </a:spcAft>
-              <a:buNone/>
-            </a:pPr>
-            <a:r>
-              <a:rPr lang="en-US" sz="1200" i="1" dirty="0">
+              <a:t>Generalisation.</a:t>
+            </a:r>
+            <a:pPr algn="l" indent="0" marL="0">
+              <a:lnSpc>
+                <a:spcPts val="1620"/>
+              </a:lnSpc>
+              <a:spcAft>
+                <a:spcPts val="300"/>
+              </a:spcAft>
+              <a:buNone/>
+            </a:pPr>
+            <a:r>
+              <a:rPr lang="en-US" sz="1200" dirty="0">
                 <a:solidFill>
                   <a:srgbClr val="1C2833"/>
                 </a:solidFill>
@@ -3020,22 +4060,19 @@
                 <a:ea typeface="Arial" pitchFamily="34" charset="-122"/>
                 <a:cs typeface="Arial" pitchFamily="34" charset="-120"/>
               </a:rPr>
-              <a:t>n</a:t>
-            </a:r>
-            <a:pPr algn="l" indent="0" marL="0">
-              <a:lnSpc>
-                <a:spcPts val="1680"/>
-              </a:lnSpc>
-              <a:spcBef>
-                <a:spcPts val="300"/>
-              </a:spcBef>
-              <a:spcAft>
-                <a:spcPts val="300"/>
-              </a:spcAft>
-              <a:buNone/>
-            </a:pPr>
-            <a:r>
-              <a:rPr lang="en-US" sz="1200" dirty="0">
+              <a:t> For an </a:t>
+            </a:r>
+            <a:pPr algn="l" indent="0" marL="0">
+              <a:lnSpc>
+                <a:spcPts val="1620"/>
+              </a:lnSpc>
+              <a:spcAft>
+                <a:spcPts val="300"/>
+              </a:spcAft>
+              <a:buNone/>
+            </a:pPr>
+            <a:r>
+              <a:rPr lang="en-US" sz="1200" i="1" dirty="0">
                 <a:solidFill>
                   <a:srgbClr val="1C2833"/>
                 </a:solidFill>
@@ -3043,7 +4080,27 @@
                 <a:ea typeface="Arial" pitchFamily="34" charset="-122"/>
                 <a:cs typeface="Arial" pitchFamily="34" charset="-120"/>
               </a:rPr>
-              <a:t>-digit numbers.</a:t>
+              <a:t>n</a:t>
+            </a:r>
+            <a:pPr algn="l" indent="0" marL="0">
+              <a:lnSpc>
+                <a:spcPts val="1620"/>
+              </a:lnSpc>
+              <a:spcAft>
+                <a:spcPts val="300"/>
+              </a:spcAft>
+              <a:buNone/>
+            </a:pPr>
+            <a:r>
+              <a:rPr lang="en-US" sz="1200" dirty="0">
+                <a:solidFill>
+                  <a:srgbClr val="1C2833"/>
+                </a:solidFill>
+                <a:latin typeface="Arial" pitchFamily="34" charset="0"/>
+                <a:ea typeface="Arial" pitchFamily="34" charset="-122"/>
+                <a:cs typeface="Arial" pitchFamily="34" charset="-120"/>
+              </a:rPr>
+              <a:t>-digit number, the trick is the same pattern:</a:t>
             </a:r>
             <a:endParaRPr lang="en-US" sz="1200" dirty="0"/>
           </a:p>
@@ -3052,6 +4109,100 @@
       <p:sp>
         <p:nvSpPr>
           <p:cNvPr id="5" name="Text 3"/>
+          <p:cNvSpPr/>
+          <p:nvPr/>
+        </p:nvSpPr>
+        <p:spPr>
+          <a:xfrm>
+            <a:off x="634901" y="1266974"/>
+            <a:ext cx="8102798" cy="769441"/>
+          </a:xfrm>
+          <a:prstGeom prst="rect">
+            <a:avLst/>
+          </a:prstGeom>
+          <a:noFill/>
+          <a:ln/>
+        </p:spPr>
+        <p:txBody>
+          <a:bodyPr wrap="square" lIns="0" tIns="0" rIns="0" bIns="0" rtlCol="0" anchor="t"/>
+          <a:lstStyle/>
+          <a:p>
+            <a:pPr algn="l" marL="342900" indent="-342900">
+              <a:lnSpc>
+                <a:spcPts val="1620"/>
+              </a:lnSpc>
+              <a:spcAft>
+                <a:spcPts val="300"/>
+              </a:spcAft>
+              <a:buSzPct val="100000"/>
+              <a:buChar char="•"/>
+            </a:pPr>
+            <a:r>
+              <a:rPr lang="en-US" sz="1200" dirty="0">
+                <a:solidFill>
+                  <a:srgbClr val="1C2833"/>
+                </a:solidFill>
+                <a:latin typeface="Arial" pitchFamily="34" charset="0"/>
+                <a:ea typeface="Arial" pitchFamily="34" charset="-122"/>
+                <a:cs typeface="Arial" pitchFamily="34" charset="-120"/>
+              </a:rPr>
+              <a:t>Outer digits stay.</a:t>
+            </a:r>
+            <a:endParaRPr lang="en-US" sz="1200" dirty="0"/>
+          </a:p>
+          <a:p>
+            <a:pPr algn="l" marL="342900" indent="-342900">
+              <a:lnSpc>
+                <a:spcPts val="1620"/>
+              </a:lnSpc>
+              <a:spcAft>
+                <a:spcPts val="300"/>
+              </a:spcAft>
+              <a:buSzPct val="100000"/>
+              <a:buChar char="•"/>
+            </a:pPr>
+            <a:r>
+              <a:rPr lang="en-US" sz="1200" dirty="0">
+                <a:solidFill>
+                  <a:srgbClr val="1C2833"/>
+                </a:solidFill>
+                <a:latin typeface="Arial" pitchFamily="34" charset="0"/>
+                <a:ea typeface="Arial" pitchFamily="34" charset="-122"/>
+                <a:cs typeface="Arial" pitchFamily="34" charset="-120"/>
+              </a:rPr>
+              <a:t>Every interior digit becomes the sum of the two original digits flanking that position.</a:t>
+            </a:r>
+            <a:endParaRPr lang="en-US" sz="1200" dirty="0"/>
+          </a:p>
+          <a:p>
+            <a:pPr algn="l" marL="342900" indent="-342900">
+              <a:lnSpc>
+                <a:spcPts val="1620"/>
+              </a:lnSpc>
+              <a:spcAft>
+                <a:spcPts val="300"/>
+              </a:spcAft>
+              <a:buSzPct val="100000"/>
+              <a:buChar char="•"/>
+            </a:pPr>
+            <a:r>
+              <a:rPr lang="en-US" sz="1200" dirty="0">
+                <a:solidFill>
+                  <a:srgbClr val="1C2833"/>
+                </a:solidFill>
+                <a:latin typeface="Arial" pitchFamily="34" charset="0"/>
+                <a:ea typeface="Arial" pitchFamily="34" charset="-122"/>
+                <a:cs typeface="Arial" pitchFamily="34" charset="-120"/>
+              </a:rPr>
+              <a:t>Carries cascade from right to left.</a:t>
+            </a:r>
+            <a:endParaRPr lang="en-US" sz="1200" dirty="0"/>
+          </a:p>
+        </p:txBody>
+      </p:sp>
+      <p:sp>
+        <p:nvSpPr>
+          <p:cNvPr id="6" name="Text 4"/>
           <p:cNvSpPr/>
           <p:nvPr/>
         </p:nvSpPr>
@@ -3201,7 +4352,7 @@
                 <a:ea typeface="Georgia" pitchFamily="34" charset="-122"/>
                 <a:cs typeface="Georgia" pitchFamily="34" charset="-120"/>
               </a:rPr>
-              <a:t>Citation(s) used in this lesson</a:t>
+              <a:t>Activity (15 min) — Worksheet</a:t>
             </a:r>
             <a:endParaRPr lang="en-US" sz="1800" dirty="0"/>
           </a:p>
@@ -3239,7 +4390,7 @@
               <a:buChar char="•"/>
             </a:pPr>
             <a:r>
-              <a:rPr lang="en-US" sz="1200" i="1" dirty="0">
+              <a:rPr lang="en-US" sz="1200" dirty="0">
                 <a:solidFill>
                   <a:srgbClr val="1C2833"/>
                 </a:solidFill>
@@ -3247,16 +4398,179 @@
                 <a:ea typeface="Arial" pitchFamily="34" charset="-122"/>
                 <a:cs typeface="Arial" pitchFamily="34" charset="-120"/>
               </a:rPr>
-              <a:t>Vedic_Maths.pdf</a:t>
-            </a:r>
-            <a:pPr algn="l" indent="0" marL="0">
+              <a:t>10 problems mixing 3-digit no-carry and carry cases:</a:t>
+            </a:r>
+            <a:endParaRPr lang="en-US" sz="1200" dirty="0"/>
+          </a:p>
+        </p:txBody>
+      </p:sp>
+      <p:sp>
+        <p:nvSpPr>
+          <p:cNvPr id="5" name="Text 3"/>
+          <p:cNvSpPr/>
+          <p:nvPr/>
+        </p:nvSpPr>
+        <p:spPr>
+          <a:xfrm>
+            <a:off x="406301" y="1266974"/>
+            <a:ext cx="8331398" cy="603052"/>
+          </a:xfrm>
+          <a:prstGeom prst="rect">
+            <a:avLst/>
+          </a:prstGeom>
+          <a:solidFill>
+            <a:srgbClr val="F4F8F9"/>
+          </a:solidFill>
+          <a:ln/>
+        </p:spPr>
+        <p:txBody>
+          <a:bodyPr wrap="square" rtlCol="0" anchor="ctr"/>
+          <a:lstStyle/>
+          <a:p>
+            <a:pPr indent="0" marL="0">
+              <a:buNone/>
+            </a:pPr>
+            <a:endParaRPr lang="en-US" dirty="0"/>
+          </a:p>
+        </p:txBody>
+      </p:sp>
+      <p:sp>
+        <p:nvSpPr>
+          <p:cNvPr id="6" name="Shape 4"/>
+          <p:cNvSpPr/>
+          <p:nvPr/>
+        </p:nvSpPr>
+        <p:spPr>
+          <a:xfrm>
+            <a:off x="430113" y="1266974"/>
+            <a:ext cx="0" cy="603052"/>
+          </a:xfrm>
+          <a:prstGeom prst="line">
+            <a:avLst/>
+          </a:prstGeom>
+          <a:noFill/>
+          <a:ln w="47625">
+            <a:solidFill>
+              <a:srgbClr val="277884"/>
+            </a:solidFill>
+            <a:prstDash val="solid"/>
+          </a:ln>
+        </p:spPr>
+      </p:sp>
+      <p:sp>
+        <p:nvSpPr>
+          <p:cNvPr id="7" name="Text 5"/>
+          <p:cNvSpPr/>
+          <p:nvPr/>
+        </p:nvSpPr>
+        <p:spPr>
+          <a:xfrm>
+            <a:off x="631627" y="1393924"/>
+            <a:ext cx="8086939" cy="174575"/>
+          </a:xfrm>
+          <a:prstGeom prst="rect">
+            <a:avLst/>
+          </a:prstGeom>
+          <a:noFill/>
+          <a:ln/>
+        </p:spPr>
+        <p:txBody>
+          <a:bodyPr wrap="square" lIns="0" tIns="0" rIns="0" bIns="0" rtlCol="0" anchor="t"/>
+          <a:lstStyle/>
+          <a:p>
+            <a:pPr algn="l" indent="0" marL="0">
+              <a:lnSpc>
+                <a:spcPts val="1375"/>
+              </a:lnSpc>
+              <a:buNone/>
+            </a:pPr>
+            <a:r>
+              <a:rPr lang="en-US" sz="1100" dirty="0">
+                <a:solidFill>
+                  <a:srgbClr val="1C2833"/>
+                </a:solidFill>
+                <a:latin typeface="Courier New" pitchFamily="34" charset="0"/>
+                <a:ea typeface="Courier New" pitchFamily="34" charset="-122"/>
+                <a:cs typeface="Courier New" pitchFamily="34" charset="-120"/>
+              </a:rPr>
+              <a:t>123 × 11    234 × 11    345 × 11    456 × 11    142 × 11</a:t>
+            </a:r>
+            <a:endParaRPr lang="en-US" sz="1100" dirty="0"/>
+          </a:p>
+        </p:txBody>
+      </p:sp>
+      <p:sp>
+        <p:nvSpPr>
+          <p:cNvPr id="8" name="Text 6"/>
+          <p:cNvSpPr/>
+          <p:nvPr/>
+        </p:nvSpPr>
+        <p:spPr>
+          <a:xfrm>
+            <a:off x="631627" y="1568500"/>
+            <a:ext cx="8086939" cy="174575"/>
+          </a:xfrm>
+          <a:prstGeom prst="rect">
+            <a:avLst/>
+          </a:prstGeom>
+          <a:noFill/>
+          <a:ln/>
+        </p:spPr>
+        <p:txBody>
+          <a:bodyPr wrap="square" lIns="0" tIns="0" rIns="0" bIns="0" rtlCol="0" anchor="t"/>
+          <a:lstStyle/>
+          <a:p>
+            <a:pPr algn="l" indent="0" marL="0">
+              <a:lnSpc>
+                <a:spcPts val="1375"/>
+              </a:lnSpc>
+              <a:buNone/>
+            </a:pPr>
+            <a:r>
+              <a:rPr lang="en-US" sz="1100" dirty="0">
+                <a:solidFill>
+                  <a:srgbClr val="1C2833"/>
+                </a:solidFill>
+                <a:latin typeface="Courier New" pitchFamily="34" charset="0"/>
+                <a:ea typeface="Courier New" pitchFamily="34" charset="-122"/>
+                <a:cs typeface="Courier New" pitchFamily="34" charset="-120"/>
+              </a:rPr>
+              <a:t>365 × 11    478 × 11    529 × 11    687 × 11    818 × 11</a:t>
+            </a:r>
+            <a:endParaRPr lang="en-US" sz="1100" dirty="0"/>
+          </a:p>
+        </p:txBody>
+      </p:sp>
+      <p:sp>
+        <p:nvSpPr>
+          <p:cNvPr id="9" name="Text 7"/>
+          <p:cNvSpPr/>
+          <p:nvPr/>
+        </p:nvSpPr>
+        <p:spPr>
+          <a:xfrm>
+            <a:off x="634901" y="1971526"/>
+            <a:ext cx="8102798" cy="281880"/>
+          </a:xfrm>
+          <a:prstGeom prst="rect">
+            <a:avLst/>
+          </a:prstGeom>
+          <a:noFill/>
+          <a:ln/>
+        </p:spPr>
+        <p:txBody>
+          <a:bodyPr wrap="square" lIns="0" tIns="0" rIns="0" bIns="0" rtlCol="0" anchor="t"/>
+          <a:lstStyle/>
+          <a:p>
+            <a:pPr algn="l" marL="342900" indent="-342900">
               <a:lnSpc>
                 <a:spcPts val="1620"/>
               </a:lnSpc>
               <a:spcAft>
                 <a:spcPts val="300"/>
               </a:spcAft>
-              <a:buNone/>
+              <a:buSzPct val="100000"/>
+              <a:buChar char="•"/>
             </a:pPr>
             <a:r>
               <a:rPr lang="en-US" sz="1200" dirty="0">
@@ -3267,7 +4581,7 @@
                 <a:ea typeface="Arial" pitchFamily="34" charset="-122"/>
                 <a:cs typeface="Arial" pitchFamily="34" charset="-120"/>
               </a:rPr>
-              <a:t> (ISKCON Desire Tree) — practice problems.</a:t>
+              <a:t>Pair work, self-check by long multiplication on any 3.</a:t>
             </a:r>
             <a:endParaRPr lang="en-US" sz="1200" dirty="0"/>
           </a:p>
@@ -3275,13 +4589,13 @@
       </p:sp>
       <p:sp>
         <p:nvSpPr>
-          <p:cNvPr id="5" name="Text 3"/>
-          <p:cNvSpPr/>
-          <p:nvPr/>
-        </p:nvSpPr>
-        <p:spPr>
-          <a:xfrm>
-            <a:off x="406301" y="1254323"/>
+          <p:cNvPr id="10" name="Text 8"/>
+          <p:cNvSpPr/>
+          <p:nvPr/>
+        </p:nvSpPr>
+        <p:spPr>
+          <a:xfrm>
+            <a:off x="406301" y="4434929"/>
             <a:ext cx="8498026" cy="213271"/>
           </a:xfrm>
           <a:prstGeom prst="rect">
@@ -3315,15 +4629,2508 @@
                 <a:ea typeface="Arial" pitchFamily="34" charset="-122"/>
                 <a:cs typeface="Arial" pitchFamily="34" charset="-120"/>
               </a:rPr>
-              <a:t>– Tirthaji (1965), sūtra 1.</a:t>
+              <a:t>Middle ·  · IKS Curriculum</a:t>
             </a:r>
             <a:endParaRPr lang="en-US" sz="1200" dirty="0"/>
           </a:p>
         </p:txBody>
       </p:sp>
+    </p:spTree>
+  </p:cSld>
+  <p:clrMapOvr>
+    <a:masterClrMapping/>
+  </p:clrMapOvr>
+</p:sld>
+</file>
+
+<file path=ppt/slides/slide14.xml><?xml version="1.0" encoding="utf-8"?>
+<p:sld xmlns:a="http://schemas.openxmlformats.org/drawingml/2006/main" xmlns:r="http://schemas.openxmlformats.org/officeDocument/2006/relationships" xmlns:p="http://schemas.openxmlformats.org/presentationml/2006/main">
+  <p:cSld name="Slide 14">
+    <p:bg>
+      <p:bgPr>
+        <a:solidFill>
+          <a:srgbClr val="FFFFFF"/>
+        </a:solidFill>
+      </p:bgPr>
+    </p:bg>
+    <p:spTree>
+      <p:nvGrpSpPr>
+        <p:cNvPr id="1" name=""/>
+        <p:cNvGrpSpPr/>
+        <p:nvPr/>
+      </p:nvGrpSpPr>
+      <p:grpSpPr>
+        <a:xfrm>
+          <a:off x="0" y="0"/>
+          <a:ext cx="0" cy="0"/>
+          <a:chOff x="0" y="0"/>
+          <a:chExt cx="0" cy="0"/>
+        </a:xfrm>
+      </p:grpSpPr>
+      <p:sp>
+        <p:nvSpPr>
+          <p:cNvPr id="2" name="Text 0"/>
+          <p:cNvSpPr/>
+          <p:nvPr/>
+        </p:nvSpPr>
+        <p:spPr>
+          <a:xfrm>
+            <a:off x="0" y="0"/>
+            <a:ext cx="9144000" cy="101501"/>
+          </a:xfrm>
+          <a:prstGeom prst="rect">
+            <a:avLst/>
+          </a:prstGeom>
+          <a:solidFill>
+            <a:srgbClr val="277884"/>
+          </a:solidFill>
+          <a:ln/>
+        </p:spPr>
+        <p:txBody>
+          <a:bodyPr wrap="square" rtlCol="0" anchor="ctr"/>
+          <a:lstStyle/>
+          <a:p>
+            <a:pPr indent="0" marL="0">
+              <a:buNone/>
+            </a:pPr>
+            <a:endParaRPr lang="en-US" dirty="0"/>
+          </a:p>
+        </p:txBody>
+      </p:sp>
+      <p:sp>
+        <p:nvSpPr>
+          <p:cNvPr id="3" name="Text 1"/>
+          <p:cNvSpPr/>
+          <p:nvPr/>
+        </p:nvSpPr>
+        <p:spPr>
+          <a:xfrm>
+            <a:off x="406301" y="457051"/>
+            <a:ext cx="8498026" cy="274290"/>
+          </a:xfrm>
+          <a:prstGeom prst="rect">
+            <a:avLst/>
+          </a:prstGeom>
+          <a:noFill/>
+          <a:ln/>
+        </p:spPr>
+        <p:txBody>
+          <a:bodyPr wrap="square" lIns="0" tIns="0" rIns="0" bIns="0" rtlCol="0" anchor="t"/>
+          <a:lstStyle/>
+          <a:p>
+            <a:pPr algn="l" indent="0" marL="0">
+              <a:lnSpc>
+                <a:spcPts val="2160"/>
+              </a:lnSpc>
+              <a:spcBef>
+                <a:spcPts val="600"/>
+              </a:spcBef>
+              <a:spcAft>
+                <a:spcPts val="800"/>
+              </a:spcAft>
+              <a:buNone/>
+            </a:pPr>
+            <a:r>
+              <a:rPr lang="en-US" sz="1800" b="1" dirty="0">
+                <a:solidFill>
+                  <a:srgbClr val="FE4447"/>
+                </a:solidFill>
+                <a:latin typeface="Georgia" pitchFamily="34" charset="0"/>
+                <a:ea typeface="Georgia" pitchFamily="34" charset="-122"/>
+                <a:cs typeface="Georgia" pitchFamily="34" charset="-120"/>
+              </a:rPr>
+              <a:t>Formative Quiz Part A (5 min)</a:t>
+            </a:r>
+            <a:endParaRPr lang="en-US" sz="1800" dirty="0"/>
+          </a:p>
+        </p:txBody>
+      </p:sp>
+      <p:sp>
+        <p:nvSpPr>
+          <p:cNvPr id="4" name="Text 2"/>
+          <p:cNvSpPr/>
+          <p:nvPr/>
+        </p:nvSpPr>
+        <p:spPr>
+          <a:xfrm>
+            <a:off x="634901" y="883593"/>
+            <a:ext cx="8102798" cy="544711"/>
+          </a:xfrm>
+          <a:prstGeom prst="rect">
+            <a:avLst/>
+          </a:prstGeom>
+          <a:noFill/>
+          <a:ln/>
+        </p:spPr>
+        <p:txBody>
+          <a:bodyPr wrap="square" lIns="0" tIns="0" rIns="0" bIns="0" rtlCol="0" anchor="t"/>
+          <a:lstStyle/>
+          <a:p>
+            <a:pPr algn="l" marL="342900" indent="-342900">
+              <a:lnSpc>
+                <a:spcPts val="1620"/>
+              </a:lnSpc>
+              <a:spcAft>
+                <a:spcPts val="300"/>
+              </a:spcAft>
+              <a:buSzPct val="100000"/>
+              <a:buChar char="•"/>
+            </a:pPr>
+            <a:r>
+              <a:rPr lang="en-US" sz="1200" dirty="0">
+                <a:solidFill>
+                  <a:srgbClr val="1C2833"/>
+                </a:solidFill>
+                <a:latin typeface="Arial" pitchFamily="34" charset="0"/>
+                <a:ea typeface="Arial" pitchFamily="34" charset="-122"/>
+                <a:cs typeface="Arial" pitchFamily="34" charset="-120"/>
+              </a:rPr>
+              <a:t>Distribute </a:t>
+            </a:r>
+            <a:pPr algn="l" indent="0" marL="0">
+              <a:lnSpc>
+                <a:spcPts val="1620"/>
+              </a:lnSpc>
+              <a:spcAft>
+                <a:spcPts val="300"/>
+              </a:spcAft>
+              <a:buNone/>
+            </a:pPr>
+            <a:r>
+              <a:rPr lang="en-US" sz="1200" dirty="0">
+                <a:solidFill>
+                  <a:srgbClr val="1C2833"/>
+                </a:solidFill>
+                <a:latin typeface="Arial" pitchFamily="34" charset="0"/>
+                <a:ea typeface="Arial" pitchFamily="34" charset="-122"/>
+                <a:cs typeface="Arial" pitchFamily="34" charset="-120"/>
+              </a:rPr>
+              <a:t>quizzes/formative.md</a:t>
+            </a:r>
+            <a:pPr algn="l" indent="0" marL="0">
+              <a:lnSpc>
+                <a:spcPts val="1620"/>
+              </a:lnSpc>
+              <a:spcAft>
+                <a:spcPts val="300"/>
+              </a:spcAft>
+              <a:buNone/>
+            </a:pPr>
+            <a:r>
+              <a:rPr lang="en-US" sz="1200" dirty="0">
+                <a:solidFill>
+                  <a:srgbClr val="1C2833"/>
+                </a:solidFill>
+                <a:latin typeface="Arial" pitchFamily="34" charset="0"/>
+                <a:ea typeface="Arial" pitchFamily="34" charset="-122"/>
+                <a:cs typeface="Arial" pitchFamily="34" charset="-120"/>
+              </a:rPr>
+              <a:t> Part A.</a:t>
+            </a:r>
+            <a:endParaRPr lang="en-US" sz="1200" dirty="0"/>
+          </a:p>
+          <a:p>
+            <a:pPr algn="l" marL="342900" indent="-342900">
+              <a:lnSpc>
+                <a:spcPts val="1620"/>
+              </a:lnSpc>
+              <a:spcAft>
+                <a:spcPts val="300"/>
+              </a:spcAft>
+              <a:buSzPct val="100000"/>
+              <a:buChar char="•"/>
+            </a:pPr>
+            <a:r>
+              <a:rPr lang="en-US" sz="1200" dirty="0">
+                <a:solidFill>
+                  <a:srgbClr val="1C2833"/>
+                </a:solidFill>
+                <a:latin typeface="Arial" pitchFamily="34" charset="0"/>
+                <a:ea typeface="Arial" pitchFamily="34" charset="-122"/>
+                <a:cs typeface="Arial" pitchFamily="34" charset="-120"/>
+              </a:rPr>
+              <a:t>5 quick problems, mixed 2- and 3-digit × 11. Closed-notebook.</a:t>
+            </a:r>
+            <a:endParaRPr lang="en-US" sz="1200" dirty="0"/>
+          </a:p>
+        </p:txBody>
+      </p:sp>
+      <p:sp>
+        <p:nvSpPr>
+          <p:cNvPr id="5" name="Text 3"/>
+          <p:cNvSpPr/>
+          <p:nvPr/>
+        </p:nvSpPr>
+        <p:spPr>
+          <a:xfrm>
+            <a:off x="406301" y="4434929"/>
+            <a:ext cx="8498026" cy="213271"/>
+          </a:xfrm>
+          <a:prstGeom prst="rect">
+            <a:avLst/>
+          </a:prstGeom>
+          <a:noFill/>
+          <a:ln/>
+        </p:spPr>
+        <p:txBody>
+          <a:bodyPr wrap="square" lIns="0" tIns="0" rIns="0" bIns="0" rtlCol="0" anchor="t"/>
+          <a:lstStyle/>
+          <a:p>
+            <a:pPr algn="l" indent="0" marL="0">
+              <a:lnSpc>
+                <a:spcPts val="1680"/>
+              </a:lnSpc>
+              <a:spcBef>
+                <a:spcPts val="300"/>
+              </a:spcBef>
+              <a:spcAft>
+                <a:spcPts val="300"/>
+              </a:spcAft>
+              <a:buNone/>
+            </a:pPr>
+            <a:r>
+              <a:rPr lang="en-US" sz="1200" dirty="0">
+                <a:solidFill>
+                  <a:srgbClr val="1C2833"/>
+                </a:solidFill>
+                <a:latin typeface="Arial" pitchFamily="34" charset="0"/>
+                <a:ea typeface="Arial" pitchFamily="34" charset="-122"/>
+                <a:cs typeface="Arial" pitchFamily="34" charset="-120"/>
+              </a:rPr>
+              <a:t>Middle ·  · IKS Curriculum</a:t>
+            </a:r>
+            <a:endParaRPr lang="en-US" sz="1200" dirty="0"/>
+          </a:p>
+        </p:txBody>
+      </p:sp>
+    </p:spTree>
+  </p:cSld>
+  <p:clrMapOvr>
+    <a:masterClrMapping/>
+  </p:clrMapOvr>
+</p:sld>
+</file>
+
+<file path=ppt/slides/slide15.xml><?xml version="1.0" encoding="utf-8"?>
+<p:sld xmlns:a="http://schemas.openxmlformats.org/drawingml/2006/main" xmlns:r="http://schemas.openxmlformats.org/officeDocument/2006/relationships" xmlns:p="http://schemas.openxmlformats.org/presentationml/2006/main">
+  <p:cSld name="Slide 15">
+    <p:bg>
+      <p:bgPr>
+        <a:solidFill>
+          <a:srgbClr val="FFFFFF"/>
+        </a:solidFill>
+      </p:bgPr>
+    </p:bg>
+    <p:spTree>
+      <p:nvGrpSpPr>
+        <p:cNvPr id="1" name=""/>
+        <p:cNvGrpSpPr/>
+        <p:nvPr/>
+      </p:nvGrpSpPr>
+      <p:grpSpPr>
+        <a:xfrm>
+          <a:off x="0" y="0"/>
+          <a:ext cx="0" cy="0"/>
+          <a:chOff x="0" y="0"/>
+          <a:chExt cx="0" cy="0"/>
+        </a:xfrm>
+      </p:grpSpPr>
+      <p:sp>
+        <p:nvSpPr>
+          <p:cNvPr id="2" name="Text 0"/>
+          <p:cNvSpPr/>
+          <p:nvPr/>
+        </p:nvSpPr>
+        <p:spPr>
+          <a:xfrm>
+            <a:off x="0" y="0"/>
+            <a:ext cx="9144000" cy="101501"/>
+          </a:xfrm>
+          <a:prstGeom prst="rect">
+            <a:avLst/>
+          </a:prstGeom>
+          <a:solidFill>
+            <a:srgbClr val="277884"/>
+          </a:solidFill>
+          <a:ln/>
+        </p:spPr>
+        <p:txBody>
+          <a:bodyPr wrap="square" rtlCol="0" anchor="ctr"/>
+          <a:lstStyle/>
+          <a:p>
+            <a:pPr indent="0" marL="0">
+              <a:buNone/>
+            </a:pPr>
+            <a:endParaRPr lang="en-US" dirty="0"/>
+          </a:p>
+        </p:txBody>
+      </p:sp>
+      <p:sp>
+        <p:nvSpPr>
+          <p:cNvPr id="3" name="Text 1"/>
+          <p:cNvSpPr/>
+          <p:nvPr/>
+        </p:nvSpPr>
+        <p:spPr>
+          <a:xfrm>
+            <a:off x="406301" y="457051"/>
+            <a:ext cx="8498026" cy="274290"/>
+          </a:xfrm>
+          <a:prstGeom prst="rect">
+            <a:avLst/>
+          </a:prstGeom>
+          <a:noFill/>
+          <a:ln/>
+        </p:spPr>
+        <p:txBody>
+          <a:bodyPr wrap="square" lIns="0" tIns="0" rIns="0" bIns="0" rtlCol="0" anchor="t"/>
+          <a:lstStyle/>
+          <a:p>
+            <a:pPr algn="l" indent="0" marL="0">
+              <a:lnSpc>
+                <a:spcPts val="2160"/>
+              </a:lnSpc>
+              <a:spcBef>
+                <a:spcPts val="600"/>
+              </a:spcBef>
+              <a:spcAft>
+                <a:spcPts val="800"/>
+              </a:spcAft>
+              <a:buNone/>
+            </a:pPr>
+            <a:r>
+              <a:rPr lang="en-US" sz="1800" b="1" dirty="0">
+                <a:solidFill>
+                  <a:srgbClr val="FE4447"/>
+                </a:solidFill>
+                <a:latin typeface="Georgia" pitchFamily="34" charset="0"/>
+                <a:ea typeface="Georgia" pitchFamily="34" charset="-122"/>
+                <a:cs typeface="Georgia" pitchFamily="34" charset="-120"/>
+              </a:rPr>
+              <a:t>Wrap-up (2 min)</a:t>
+            </a:r>
+            <a:endParaRPr lang="en-US" sz="1800" dirty="0"/>
+          </a:p>
+        </p:txBody>
+      </p:sp>
+      <p:sp>
+        <p:nvSpPr>
+          <p:cNvPr id="4" name="Text 2"/>
+          <p:cNvSpPr/>
+          <p:nvPr/>
+        </p:nvSpPr>
+        <p:spPr>
+          <a:xfrm>
+            <a:off x="634901" y="883593"/>
+            <a:ext cx="8102798" cy="281880"/>
+          </a:xfrm>
+          <a:prstGeom prst="rect">
+            <a:avLst/>
+          </a:prstGeom>
+          <a:noFill/>
+          <a:ln/>
+        </p:spPr>
+        <p:txBody>
+          <a:bodyPr wrap="square" lIns="0" tIns="0" rIns="0" bIns="0" rtlCol="0" anchor="t"/>
+          <a:lstStyle/>
+          <a:p>
+            <a:pPr algn="l" marL="342900" indent="-342900">
+              <a:lnSpc>
+                <a:spcPts val="1620"/>
+              </a:lnSpc>
+              <a:spcAft>
+                <a:spcPts val="300"/>
+              </a:spcAft>
+              <a:buSzPct val="100000"/>
+              <a:buChar char="•"/>
+            </a:pPr>
+            <a:r>
+              <a:rPr lang="en-US" sz="1200" dirty="0">
+                <a:solidFill>
+                  <a:srgbClr val="1C2833"/>
+                </a:solidFill>
+                <a:latin typeface="Arial" pitchFamily="34" charset="0"/>
+                <a:ea typeface="Arial" pitchFamily="34" charset="-122"/>
+                <a:cs typeface="Arial" pitchFamily="34" charset="-120"/>
+              </a:rPr>
+              <a:t>Preview Day 5: </a:t>
+            </a:r>
+            <a:pPr algn="l" indent="0" marL="0">
+              <a:lnSpc>
+                <a:spcPts val="1620"/>
+              </a:lnSpc>
+              <a:spcAft>
+                <a:spcPts val="300"/>
+              </a:spcAft>
+              <a:buNone/>
+            </a:pPr>
+            <a:r>
+              <a:rPr lang="en-US" sz="1200" i="1" dirty="0">
+                <a:solidFill>
+                  <a:srgbClr val="1C2833"/>
+                </a:solidFill>
+                <a:latin typeface="Arial" pitchFamily="34" charset="0"/>
+                <a:ea typeface="Arial" pitchFamily="34" charset="-122"/>
+                <a:cs typeface="Arial" pitchFamily="34" charset="-120"/>
+              </a:rPr>
+              <a:t>"Tomorrow — speed day. We'll retest your Day 1 problem (73 × 11) using the trick."</a:t>
+            </a:r>
+            <a:endParaRPr lang="en-US" sz="1200" dirty="0"/>
+          </a:p>
+        </p:txBody>
+      </p:sp>
+      <p:sp>
+        <p:nvSpPr>
+          <p:cNvPr id="5" name="Text 3"/>
+          <p:cNvSpPr/>
+          <p:nvPr/>
+        </p:nvSpPr>
+        <p:spPr>
+          <a:xfrm>
+            <a:off x="406301" y="4434929"/>
+            <a:ext cx="8498026" cy="213271"/>
+          </a:xfrm>
+          <a:prstGeom prst="rect">
+            <a:avLst/>
+          </a:prstGeom>
+          <a:noFill/>
+          <a:ln/>
+        </p:spPr>
+        <p:txBody>
+          <a:bodyPr wrap="square" lIns="0" tIns="0" rIns="0" bIns="0" rtlCol="0" anchor="t"/>
+          <a:lstStyle/>
+          <a:p>
+            <a:pPr algn="l" indent="0" marL="0">
+              <a:lnSpc>
+                <a:spcPts val="1680"/>
+              </a:lnSpc>
+              <a:spcBef>
+                <a:spcPts val="300"/>
+              </a:spcBef>
+              <a:spcAft>
+                <a:spcPts val="300"/>
+              </a:spcAft>
+              <a:buNone/>
+            </a:pPr>
+            <a:r>
+              <a:rPr lang="en-US" sz="1200" dirty="0">
+                <a:solidFill>
+                  <a:srgbClr val="1C2833"/>
+                </a:solidFill>
+                <a:latin typeface="Arial" pitchFamily="34" charset="0"/>
+                <a:ea typeface="Arial" pitchFamily="34" charset="-122"/>
+                <a:cs typeface="Arial" pitchFamily="34" charset="-120"/>
+              </a:rPr>
+              <a:t>Middle ·  · IKS Curriculum</a:t>
+            </a:r>
+            <a:endParaRPr lang="en-US" sz="1200" dirty="0"/>
+          </a:p>
+        </p:txBody>
+      </p:sp>
+    </p:spTree>
+  </p:cSld>
+  <p:clrMapOvr>
+    <a:masterClrMapping/>
+  </p:clrMapOvr>
+</p:sld>
+</file>
+
+<file path=ppt/slides/slide16.xml><?xml version="1.0" encoding="utf-8"?>
+<p:sld xmlns:a="http://schemas.openxmlformats.org/drawingml/2006/main" xmlns:r="http://schemas.openxmlformats.org/officeDocument/2006/relationships" xmlns:p="http://schemas.openxmlformats.org/presentationml/2006/main">
+  <p:cSld name="Slide 16">
+    <p:bg>
+      <p:bgPr>
+        <a:solidFill>
+          <a:srgbClr val="FFFFFF"/>
+        </a:solidFill>
+      </p:bgPr>
+    </p:bg>
+    <p:spTree>
+      <p:nvGrpSpPr>
+        <p:cNvPr id="1" name=""/>
+        <p:cNvGrpSpPr/>
+        <p:nvPr/>
+      </p:nvGrpSpPr>
+      <p:grpSpPr>
+        <a:xfrm>
+          <a:off x="0" y="0"/>
+          <a:ext cx="0" cy="0"/>
+          <a:chOff x="0" y="0"/>
+          <a:chExt cx="0" cy="0"/>
+        </a:xfrm>
+      </p:grpSpPr>
+      <p:sp>
+        <p:nvSpPr>
+          <p:cNvPr id="2" name="Text 0"/>
+          <p:cNvSpPr/>
+          <p:nvPr/>
+        </p:nvSpPr>
+        <p:spPr>
+          <a:xfrm>
+            <a:off x="0" y="0"/>
+            <a:ext cx="9144000" cy="101501"/>
+          </a:xfrm>
+          <a:prstGeom prst="rect">
+            <a:avLst/>
+          </a:prstGeom>
+          <a:solidFill>
+            <a:srgbClr val="277884"/>
+          </a:solidFill>
+          <a:ln/>
+        </p:spPr>
+        <p:txBody>
+          <a:bodyPr wrap="square" rtlCol="0" anchor="ctr"/>
+          <a:lstStyle/>
+          <a:p>
+            <a:pPr indent="0" marL="0">
+              <a:buNone/>
+            </a:pPr>
+            <a:endParaRPr lang="en-US" dirty="0"/>
+          </a:p>
+        </p:txBody>
+      </p:sp>
+      <p:sp>
+        <p:nvSpPr>
+          <p:cNvPr id="3" name="Text 1"/>
+          <p:cNvSpPr/>
+          <p:nvPr/>
+        </p:nvSpPr>
+        <p:spPr>
+          <a:xfrm>
+            <a:off x="406301" y="457051"/>
+            <a:ext cx="8498026" cy="274290"/>
+          </a:xfrm>
+          <a:prstGeom prst="rect">
+            <a:avLst/>
+          </a:prstGeom>
+          <a:noFill/>
+          <a:ln/>
+        </p:spPr>
+        <p:txBody>
+          <a:bodyPr wrap="square" lIns="0" tIns="0" rIns="0" bIns="0" rtlCol="0" anchor="t"/>
+          <a:lstStyle/>
+          <a:p>
+            <a:pPr algn="l" indent="0" marL="0">
+              <a:lnSpc>
+                <a:spcPts val="2160"/>
+              </a:lnSpc>
+              <a:spcBef>
+                <a:spcPts val="600"/>
+              </a:spcBef>
+              <a:spcAft>
+                <a:spcPts val="800"/>
+              </a:spcAft>
+              <a:buNone/>
+            </a:pPr>
+            <a:r>
+              <a:rPr lang="en-US" sz="1800" b="1" dirty="0">
+                <a:solidFill>
+                  <a:srgbClr val="FE4447"/>
+                </a:solidFill>
+                <a:latin typeface="Georgia" pitchFamily="34" charset="0"/>
+                <a:ea typeface="Georgia" pitchFamily="34" charset="-122"/>
+                <a:cs typeface="Georgia" pitchFamily="34" charset="-120"/>
+              </a:rPr>
+              <a:t>Student-facing content</a:t>
+            </a:r>
+            <a:endParaRPr lang="en-US" sz="1800" dirty="0"/>
+          </a:p>
+        </p:txBody>
+      </p:sp>
+      <p:sp>
+        <p:nvSpPr>
+          <p:cNvPr id="4" name="Text 2"/>
+          <p:cNvSpPr/>
+          <p:nvPr/>
+        </p:nvSpPr>
+        <p:spPr>
+          <a:xfrm>
+            <a:off x="406301" y="883593"/>
+            <a:ext cx="8331398" cy="2495550"/>
+          </a:xfrm>
+          <a:prstGeom prst="rect">
+            <a:avLst/>
+          </a:prstGeom>
+          <a:solidFill>
+            <a:srgbClr val="F4F8F9"/>
+          </a:solidFill>
+          <a:ln/>
+        </p:spPr>
+        <p:txBody>
+          <a:bodyPr wrap="square" rtlCol="0" anchor="ctr"/>
+          <a:lstStyle/>
+          <a:p>
+            <a:pPr indent="0" marL="0">
+              <a:buNone/>
+            </a:pPr>
+            <a:endParaRPr lang="en-US" dirty="0"/>
+          </a:p>
+        </p:txBody>
+      </p:sp>
+      <p:sp>
+        <p:nvSpPr>
+          <p:cNvPr id="5" name="Shape 3"/>
+          <p:cNvSpPr/>
+          <p:nvPr/>
+        </p:nvSpPr>
+        <p:spPr>
+          <a:xfrm>
+            <a:off x="434876" y="883593"/>
+            <a:ext cx="0" cy="2495550"/>
+          </a:xfrm>
+          <a:prstGeom prst="line">
+            <a:avLst/>
+          </a:prstGeom>
+          <a:noFill/>
+          <a:ln w="57150">
+            <a:solidFill>
+              <a:srgbClr val="FE4447"/>
+            </a:solidFill>
+            <a:prstDash val="solid"/>
+          </a:ln>
+        </p:spPr>
+      </p:sp>
       <p:sp>
         <p:nvSpPr>
           <p:cNvPr id="6" name="Text 4"/>
+          <p:cNvSpPr/>
+          <p:nvPr/>
+        </p:nvSpPr>
+        <p:spPr>
+          <a:xfrm>
+            <a:off x="692051" y="1074093"/>
+            <a:ext cx="7973389" cy="230981"/>
+          </a:xfrm>
+          <a:prstGeom prst="rect">
+            <a:avLst/>
+          </a:prstGeom>
+          <a:noFill/>
+          <a:ln/>
+        </p:spPr>
+        <p:txBody>
+          <a:bodyPr wrap="square" lIns="0" tIns="0" rIns="0" bIns="0" rtlCol="0" anchor="t"/>
+          <a:lstStyle/>
+          <a:p>
+            <a:pPr algn="l" indent="0" marL="0">
+              <a:lnSpc>
+                <a:spcPts val="1820"/>
+              </a:lnSpc>
+              <a:spcBef>
+                <a:spcPts val="300"/>
+              </a:spcBef>
+              <a:spcAft>
+                <a:spcPts val="300"/>
+              </a:spcAft>
+              <a:buNone/>
+            </a:pPr>
+            <a:r>
+              <a:rPr lang="en-US" sz="1300" b="1" i="1" dirty="0">
+                <a:solidFill>
+                  <a:srgbClr val="1C2833"/>
+                </a:solidFill>
+                <a:latin typeface="Georgia" pitchFamily="34" charset="0"/>
+                <a:ea typeface="Georgia" pitchFamily="34" charset="-122"/>
+                <a:cs typeface="Georgia" pitchFamily="34" charset="-120"/>
+              </a:rPr>
+              <a:t>3-digit × 11</a:t>
+            </a:r>
+            <a:endParaRPr lang="en-US" sz="1300" dirty="0"/>
+          </a:p>
+        </p:txBody>
+      </p:sp>
+      <p:sp>
+        <p:nvSpPr>
+          <p:cNvPr id="7" name="Text 5"/>
+          <p:cNvSpPr/>
+          <p:nvPr/>
+        </p:nvSpPr>
+        <p:spPr>
+          <a:xfrm>
+            <a:off x="692051" y="1343174"/>
+            <a:ext cx="7973389" cy="230981"/>
+          </a:xfrm>
+          <a:prstGeom prst="rect">
+            <a:avLst/>
+          </a:prstGeom>
+          <a:noFill/>
+          <a:ln/>
+        </p:spPr>
+        <p:txBody>
+          <a:bodyPr wrap="square" lIns="0" tIns="0" rIns="0" bIns="0" rtlCol="0" anchor="t"/>
+          <a:lstStyle/>
+          <a:p>
+            <a:pPr algn="l" indent="0" marL="0">
+              <a:lnSpc>
+                <a:spcPts val="1820"/>
+              </a:lnSpc>
+              <a:spcBef>
+                <a:spcPts val="300"/>
+              </a:spcBef>
+              <a:spcAft>
+                <a:spcPts val="300"/>
+              </a:spcAft>
+              <a:buNone/>
+            </a:pPr>
+            <a:r>
+              <a:rPr lang="en-US" sz="1300" dirty="0">
+                <a:solidFill>
+                  <a:srgbClr val="1C2833"/>
+                </a:solidFill>
+                <a:latin typeface="Georgia" pitchFamily="34" charset="0"/>
+                <a:ea typeface="Georgia" pitchFamily="34" charset="-122"/>
+                <a:cs typeface="Georgia" pitchFamily="34" charset="-120"/>
+              </a:rPr>
+              <a:t>For a number </a:t>
+            </a:r>
+            <a:pPr algn="l" indent="0" marL="0">
+              <a:lnSpc>
+                <a:spcPts val="1820"/>
+              </a:lnSpc>
+              <a:spcBef>
+                <a:spcPts val="300"/>
+              </a:spcBef>
+              <a:spcAft>
+                <a:spcPts val="300"/>
+              </a:spcAft>
+              <a:buNone/>
+            </a:pPr>
+            <a:r>
+              <a:rPr lang="en-US" sz="1300" i="1" dirty="0">
+                <a:solidFill>
+                  <a:srgbClr val="1C2833"/>
+                </a:solidFill>
+                <a:latin typeface="Georgia" pitchFamily="34" charset="0"/>
+                <a:ea typeface="Georgia" pitchFamily="34" charset="-122"/>
+                <a:cs typeface="Georgia" pitchFamily="34" charset="-120"/>
+              </a:rPr>
+              <a:t>abc</a:t>
+            </a:r>
+            <a:pPr algn="l" indent="0" marL="0">
+              <a:lnSpc>
+                <a:spcPts val="1820"/>
+              </a:lnSpc>
+              <a:spcBef>
+                <a:spcPts val="300"/>
+              </a:spcBef>
+              <a:spcAft>
+                <a:spcPts val="300"/>
+              </a:spcAft>
+              <a:buNone/>
+            </a:pPr>
+            <a:r>
+              <a:rPr lang="en-US" sz="1300" dirty="0">
+                <a:solidFill>
+                  <a:srgbClr val="1C2833"/>
+                </a:solidFill>
+                <a:latin typeface="Georgia" pitchFamily="34" charset="0"/>
+                <a:ea typeface="Georgia" pitchFamily="34" charset="-122"/>
+                <a:cs typeface="Georgia" pitchFamily="34" charset="-120"/>
+              </a:rPr>
+              <a:t> × 11:</a:t>
+            </a:r>
+            <a:endParaRPr lang="en-US" sz="1300" dirty="0"/>
+          </a:p>
+        </p:txBody>
+      </p:sp>
+      <p:sp>
+        <p:nvSpPr>
+          <p:cNvPr id="8" name="Text 6"/>
+          <p:cNvSpPr/>
+          <p:nvPr/>
+        </p:nvSpPr>
+        <p:spPr>
+          <a:xfrm>
+            <a:off x="692051" y="1612255"/>
+            <a:ext cx="7973389" cy="230981"/>
+          </a:xfrm>
+          <a:prstGeom prst="rect">
+            <a:avLst/>
+          </a:prstGeom>
+          <a:noFill/>
+          <a:ln/>
+        </p:spPr>
+        <p:txBody>
+          <a:bodyPr wrap="square" lIns="0" tIns="0" rIns="0" bIns="0" rtlCol="0" anchor="t"/>
+          <a:lstStyle/>
+          <a:p>
+            <a:pPr algn="l" indent="0" marL="0">
+              <a:lnSpc>
+                <a:spcPts val="1820"/>
+              </a:lnSpc>
+              <a:spcBef>
+                <a:spcPts val="300"/>
+              </a:spcBef>
+              <a:spcAft>
+                <a:spcPts val="300"/>
+              </a:spcAft>
+              <a:buNone/>
+            </a:pPr>
+            <a:r>
+              <a:rPr lang="en-US" sz="1300" dirty="0">
+                <a:solidFill>
+                  <a:srgbClr val="1C2833"/>
+                </a:solidFill>
+                <a:latin typeface="Georgia" pitchFamily="34" charset="0"/>
+                <a:ea typeface="Georgia" pitchFamily="34" charset="-122"/>
+                <a:cs typeface="Georgia" pitchFamily="34" charset="-120"/>
+              </a:rPr>
+              <a:t>Write </a:t>
+            </a:r>
+            <a:pPr algn="l" indent="0" marL="0">
+              <a:lnSpc>
+                <a:spcPts val="1820"/>
+              </a:lnSpc>
+              <a:spcBef>
+                <a:spcPts val="300"/>
+              </a:spcBef>
+              <a:spcAft>
+                <a:spcPts val="300"/>
+              </a:spcAft>
+              <a:buNone/>
+            </a:pPr>
+            <a:r>
+              <a:rPr lang="en-US" sz="1300" i="1" dirty="0">
+                <a:solidFill>
+                  <a:srgbClr val="1C2833"/>
+                </a:solidFill>
+                <a:latin typeface="Georgia" pitchFamily="34" charset="0"/>
+                <a:ea typeface="Georgia" pitchFamily="34" charset="-122"/>
+                <a:cs typeface="Georgia" pitchFamily="34" charset="-120"/>
+              </a:rPr>
+              <a:t>a _ _ c</a:t>
+            </a:r>
+            <a:pPr algn="l" indent="0" marL="0">
+              <a:lnSpc>
+                <a:spcPts val="1820"/>
+              </a:lnSpc>
+              <a:spcBef>
+                <a:spcPts val="300"/>
+              </a:spcBef>
+              <a:spcAft>
+                <a:spcPts val="300"/>
+              </a:spcAft>
+              <a:buNone/>
+            </a:pPr>
+            <a:r>
+              <a:rPr lang="en-US" sz="1300" dirty="0">
+                <a:solidFill>
+                  <a:srgbClr val="1C2833"/>
+                </a:solidFill>
+                <a:latin typeface="Georgia" pitchFamily="34" charset="0"/>
+                <a:ea typeface="Georgia" pitchFamily="34" charset="-122"/>
+                <a:cs typeface="Georgia" pitchFamily="34" charset="-120"/>
+              </a:rPr>
+              <a:t> (outer digits unchanged).</a:t>
+            </a:r>
+            <a:endParaRPr lang="en-US" sz="1300" dirty="0"/>
+          </a:p>
+        </p:txBody>
+      </p:sp>
+      <p:sp>
+        <p:nvSpPr>
+          <p:cNvPr id="9" name="Text 7"/>
+          <p:cNvSpPr/>
+          <p:nvPr/>
+        </p:nvSpPr>
+        <p:spPr>
+          <a:xfrm>
+            <a:off x="692051" y="1881336"/>
+            <a:ext cx="7973389" cy="230981"/>
+          </a:xfrm>
+          <a:prstGeom prst="rect">
+            <a:avLst/>
+          </a:prstGeom>
+          <a:noFill/>
+          <a:ln/>
+        </p:spPr>
+        <p:txBody>
+          <a:bodyPr wrap="square" lIns="0" tIns="0" rIns="0" bIns="0" rtlCol="0" anchor="t"/>
+          <a:lstStyle/>
+          <a:p>
+            <a:pPr algn="l" indent="0" marL="0">
+              <a:lnSpc>
+                <a:spcPts val="1820"/>
+              </a:lnSpc>
+              <a:spcBef>
+                <a:spcPts val="300"/>
+              </a:spcBef>
+              <a:spcAft>
+                <a:spcPts val="300"/>
+              </a:spcAft>
+              <a:buNone/>
+            </a:pPr>
+            <a:r>
+              <a:rPr lang="en-US" sz="1300" dirty="0">
+                <a:solidFill>
+                  <a:srgbClr val="1C2833"/>
+                </a:solidFill>
+                <a:latin typeface="Georgia" pitchFamily="34" charset="0"/>
+                <a:ea typeface="Georgia" pitchFamily="34" charset="-122"/>
+                <a:cs typeface="Georgia" pitchFamily="34" charset="-120"/>
+              </a:rPr>
+              <a:t>Fill the first gap with </a:t>
+            </a:r>
+            <a:pPr algn="l" indent="0" marL="0">
+              <a:lnSpc>
+                <a:spcPts val="1820"/>
+              </a:lnSpc>
+              <a:spcBef>
+                <a:spcPts val="300"/>
+              </a:spcBef>
+              <a:spcAft>
+                <a:spcPts val="300"/>
+              </a:spcAft>
+              <a:buNone/>
+            </a:pPr>
+            <a:r>
+              <a:rPr lang="en-US" sz="1300" i="1" dirty="0">
+                <a:solidFill>
+                  <a:srgbClr val="1C2833"/>
+                </a:solidFill>
+                <a:latin typeface="Georgia" pitchFamily="34" charset="0"/>
+                <a:ea typeface="Georgia" pitchFamily="34" charset="-122"/>
+                <a:cs typeface="Georgia" pitchFamily="34" charset="-120"/>
+              </a:rPr>
+              <a:t>a</a:t>
+            </a:r>
+            <a:pPr algn="l" indent="0" marL="0">
+              <a:lnSpc>
+                <a:spcPts val="1820"/>
+              </a:lnSpc>
+              <a:spcBef>
+                <a:spcPts val="300"/>
+              </a:spcBef>
+              <a:spcAft>
+                <a:spcPts val="300"/>
+              </a:spcAft>
+              <a:buNone/>
+            </a:pPr>
+            <a:r>
+              <a:rPr lang="en-US" sz="1300" dirty="0">
+                <a:solidFill>
+                  <a:srgbClr val="1C2833"/>
+                </a:solidFill>
+                <a:latin typeface="Georgia" pitchFamily="34" charset="0"/>
+                <a:ea typeface="Georgia" pitchFamily="34" charset="-122"/>
+                <a:cs typeface="Georgia" pitchFamily="34" charset="-120"/>
+              </a:rPr>
+              <a:t> + </a:t>
+            </a:r>
+            <a:pPr algn="l" indent="0" marL="0">
+              <a:lnSpc>
+                <a:spcPts val="1820"/>
+              </a:lnSpc>
+              <a:spcBef>
+                <a:spcPts val="300"/>
+              </a:spcBef>
+              <a:spcAft>
+                <a:spcPts val="300"/>
+              </a:spcAft>
+              <a:buNone/>
+            </a:pPr>
+            <a:r>
+              <a:rPr lang="en-US" sz="1300" i="1" dirty="0">
+                <a:solidFill>
+                  <a:srgbClr val="1C2833"/>
+                </a:solidFill>
+                <a:latin typeface="Georgia" pitchFamily="34" charset="0"/>
+                <a:ea typeface="Georgia" pitchFamily="34" charset="-122"/>
+                <a:cs typeface="Georgia" pitchFamily="34" charset="-120"/>
+              </a:rPr>
+              <a:t>b</a:t>
+            </a:r>
+            <a:pPr algn="l" indent="0" marL="0">
+              <a:lnSpc>
+                <a:spcPts val="1820"/>
+              </a:lnSpc>
+              <a:spcBef>
+                <a:spcPts val="300"/>
+              </a:spcBef>
+              <a:spcAft>
+                <a:spcPts val="300"/>
+              </a:spcAft>
+              <a:buNone/>
+            </a:pPr>
+            <a:r>
+              <a:rPr lang="en-US" sz="1300" dirty="0">
+                <a:solidFill>
+                  <a:srgbClr val="1C2833"/>
+                </a:solidFill>
+                <a:latin typeface="Georgia" pitchFamily="34" charset="0"/>
+                <a:ea typeface="Georgia" pitchFamily="34" charset="-122"/>
+                <a:cs typeface="Georgia" pitchFamily="34" charset="-120"/>
+              </a:rPr>
+              <a:t>.</a:t>
+            </a:r>
+            <a:endParaRPr lang="en-US" sz="1300" dirty="0"/>
+          </a:p>
+        </p:txBody>
+      </p:sp>
+      <p:sp>
+        <p:nvSpPr>
+          <p:cNvPr id="10" name="Text 8"/>
+          <p:cNvSpPr/>
+          <p:nvPr/>
+        </p:nvSpPr>
+        <p:spPr>
+          <a:xfrm>
+            <a:off x="692051" y="2150418"/>
+            <a:ext cx="7973389" cy="230981"/>
+          </a:xfrm>
+          <a:prstGeom prst="rect">
+            <a:avLst/>
+          </a:prstGeom>
+          <a:noFill/>
+          <a:ln/>
+        </p:spPr>
+        <p:txBody>
+          <a:bodyPr wrap="square" lIns="0" tIns="0" rIns="0" bIns="0" rtlCol="0" anchor="t"/>
+          <a:lstStyle/>
+          <a:p>
+            <a:pPr algn="l" indent="0" marL="0">
+              <a:lnSpc>
+                <a:spcPts val="1820"/>
+              </a:lnSpc>
+              <a:spcBef>
+                <a:spcPts val="300"/>
+              </a:spcBef>
+              <a:spcAft>
+                <a:spcPts val="300"/>
+              </a:spcAft>
+              <a:buNone/>
+            </a:pPr>
+            <a:r>
+              <a:rPr lang="en-US" sz="1300" dirty="0">
+                <a:solidFill>
+                  <a:srgbClr val="1C2833"/>
+                </a:solidFill>
+                <a:latin typeface="Georgia" pitchFamily="34" charset="0"/>
+                <a:ea typeface="Georgia" pitchFamily="34" charset="-122"/>
+                <a:cs typeface="Georgia" pitchFamily="34" charset="-120"/>
+              </a:rPr>
+              <a:t>Fill the second gap with </a:t>
+            </a:r>
+            <a:pPr algn="l" indent="0" marL="0">
+              <a:lnSpc>
+                <a:spcPts val="1820"/>
+              </a:lnSpc>
+              <a:spcBef>
+                <a:spcPts val="300"/>
+              </a:spcBef>
+              <a:spcAft>
+                <a:spcPts val="300"/>
+              </a:spcAft>
+              <a:buNone/>
+            </a:pPr>
+            <a:r>
+              <a:rPr lang="en-US" sz="1300" i="1" dirty="0">
+                <a:solidFill>
+                  <a:srgbClr val="1C2833"/>
+                </a:solidFill>
+                <a:latin typeface="Georgia" pitchFamily="34" charset="0"/>
+                <a:ea typeface="Georgia" pitchFamily="34" charset="-122"/>
+                <a:cs typeface="Georgia" pitchFamily="34" charset="-120"/>
+              </a:rPr>
+              <a:t>b</a:t>
+            </a:r>
+            <a:pPr algn="l" indent="0" marL="0">
+              <a:lnSpc>
+                <a:spcPts val="1820"/>
+              </a:lnSpc>
+              <a:spcBef>
+                <a:spcPts val="300"/>
+              </a:spcBef>
+              <a:spcAft>
+                <a:spcPts val="300"/>
+              </a:spcAft>
+              <a:buNone/>
+            </a:pPr>
+            <a:r>
+              <a:rPr lang="en-US" sz="1300" dirty="0">
+                <a:solidFill>
+                  <a:srgbClr val="1C2833"/>
+                </a:solidFill>
+                <a:latin typeface="Georgia" pitchFamily="34" charset="0"/>
+                <a:ea typeface="Georgia" pitchFamily="34" charset="-122"/>
+                <a:cs typeface="Georgia" pitchFamily="34" charset="-120"/>
+              </a:rPr>
+              <a:t> + </a:t>
+            </a:r>
+            <a:pPr algn="l" indent="0" marL="0">
+              <a:lnSpc>
+                <a:spcPts val="1820"/>
+              </a:lnSpc>
+              <a:spcBef>
+                <a:spcPts val="300"/>
+              </a:spcBef>
+              <a:spcAft>
+                <a:spcPts val="300"/>
+              </a:spcAft>
+              <a:buNone/>
+            </a:pPr>
+            <a:r>
+              <a:rPr lang="en-US" sz="1300" i="1" dirty="0">
+                <a:solidFill>
+                  <a:srgbClr val="1C2833"/>
+                </a:solidFill>
+                <a:latin typeface="Georgia" pitchFamily="34" charset="0"/>
+                <a:ea typeface="Georgia" pitchFamily="34" charset="-122"/>
+                <a:cs typeface="Georgia" pitchFamily="34" charset="-120"/>
+              </a:rPr>
+              <a:t>c</a:t>
+            </a:r>
+            <a:pPr algn="l" indent="0" marL="0">
+              <a:lnSpc>
+                <a:spcPts val="1820"/>
+              </a:lnSpc>
+              <a:spcBef>
+                <a:spcPts val="300"/>
+              </a:spcBef>
+              <a:spcAft>
+                <a:spcPts val="300"/>
+              </a:spcAft>
+              <a:buNone/>
+            </a:pPr>
+            <a:r>
+              <a:rPr lang="en-US" sz="1300" dirty="0">
+                <a:solidFill>
+                  <a:srgbClr val="1C2833"/>
+                </a:solidFill>
+                <a:latin typeface="Georgia" pitchFamily="34" charset="0"/>
+                <a:ea typeface="Georgia" pitchFamily="34" charset="-122"/>
+                <a:cs typeface="Georgia" pitchFamily="34" charset="-120"/>
+              </a:rPr>
+              <a:t>.</a:t>
+            </a:r>
+            <a:endParaRPr lang="en-US" sz="1300" dirty="0"/>
+          </a:p>
+        </p:txBody>
+      </p:sp>
+      <p:sp>
+        <p:nvSpPr>
+          <p:cNvPr id="11" name="Text 9"/>
+          <p:cNvSpPr/>
+          <p:nvPr/>
+        </p:nvSpPr>
+        <p:spPr>
+          <a:xfrm>
+            <a:off x="692051" y="2419499"/>
+            <a:ext cx="7973389" cy="230981"/>
+          </a:xfrm>
+          <a:prstGeom prst="rect">
+            <a:avLst/>
+          </a:prstGeom>
+          <a:noFill/>
+          <a:ln/>
+        </p:spPr>
+        <p:txBody>
+          <a:bodyPr wrap="square" lIns="0" tIns="0" rIns="0" bIns="0" rtlCol="0" anchor="t"/>
+          <a:lstStyle/>
+          <a:p>
+            <a:pPr algn="l" indent="0" marL="0">
+              <a:lnSpc>
+                <a:spcPts val="1820"/>
+              </a:lnSpc>
+              <a:spcBef>
+                <a:spcPts val="300"/>
+              </a:spcBef>
+              <a:spcAft>
+                <a:spcPts val="300"/>
+              </a:spcAft>
+              <a:buNone/>
+            </a:pPr>
+            <a:r>
+              <a:rPr lang="en-US" sz="1300" i="1" dirty="0">
+                <a:solidFill>
+                  <a:srgbClr val="1C2833"/>
+                </a:solidFill>
+                <a:latin typeface="Georgia" pitchFamily="34" charset="0"/>
+                <a:ea typeface="Georgia" pitchFamily="34" charset="-122"/>
+                <a:cs typeface="Georgia" pitchFamily="34" charset="-120"/>
+              </a:rPr>
+              <a:t>Handle carries right to left.</a:t>
+            </a:r>
+            <a:endParaRPr lang="en-US" sz="1300" dirty="0"/>
+          </a:p>
+        </p:txBody>
+      </p:sp>
+      <p:sp>
+        <p:nvSpPr>
+          <p:cNvPr id="12" name="Text 10"/>
+          <p:cNvSpPr/>
+          <p:nvPr/>
+        </p:nvSpPr>
+        <p:spPr>
+          <a:xfrm>
+            <a:off x="692051" y="2688580"/>
+            <a:ext cx="7973389" cy="230981"/>
+          </a:xfrm>
+          <a:prstGeom prst="rect">
+            <a:avLst/>
+          </a:prstGeom>
+          <a:noFill/>
+          <a:ln/>
+        </p:spPr>
+        <p:txBody>
+          <a:bodyPr wrap="square" lIns="0" tIns="0" rIns="0" bIns="0" rtlCol="0" anchor="t"/>
+          <a:lstStyle/>
+          <a:p>
+            <a:pPr algn="l" indent="0" marL="0">
+              <a:lnSpc>
+                <a:spcPts val="1820"/>
+              </a:lnSpc>
+              <a:spcBef>
+                <a:spcPts val="300"/>
+              </a:spcBef>
+              <a:spcAft>
+                <a:spcPts val="300"/>
+              </a:spcAft>
+              <a:buNone/>
+            </a:pPr>
+            <a:r>
+              <a:rPr lang="en-US" sz="1300" i="1" dirty="0">
+                <a:solidFill>
+                  <a:srgbClr val="1C2833"/>
+                </a:solidFill>
+                <a:latin typeface="Georgia" pitchFamily="34" charset="0"/>
+                <a:ea typeface="Georgia" pitchFamily="34" charset="-122"/>
+                <a:cs typeface="Georgia" pitchFamily="34" charset="-120"/>
+              </a:rPr>
+              <a:t>Example: 234 × 11 → 2 _ _ 4 → 2 (2+3) (3+4) 4 → 2574.</a:t>
+            </a:r>
+            <a:endParaRPr lang="en-US" sz="1300" dirty="0"/>
+          </a:p>
+        </p:txBody>
+      </p:sp>
+      <p:sp>
+        <p:nvSpPr>
+          <p:cNvPr id="13" name="Text 11"/>
+          <p:cNvSpPr/>
+          <p:nvPr/>
+        </p:nvSpPr>
+        <p:spPr>
+          <a:xfrm>
+            <a:off x="692051" y="2957661"/>
+            <a:ext cx="7973389" cy="230981"/>
+          </a:xfrm>
+          <a:prstGeom prst="rect">
+            <a:avLst/>
+          </a:prstGeom>
+          <a:noFill/>
+          <a:ln/>
+        </p:spPr>
+        <p:txBody>
+          <a:bodyPr wrap="square" lIns="0" tIns="0" rIns="0" bIns="0" rtlCol="0" anchor="t"/>
+          <a:lstStyle/>
+          <a:p>
+            <a:pPr algn="l" indent="0" marL="0">
+              <a:lnSpc>
+                <a:spcPts val="1820"/>
+              </a:lnSpc>
+              <a:spcBef>
+                <a:spcPts val="300"/>
+              </a:spcBef>
+              <a:spcAft>
+                <a:spcPts val="300"/>
+              </a:spcAft>
+              <a:buNone/>
+            </a:pPr>
+            <a:r>
+              <a:rPr lang="en-US" sz="1300" dirty="0">
+                <a:solidFill>
+                  <a:srgbClr val="1C2833"/>
+                </a:solidFill>
+                <a:latin typeface="Georgia" pitchFamily="34" charset="0"/>
+                <a:ea typeface="Georgia" pitchFamily="34" charset="-122"/>
+                <a:cs typeface="Georgia" pitchFamily="34" charset="-120"/>
+              </a:rPr>
+              <a:t>The algebraic identity: (100</a:t>
+            </a:r>
+            <a:pPr algn="l" indent="0" marL="0">
+              <a:lnSpc>
+                <a:spcPts val="1820"/>
+              </a:lnSpc>
+              <a:spcBef>
+                <a:spcPts val="300"/>
+              </a:spcBef>
+              <a:spcAft>
+                <a:spcPts val="300"/>
+              </a:spcAft>
+              <a:buNone/>
+            </a:pPr>
+            <a:r>
+              <a:rPr lang="en-US" sz="1300" i="1" dirty="0">
+                <a:solidFill>
+                  <a:srgbClr val="1C2833"/>
+                </a:solidFill>
+                <a:latin typeface="Georgia" pitchFamily="34" charset="0"/>
+                <a:ea typeface="Georgia" pitchFamily="34" charset="-122"/>
+                <a:cs typeface="Georgia" pitchFamily="34" charset="-120"/>
+              </a:rPr>
+              <a:t>a</a:t>
+            </a:r>
+            <a:pPr algn="l" indent="0" marL="0">
+              <a:lnSpc>
+                <a:spcPts val="1820"/>
+              </a:lnSpc>
+              <a:spcBef>
+                <a:spcPts val="300"/>
+              </a:spcBef>
+              <a:spcAft>
+                <a:spcPts val="300"/>
+              </a:spcAft>
+              <a:buNone/>
+            </a:pPr>
+            <a:r>
+              <a:rPr lang="en-US" sz="1300" dirty="0">
+                <a:solidFill>
+                  <a:srgbClr val="1C2833"/>
+                </a:solidFill>
+                <a:latin typeface="Georgia" pitchFamily="34" charset="0"/>
+                <a:ea typeface="Georgia" pitchFamily="34" charset="-122"/>
+                <a:cs typeface="Georgia" pitchFamily="34" charset="-120"/>
+              </a:rPr>
+              <a:t> + 10</a:t>
+            </a:r>
+            <a:pPr algn="l" indent="0" marL="0">
+              <a:lnSpc>
+                <a:spcPts val="1820"/>
+              </a:lnSpc>
+              <a:spcBef>
+                <a:spcPts val="300"/>
+              </a:spcBef>
+              <a:spcAft>
+                <a:spcPts val="300"/>
+              </a:spcAft>
+              <a:buNone/>
+            </a:pPr>
+            <a:r>
+              <a:rPr lang="en-US" sz="1300" i="1" dirty="0">
+                <a:solidFill>
+                  <a:srgbClr val="1C2833"/>
+                </a:solidFill>
+                <a:latin typeface="Georgia" pitchFamily="34" charset="0"/>
+                <a:ea typeface="Georgia" pitchFamily="34" charset="-122"/>
+                <a:cs typeface="Georgia" pitchFamily="34" charset="-120"/>
+              </a:rPr>
+              <a:t>b</a:t>
+            </a:r>
+            <a:pPr algn="l" indent="0" marL="0">
+              <a:lnSpc>
+                <a:spcPts val="1820"/>
+              </a:lnSpc>
+              <a:spcBef>
+                <a:spcPts val="300"/>
+              </a:spcBef>
+              <a:spcAft>
+                <a:spcPts val="300"/>
+              </a:spcAft>
+              <a:buNone/>
+            </a:pPr>
+            <a:r>
+              <a:rPr lang="en-US" sz="1300" dirty="0">
+                <a:solidFill>
+                  <a:srgbClr val="1C2833"/>
+                </a:solidFill>
+                <a:latin typeface="Georgia" pitchFamily="34" charset="0"/>
+                <a:ea typeface="Georgia" pitchFamily="34" charset="-122"/>
+                <a:cs typeface="Georgia" pitchFamily="34" charset="-120"/>
+              </a:rPr>
+              <a:t> + </a:t>
+            </a:r>
+            <a:pPr algn="l" indent="0" marL="0">
+              <a:lnSpc>
+                <a:spcPts val="1820"/>
+              </a:lnSpc>
+              <a:spcBef>
+                <a:spcPts val="300"/>
+              </a:spcBef>
+              <a:spcAft>
+                <a:spcPts val="300"/>
+              </a:spcAft>
+              <a:buNone/>
+            </a:pPr>
+            <a:r>
+              <a:rPr lang="en-US" sz="1300" i="1" dirty="0">
+                <a:solidFill>
+                  <a:srgbClr val="1C2833"/>
+                </a:solidFill>
+                <a:latin typeface="Georgia" pitchFamily="34" charset="0"/>
+                <a:ea typeface="Georgia" pitchFamily="34" charset="-122"/>
+                <a:cs typeface="Georgia" pitchFamily="34" charset="-120"/>
+              </a:rPr>
+              <a:t>c</a:t>
+            </a:r>
+            <a:pPr algn="l" indent="0" marL="0">
+              <a:lnSpc>
+                <a:spcPts val="1820"/>
+              </a:lnSpc>
+              <a:spcBef>
+                <a:spcPts val="300"/>
+              </a:spcBef>
+              <a:spcAft>
+                <a:spcPts val="300"/>
+              </a:spcAft>
+              <a:buNone/>
+            </a:pPr>
+            <a:r>
+              <a:rPr lang="en-US" sz="1300" dirty="0">
+                <a:solidFill>
+                  <a:srgbClr val="1C2833"/>
+                </a:solidFill>
+                <a:latin typeface="Georgia" pitchFamily="34" charset="0"/>
+                <a:ea typeface="Georgia" pitchFamily="34" charset="-122"/>
+                <a:cs typeface="Georgia" pitchFamily="34" charset="-120"/>
+              </a:rPr>
+              <a:t>) × 11 = 1000</a:t>
+            </a:r>
+            <a:pPr algn="l" indent="0" marL="0">
+              <a:lnSpc>
+                <a:spcPts val="1820"/>
+              </a:lnSpc>
+              <a:spcBef>
+                <a:spcPts val="300"/>
+              </a:spcBef>
+              <a:spcAft>
+                <a:spcPts val="300"/>
+              </a:spcAft>
+              <a:buNone/>
+            </a:pPr>
+            <a:r>
+              <a:rPr lang="en-US" sz="1300" i="1" dirty="0">
+                <a:solidFill>
+                  <a:srgbClr val="1C2833"/>
+                </a:solidFill>
+                <a:latin typeface="Georgia" pitchFamily="34" charset="0"/>
+                <a:ea typeface="Georgia" pitchFamily="34" charset="-122"/>
+                <a:cs typeface="Georgia" pitchFamily="34" charset="-120"/>
+              </a:rPr>
+              <a:t>a</a:t>
+            </a:r>
+            <a:pPr algn="l" indent="0" marL="0">
+              <a:lnSpc>
+                <a:spcPts val="1820"/>
+              </a:lnSpc>
+              <a:spcBef>
+                <a:spcPts val="300"/>
+              </a:spcBef>
+              <a:spcAft>
+                <a:spcPts val="300"/>
+              </a:spcAft>
+              <a:buNone/>
+            </a:pPr>
+            <a:r>
+              <a:rPr lang="en-US" sz="1300" dirty="0">
+                <a:solidFill>
+                  <a:srgbClr val="1C2833"/>
+                </a:solidFill>
+                <a:latin typeface="Georgia" pitchFamily="34" charset="0"/>
+                <a:ea typeface="Georgia" pitchFamily="34" charset="-122"/>
+                <a:cs typeface="Georgia" pitchFamily="34" charset="-120"/>
+              </a:rPr>
+              <a:t> + 100(</a:t>
+            </a:r>
+            <a:pPr algn="l" indent="0" marL="0">
+              <a:lnSpc>
+                <a:spcPts val="1820"/>
+              </a:lnSpc>
+              <a:spcBef>
+                <a:spcPts val="300"/>
+              </a:spcBef>
+              <a:spcAft>
+                <a:spcPts val="300"/>
+              </a:spcAft>
+              <a:buNone/>
+            </a:pPr>
+            <a:r>
+              <a:rPr lang="en-US" sz="1300" i="1" dirty="0">
+                <a:solidFill>
+                  <a:srgbClr val="1C2833"/>
+                </a:solidFill>
+                <a:latin typeface="Georgia" pitchFamily="34" charset="0"/>
+                <a:ea typeface="Georgia" pitchFamily="34" charset="-122"/>
+                <a:cs typeface="Georgia" pitchFamily="34" charset="-120"/>
+              </a:rPr>
+              <a:t>a</a:t>
+            </a:r>
+            <a:pPr algn="l" indent="0" marL="0">
+              <a:lnSpc>
+                <a:spcPts val="1820"/>
+              </a:lnSpc>
+              <a:spcBef>
+                <a:spcPts val="300"/>
+              </a:spcBef>
+              <a:spcAft>
+                <a:spcPts val="300"/>
+              </a:spcAft>
+              <a:buNone/>
+            </a:pPr>
+            <a:r>
+              <a:rPr lang="en-US" sz="1300" dirty="0">
+                <a:solidFill>
+                  <a:srgbClr val="1C2833"/>
+                </a:solidFill>
+                <a:latin typeface="Georgia" pitchFamily="34" charset="0"/>
+                <a:ea typeface="Georgia" pitchFamily="34" charset="-122"/>
+                <a:cs typeface="Georgia" pitchFamily="34" charset="-120"/>
+              </a:rPr>
+              <a:t>+</a:t>
+            </a:r>
+            <a:pPr algn="l" indent="0" marL="0">
+              <a:lnSpc>
+                <a:spcPts val="1820"/>
+              </a:lnSpc>
+              <a:spcBef>
+                <a:spcPts val="300"/>
+              </a:spcBef>
+              <a:spcAft>
+                <a:spcPts val="300"/>
+              </a:spcAft>
+              <a:buNone/>
+            </a:pPr>
+            <a:r>
+              <a:rPr lang="en-US" sz="1300" i="1" dirty="0">
+                <a:solidFill>
+                  <a:srgbClr val="1C2833"/>
+                </a:solidFill>
+                <a:latin typeface="Georgia" pitchFamily="34" charset="0"/>
+                <a:ea typeface="Georgia" pitchFamily="34" charset="-122"/>
+                <a:cs typeface="Georgia" pitchFamily="34" charset="-120"/>
+              </a:rPr>
+              <a:t>b</a:t>
+            </a:r>
+            <a:pPr algn="l" indent="0" marL="0">
+              <a:lnSpc>
+                <a:spcPts val="1820"/>
+              </a:lnSpc>
+              <a:spcBef>
+                <a:spcPts val="300"/>
+              </a:spcBef>
+              <a:spcAft>
+                <a:spcPts val="300"/>
+              </a:spcAft>
+              <a:buNone/>
+            </a:pPr>
+            <a:r>
+              <a:rPr lang="en-US" sz="1300" dirty="0">
+                <a:solidFill>
+                  <a:srgbClr val="1C2833"/>
+                </a:solidFill>
+                <a:latin typeface="Georgia" pitchFamily="34" charset="0"/>
+                <a:ea typeface="Georgia" pitchFamily="34" charset="-122"/>
+                <a:cs typeface="Georgia" pitchFamily="34" charset="-120"/>
+              </a:rPr>
+              <a:t>) + 10(</a:t>
+            </a:r>
+            <a:pPr algn="l" indent="0" marL="0">
+              <a:lnSpc>
+                <a:spcPts val="1820"/>
+              </a:lnSpc>
+              <a:spcBef>
+                <a:spcPts val="300"/>
+              </a:spcBef>
+              <a:spcAft>
+                <a:spcPts val="300"/>
+              </a:spcAft>
+              <a:buNone/>
+            </a:pPr>
+            <a:r>
+              <a:rPr lang="en-US" sz="1300" i="1" dirty="0">
+                <a:solidFill>
+                  <a:srgbClr val="1C2833"/>
+                </a:solidFill>
+                <a:latin typeface="Georgia" pitchFamily="34" charset="0"/>
+                <a:ea typeface="Georgia" pitchFamily="34" charset="-122"/>
+                <a:cs typeface="Georgia" pitchFamily="34" charset="-120"/>
+              </a:rPr>
+              <a:t>b</a:t>
+            </a:r>
+            <a:pPr algn="l" indent="0" marL="0">
+              <a:lnSpc>
+                <a:spcPts val="1820"/>
+              </a:lnSpc>
+              <a:spcBef>
+                <a:spcPts val="300"/>
+              </a:spcBef>
+              <a:spcAft>
+                <a:spcPts val="300"/>
+              </a:spcAft>
+              <a:buNone/>
+            </a:pPr>
+            <a:r>
+              <a:rPr lang="en-US" sz="1300" dirty="0">
+                <a:solidFill>
+                  <a:srgbClr val="1C2833"/>
+                </a:solidFill>
+                <a:latin typeface="Georgia" pitchFamily="34" charset="0"/>
+                <a:ea typeface="Georgia" pitchFamily="34" charset="-122"/>
+                <a:cs typeface="Georgia" pitchFamily="34" charset="-120"/>
+              </a:rPr>
+              <a:t>+</a:t>
+            </a:r>
+            <a:pPr algn="l" indent="0" marL="0">
+              <a:lnSpc>
+                <a:spcPts val="1820"/>
+              </a:lnSpc>
+              <a:spcBef>
+                <a:spcPts val="300"/>
+              </a:spcBef>
+              <a:spcAft>
+                <a:spcPts val="300"/>
+              </a:spcAft>
+              <a:buNone/>
+            </a:pPr>
+            <a:r>
+              <a:rPr lang="en-US" sz="1300" i="1" dirty="0">
+                <a:solidFill>
+                  <a:srgbClr val="1C2833"/>
+                </a:solidFill>
+                <a:latin typeface="Georgia" pitchFamily="34" charset="0"/>
+                <a:ea typeface="Georgia" pitchFamily="34" charset="-122"/>
+                <a:cs typeface="Georgia" pitchFamily="34" charset="-120"/>
+              </a:rPr>
+              <a:t>c</a:t>
+            </a:r>
+            <a:pPr algn="l" indent="0" marL="0">
+              <a:lnSpc>
+                <a:spcPts val="1820"/>
+              </a:lnSpc>
+              <a:spcBef>
+                <a:spcPts val="300"/>
+              </a:spcBef>
+              <a:spcAft>
+                <a:spcPts val="300"/>
+              </a:spcAft>
+              <a:buNone/>
+            </a:pPr>
+            <a:r>
+              <a:rPr lang="en-US" sz="1300" dirty="0">
+                <a:solidFill>
+                  <a:srgbClr val="1C2833"/>
+                </a:solidFill>
+                <a:latin typeface="Georgia" pitchFamily="34" charset="0"/>
+                <a:ea typeface="Georgia" pitchFamily="34" charset="-122"/>
+                <a:cs typeface="Georgia" pitchFamily="34" charset="-120"/>
+              </a:rPr>
+              <a:t>) + </a:t>
+            </a:r>
+            <a:pPr algn="l" indent="0" marL="0">
+              <a:lnSpc>
+                <a:spcPts val="1820"/>
+              </a:lnSpc>
+              <a:spcBef>
+                <a:spcPts val="300"/>
+              </a:spcBef>
+              <a:spcAft>
+                <a:spcPts val="300"/>
+              </a:spcAft>
+              <a:buNone/>
+            </a:pPr>
+            <a:r>
+              <a:rPr lang="en-US" sz="1300" i="1" dirty="0">
+                <a:solidFill>
+                  <a:srgbClr val="1C2833"/>
+                </a:solidFill>
+                <a:latin typeface="Georgia" pitchFamily="34" charset="0"/>
+                <a:ea typeface="Georgia" pitchFamily="34" charset="-122"/>
+                <a:cs typeface="Georgia" pitchFamily="34" charset="-120"/>
+              </a:rPr>
+              <a:t>c</a:t>
+            </a:r>
+            <a:pPr algn="l" indent="0" marL="0">
+              <a:lnSpc>
+                <a:spcPts val="1820"/>
+              </a:lnSpc>
+              <a:spcBef>
+                <a:spcPts val="300"/>
+              </a:spcBef>
+              <a:spcAft>
+                <a:spcPts val="300"/>
+              </a:spcAft>
+              <a:buNone/>
+            </a:pPr>
+            <a:r>
+              <a:rPr lang="en-US" sz="1300" dirty="0">
+                <a:solidFill>
+                  <a:srgbClr val="1C2833"/>
+                </a:solidFill>
+                <a:latin typeface="Georgia" pitchFamily="34" charset="0"/>
+                <a:ea typeface="Georgia" pitchFamily="34" charset="-122"/>
+                <a:cs typeface="Georgia" pitchFamily="34" charset="-120"/>
+              </a:rPr>
+              <a:t>.</a:t>
+            </a:r>
+            <a:endParaRPr lang="en-US" sz="1300" dirty="0"/>
+          </a:p>
+        </p:txBody>
+      </p:sp>
+      <p:sp>
+        <p:nvSpPr>
+          <p:cNvPr id="14" name="Text 12"/>
+          <p:cNvSpPr/>
+          <p:nvPr/>
+        </p:nvSpPr>
+        <p:spPr>
+          <a:xfrm>
+            <a:off x="406301" y="4434929"/>
+            <a:ext cx="8498026" cy="213271"/>
+          </a:xfrm>
+          <a:prstGeom prst="rect">
+            <a:avLst/>
+          </a:prstGeom>
+          <a:noFill/>
+          <a:ln/>
+        </p:spPr>
+        <p:txBody>
+          <a:bodyPr wrap="square" lIns="0" tIns="0" rIns="0" bIns="0" rtlCol="0" anchor="t"/>
+          <a:lstStyle/>
+          <a:p>
+            <a:pPr algn="l" indent="0" marL="0">
+              <a:lnSpc>
+                <a:spcPts val="1680"/>
+              </a:lnSpc>
+              <a:spcBef>
+                <a:spcPts val="300"/>
+              </a:spcBef>
+              <a:spcAft>
+                <a:spcPts val="300"/>
+              </a:spcAft>
+              <a:buNone/>
+            </a:pPr>
+            <a:r>
+              <a:rPr lang="en-US" sz="1200" dirty="0">
+                <a:solidFill>
+                  <a:srgbClr val="1C2833"/>
+                </a:solidFill>
+                <a:latin typeface="Arial" pitchFamily="34" charset="0"/>
+                <a:ea typeface="Arial" pitchFamily="34" charset="-122"/>
+                <a:cs typeface="Arial" pitchFamily="34" charset="-120"/>
+              </a:rPr>
+              <a:t>Middle ·  · IKS Curriculum</a:t>
+            </a:r>
+            <a:endParaRPr lang="en-US" sz="1200" dirty="0"/>
+          </a:p>
+        </p:txBody>
+      </p:sp>
+    </p:spTree>
+  </p:cSld>
+  <p:clrMapOvr>
+    <a:masterClrMapping/>
+  </p:clrMapOvr>
+</p:sld>
+</file>
+
+<file path=ppt/slides/slide17.xml><?xml version="1.0" encoding="utf-8"?>
+<p:sld xmlns:a="http://schemas.openxmlformats.org/drawingml/2006/main" xmlns:r="http://schemas.openxmlformats.org/officeDocument/2006/relationships" xmlns:p="http://schemas.openxmlformats.org/presentationml/2006/main">
+  <p:cSld name="Slide 17">
+    <p:bg>
+      <p:bgPr>
+        <a:solidFill>
+          <a:srgbClr val="FFFFFF"/>
+        </a:solidFill>
+      </p:bgPr>
+    </p:bg>
+    <p:spTree>
+      <p:nvGrpSpPr>
+        <p:cNvPr id="1" name=""/>
+        <p:cNvGrpSpPr/>
+        <p:nvPr/>
+      </p:nvGrpSpPr>
+      <p:grpSpPr>
+        <a:xfrm>
+          <a:off x="0" y="0"/>
+          <a:ext cx="0" cy="0"/>
+          <a:chOff x="0" y="0"/>
+          <a:chExt cx="0" cy="0"/>
+        </a:xfrm>
+      </p:grpSpPr>
+      <p:sp>
+        <p:nvSpPr>
+          <p:cNvPr id="2" name="Text 0"/>
+          <p:cNvSpPr/>
+          <p:nvPr/>
+        </p:nvSpPr>
+        <p:spPr>
+          <a:xfrm>
+            <a:off x="0" y="0"/>
+            <a:ext cx="9144000" cy="101501"/>
+          </a:xfrm>
+          <a:prstGeom prst="rect">
+            <a:avLst/>
+          </a:prstGeom>
+          <a:solidFill>
+            <a:srgbClr val="277884"/>
+          </a:solidFill>
+          <a:ln/>
+        </p:spPr>
+        <p:txBody>
+          <a:bodyPr wrap="square" rtlCol="0" anchor="ctr"/>
+          <a:lstStyle/>
+          <a:p>
+            <a:pPr indent="0" marL="0">
+              <a:buNone/>
+            </a:pPr>
+            <a:endParaRPr lang="en-US" dirty="0"/>
+          </a:p>
+        </p:txBody>
+      </p:sp>
+      <p:sp>
+        <p:nvSpPr>
+          <p:cNvPr id="3" name="Text 1"/>
+          <p:cNvSpPr/>
+          <p:nvPr/>
+        </p:nvSpPr>
+        <p:spPr>
+          <a:xfrm>
+            <a:off x="406301" y="457051"/>
+            <a:ext cx="8498026" cy="274290"/>
+          </a:xfrm>
+          <a:prstGeom prst="rect">
+            <a:avLst/>
+          </a:prstGeom>
+          <a:noFill/>
+          <a:ln/>
+        </p:spPr>
+        <p:txBody>
+          <a:bodyPr wrap="square" lIns="0" tIns="0" rIns="0" bIns="0" rtlCol="0" anchor="t"/>
+          <a:lstStyle/>
+          <a:p>
+            <a:pPr algn="l" indent="0" marL="0">
+              <a:lnSpc>
+                <a:spcPts val="2160"/>
+              </a:lnSpc>
+              <a:spcBef>
+                <a:spcPts val="600"/>
+              </a:spcBef>
+              <a:spcAft>
+                <a:spcPts val="800"/>
+              </a:spcAft>
+              <a:buNone/>
+            </a:pPr>
+            <a:r>
+              <a:rPr lang="en-US" sz="1800" b="1" dirty="0">
+                <a:solidFill>
+                  <a:srgbClr val="FE4447"/>
+                </a:solidFill>
+                <a:latin typeface="Georgia" pitchFamily="34" charset="0"/>
+                <a:ea typeface="Georgia" pitchFamily="34" charset="-122"/>
+                <a:cs typeface="Georgia" pitchFamily="34" charset="-120"/>
+              </a:rPr>
+              <a:t>Homework</a:t>
+            </a:r>
+            <a:endParaRPr lang="en-US" sz="1800" dirty="0"/>
+          </a:p>
+        </p:txBody>
+      </p:sp>
+      <p:sp>
+        <p:nvSpPr>
+          <p:cNvPr id="4" name="Text 2"/>
+          <p:cNvSpPr/>
+          <p:nvPr/>
+        </p:nvSpPr>
+        <p:spPr>
+          <a:xfrm>
+            <a:off x="634901" y="883593"/>
+            <a:ext cx="8102798" cy="281880"/>
+          </a:xfrm>
+          <a:prstGeom prst="rect">
+            <a:avLst/>
+          </a:prstGeom>
+          <a:noFill/>
+          <a:ln/>
+        </p:spPr>
+        <p:txBody>
+          <a:bodyPr wrap="square" lIns="0" tIns="0" rIns="0" bIns="0" rtlCol="0" anchor="t"/>
+          <a:lstStyle/>
+          <a:p>
+            <a:pPr algn="l" marL="342900" indent="-342900">
+              <a:lnSpc>
+                <a:spcPts val="1620"/>
+              </a:lnSpc>
+              <a:spcAft>
+                <a:spcPts val="300"/>
+              </a:spcAft>
+              <a:buSzPct val="100000"/>
+              <a:buChar char="•"/>
+            </a:pPr>
+            <a:r>
+              <a:rPr lang="en-US" sz="1200" dirty="0">
+                <a:solidFill>
+                  <a:srgbClr val="1C2833"/>
+                </a:solidFill>
+                <a:latin typeface="Arial" pitchFamily="34" charset="0"/>
+                <a:ea typeface="Arial" pitchFamily="34" charset="-122"/>
+                <a:cs typeface="Arial" pitchFamily="34" charset="-120"/>
+              </a:rPr>
+              <a:t>Solve 10 three-digit × 11 problems on the back of today's worksheet. Time yourself — goal: under 90 seconds total.</a:t>
+            </a:r>
+            <a:endParaRPr lang="en-US" sz="1200" dirty="0"/>
+          </a:p>
+        </p:txBody>
+      </p:sp>
+      <p:sp>
+        <p:nvSpPr>
+          <p:cNvPr id="5" name="Text 3"/>
+          <p:cNvSpPr/>
+          <p:nvPr/>
+        </p:nvSpPr>
+        <p:spPr>
+          <a:xfrm>
+            <a:off x="406301" y="4434929"/>
+            <a:ext cx="8498026" cy="213271"/>
+          </a:xfrm>
+          <a:prstGeom prst="rect">
+            <a:avLst/>
+          </a:prstGeom>
+          <a:noFill/>
+          <a:ln/>
+        </p:spPr>
+        <p:txBody>
+          <a:bodyPr wrap="square" lIns="0" tIns="0" rIns="0" bIns="0" rtlCol="0" anchor="t"/>
+          <a:lstStyle/>
+          <a:p>
+            <a:pPr algn="l" indent="0" marL="0">
+              <a:lnSpc>
+                <a:spcPts val="1680"/>
+              </a:lnSpc>
+              <a:spcBef>
+                <a:spcPts val="300"/>
+              </a:spcBef>
+              <a:spcAft>
+                <a:spcPts val="300"/>
+              </a:spcAft>
+              <a:buNone/>
+            </a:pPr>
+            <a:r>
+              <a:rPr lang="en-US" sz="1200" dirty="0">
+                <a:solidFill>
+                  <a:srgbClr val="1C2833"/>
+                </a:solidFill>
+                <a:latin typeface="Arial" pitchFamily="34" charset="0"/>
+                <a:ea typeface="Arial" pitchFamily="34" charset="-122"/>
+                <a:cs typeface="Arial" pitchFamily="34" charset="-120"/>
+              </a:rPr>
+              <a:t>Middle ·  · IKS Curriculum</a:t>
+            </a:r>
+            <a:endParaRPr lang="en-US" sz="1200" dirty="0"/>
+          </a:p>
+        </p:txBody>
+      </p:sp>
+    </p:spTree>
+  </p:cSld>
+  <p:clrMapOvr>
+    <a:masterClrMapping/>
+  </p:clrMapOvr>
+</p:sld>
+</file>
+
+<file path=ppt/slides/slide18.xml><?xml version="1.0" encoding="utf-8"?>
+<p:sld xmlns:a="http://schemas.openxmlformats.org/drawingml/2006/main" xmlns:r="http://schemas.openxmlformats.org/officeDocument/2006/relationships" xmlns:p="http://schemas.openxmlformats.org/presentationml/2006/main">
+  <p:cSld name="Slide 18">
+    <p:bg>
+      <p:bgPr>
+        <a:solidFill>
+          <a:srgbClr val="FFFFFF"/>
+        </a:solidFill>
+      </p:bgPr>
+    </p:bg>
+    <p:spTree>
+      <p:nvGrpSpPr>
+        <p:cNvPr id="1" name=""/>
+        <p:cNvGrpSpPr/>
+        <p:nvPr/>
+      </p:nvGrpSpPr>
+      <p:grpSpPr>
+        <a:xfrm>
+          <a:off x="0" y="0"/>
+          <a:ext cx="0" cy="0"/>
+          <a:chOff x="0" y="0"/>
+          <a:chExt cx="0" cy="0"/>
+        </a:xfrm>
+      </p:grpSpPr>
+      <p:sp>
+        <p:nvSpPr>
+          <p:cNvPr id="2" name="Text 0"/>
+          <p:cNvSpPr/>
+          <p:nvPr/>
+        </p:nvSpPr>
+        <p:spPr>
+          <a:xfrm>
+            <a:off x="0" y="0"/>
+            <a:ext cx="9144000" cy="101501"/>
+          </a:xfrm>
+          <a:prstGeom prst="rect">
+            <a:avLst/>
+          </a:prstGeom>
+          <a:solidFill>
+            <a:srgbClr val="277884"/>
+          </a:solidFill>
+          <a:ln/>
+        </p:spPr>
+        <p:txBody>
+          <a:bodyPr wrap="square" rtlCol="0" anchor="ctr"/>
+          <a:lstStyle/>
+          <a:p>
+            <a:pPr indent="0" marL="0">
+              <a:buNone/>
+            </a:pPr>
+            <a:endParaRPr lang="en-US" dirty="0"/>
+          </a:p>
+        </p:txBody>
+      </p:sp>
+      <p:sp>
+        <p:nvSpPr>
+          <p:cNvPr id="3" name="Text 1"/>
+          <p:cNvSpPr/>
+          <p:nvPr/>
+        </p:nvSpPr>
+        <p:spPr>
+          <a:xfrm>
+            <a:off x="406301" y="457051"/>
+            <a:ext cx="8498026" cy="274290"/>
+          </a:xfrm>
+          <a:prstGeom prst="rect">
+            <a:avLst/>
+          </a:prstGeom>
+          <a:noFill/>
+          <a:ln/>
+        </p:spPr>
+        <p:txBody>
+          <a:bodyPr wrap="square" lIns="0" tIns="0" rIns="0" bIns="0" rtlCol="0" anchor="t"/>
+          <a:lstStyle/>
+          <a:p>
+            <a:pPr algn="l" indent="0" marL="0">
+              <a:lnSpc>
+                <a:spcPts val="2160"/>
+              </a:lnSpc>
+              <a:spcBef>
+                <a:spcPts val="600"/>
+              </a:spcBef>
+              <a:spcAft>
+                <a:spcPts val="800"/>
+              </a:spcAft>
+              <a:buNone/>
+            </a:pPr>
+            <a:r>
+              <a:rPr lang="en-US" sz="1800" b="1" dirty="0">
+                <a:solidFill>
+                  <a:srgbClr val="FE4447"/>
+                </a:solidFill>
+                <a:latin typeface="Georgia" pitchFamily="34" charset="0"/>
+                <a:ea typeface="Georgia" pitchFamily="34" charset="-122"/>
+                <a:cs typeface="Georgia" pitchFamily="34" charset="-120"/>
+              </a:rPr>
+              <a:t>Differentiation</a:t>
+            </a:r>
+            <a:endParaRPr lang="en-US" sz="1800" dirty="0"/>
+          </a:p>
+        </p:txBody>
+      </p:sp>
+      <p:sp>
+        <p:nvSpPr>
+          <p:cNvPr id="4" name="Text 2"/>
+          <p:cNvSpPr/>
+          <p:nvPr/>
+        </p:nvSpPr>
+        <p:spPr>
+          <a:xfrm>
+            <a:off x="634901" y="883593"/>
+            <a:ext cx="8102798" cy="525661"/>
+          </a:xfrm>
+          <a:prstGeom prst="rect">
+            <a:avLst/>
+          </a:prstGeom>
+          <a:noFill/>
+          <a:ln/>
+        </p:spPr>
+        <p:txBody>
+          <a:bodyPr wrap="square" lIns="0" tIns="0" rIns="0" bIns="0" rtlCol="0" anchor="t"/>
+          <a:lstStyle/>
+          <a:p>
+            <a:pPr algn="l" marL="342900" indent="-342900">
+              <a:lnSpc>
+                <a:spcPts val="1620"/>
+              </a:lnSpc>
+              <a:spcAft>
+                <a:spcPts val="300"/>
+              </a:spcAft>
+              <a:buSzPct val="100000"/>
+              <a:buChar char="•"/>
+            </a:pPr>
+            <a:r>
+              <a:rPr lang="en-US" sz="1200" b="1" dirty="0">
+                <a:solidFill>
+                  <a:srgbClr val="1C2833"/>
+                </a:solidFill>
+                <a:latin typeface="Arial" pitchFamily="34" charset="0"/>
+                <a:ea typeface="Arial" pitchFamily="34" charset="-122"/>
+                <a:cs typeface="Arial" pitchFamily="34" charset="-120"/>
+              </a:rPr>
+              <a:t>Tier up:</a:t>
+            </a:r>
+            <a:pPr algn="l" indent="0" marL="0">
+              <a:lnSpc>
+                <a:spcPts val="1620"/>
+              </a:lnSpc>
+              <a:spcAft>
+                <a:spcPts val="300"/>
+              </a:spcAft>
+              <a:buNone/>
+            </a:pPr>
+            <a:r>
+              <a:rPr lang="en-US" sz="1200" dirty="0">
+                <a:solidFill>
+                  <a:srgbClr val="1C2833"/>
+                </a:solidFill>
+                <a:latin typeface="Arial" pitchFamily="34" charset="0"/>
+                <a:ea typeface="Arial" pitchFamily="34" charset="-122"/>
+                <a:cs typeface="Arial" pitchFamily="34" charset="-120"/>
+              </a:rPr>
+              <a:t> Try a 4-digit × 11 problem. Derive the pattern first (the identity will give you 5 terms). Test on 2345 × 11.</a:t>
+            </a:r>
+            <a:endParaRPr lang="en-US" sz="1200" dirty="0"/>
+          </a:p>
+          <a:p>
+            <a:pPr algn="l" marL="342900" indent="-342900">
+              <a:lnSpc>
+                <a:spcPts val="1620"/>
+              </a:lnSpc>
+              <a:spcAft>
+                <a:spcPts val="300"/>
+              </a:spcAft>
+              <a:buSzPct val="100000"/>
+              <a:buChar char="•"/>
+            </a:pPr>
+            <a:r>
+              <a:rPr lang="en-US" sz="1200" b="1" dirty="0">
+                <a:solidFill>
+                  <a:srgbClr val="1C2833"/>
+                </a:solidFill>
+                <a:latin typeface="Arial" pitchFamily="34" charset="0"/>
+                <a:ea typeface="Arial" pitchFamily="34" charset="-122"/>
+                <a:cs typeface="Arial" pitchFamily="34" charset="-120"/>
+              </a:rPr>
+              <a:t>Tier down:</a:t>
+            </a:r>
+            <a:pPr algn="l" indent="0" marL="0">
+              <a:lnSpc>
+                <a:spcPts val="1620"/>
+              </a:lnSpc>
+              <a:spcAft>
+                <a:spcPts val="300"/>
+              </a:spcAft>
+              <a:buNone/>
+            </a:pPr>
+            <a:r>
+              <a:rPr lang="en-US" sz="1200" dirty="0">
+                <a:solidFill>
+                  <a:srgbClr val="1C2833"/>
+                </a:solidFill>
+                <a:latin typeface="Arial" pitchFamily="34" charset="0"/>
+                <a:ea typeface="Arial" pitchFamily="34" charset="-122"/>
+                <a:cs typeface="Arial" pitchFamily="34" charset="-120"/>
+              </a:rPr>
+              <a:t> Stay on 2-digit × 11 problems with carries; build speed there before adding the 3-digit layer.</a:t>
+            </a:r>
+            <a:endParaRPr lang="en-US" sz="1200" dirty="0"/>
+          </a:p>
+        </p:txBody>
+      </p:sp>
+      <p:sp>
+        <p:nvSpPr>
+          <p:cNvPr id="5" name="Text 3"/>
+          <p:cNvSpPr/>
+          <p:nvPr/>
+        </p:nvSpPr>
+        <p:spPr>
+          <a:xfrm>
+            <a:off x="406301" y="4434929"/>
+            <a:ext cx="8498026" cy="213271"/>
+          </a:xfrm>
+          <a:prstGeom prst="rect">
+            <a:avLst/>
+          </a:prstGeom>
+          <a:noFill/>
+          <a:ln/>
+        </p:spPr>
+        <p:txBody>
+          <a:bodyPr wrap="square" lIns="0" tIns="0" rIns="0" bIns="0" rtlCol="0" anchor="t"/>
+          <a:lstStyle/>
+          <a:p>
+            <a:pPr algn="l" indent="0" marL="0">
+              <a:lnSpc>
+                <a:spcPts val="1680"/>
+              </a:lnSpc>
+              <a:spcBef>
+                <a:spcPts val="300"/>
+              </a:spcBef>
+              <a:spcAft>
+                <a:spcPts val="300"/>
+              </a:spcAft>
+              <a:buNone/>
+            </a:pPr>
+            <a:r>
+              <a:rPr lang="en-US" sz="1200" dirty="0">
+                <a:solidFill>
+                  <a:srgbClr val="1C2833"/>
+                </a:solidFill>
+                <a:latin typeface="Arial" pitchFamily="34" charset="0"/>
+                <a:ea typeface="Arial" pitchFamily="34" charset="-122"/>
+                <a:cs typeface="Arial" pitchFamily="34" charset="-120"/>
+              </a:rPr>
+              <a:t>Middle ·  · IKS Curriculum</a:t>
+            </a:r>
+            <a:endParaRPr lang="en-US" sz="1200" dirty="0"/>
+          </a:p>
+        </p:txBody>
+      </p:sp>
+    </p:spTree>
+  </p:cSld>
+  <p:clrMapOvr>
+    <a:masterClrMapping/>
+  </p:clrMapOvr>
+</p:sld>
+</file>
+
+<file path=ppt/slides/slide19.xml><?xml version="1.0" encoding="utf-8"?>
+<p:sld xmlns:a="http://schemas.openxmlformats.org/drawingml/2006/main" xmlns:r="http://schemas.openxmlformats.org/officeDocument/2006/relationships" xmlns:p="http://schemas.openxmlformats.org/presentationml/2006/main">
+  <p:cSld name="Slide 19">
+    <p:bg>
+      <p:bgPr>
+        <a:solidFill>
+          <a:srgbClr val="FFFFFF"/>
+        </a:solidFill>
+      </p:bgPr>
+    </p:bg>
+    <p:spTree>
+      <p:nvGrpSpPr>
+        <p:cNvPr id="1" name=""/>
+        <p:cNvGrpSpPr/>
+        <p:nvPr/>
+      </p:nvGrpSpPr>
+      <p:grpSpPr>
+        <a:xfrm>
+          <a:off x="0" y="0"/>
+          <a:ext cx="0" cy="0"/>
+          <a:chOff x="0" y="0"/>
+          <a:chExt cx="0" cy="0"/>
+        </a:xfrm>
+      </p:grpSpPr>
+      <p:sp>
+        <p:nvSpPr>
+          <p:cNvPr id="2" name="Text 0"/>
+          <p:cNvSpPr/>
+          <p:nvPr/>
+        </p:nvSpPr>
+        <p:spPr>
+          <a:xfrm>
+            <a:off x="0" y="0"/>
+            <a:ext cx="9144000" cy="101501"/>
+          </a:xfrm>
+          <a:prstGeom prst="rect">
+            <a:avLst/>
+          </a:prstGeom>
+          <a:solidFill>
+            <a:srgbClr val="277884"/>
+          </a:solidFill>
+          <a:ln/>
+        </p:spPr>
+        <p:txBody>
+          <a:bodyPr wrap="square" rtlCol="0" anchor="ctr"/>
+          <a:lstStyle/>
+          <a:p>
+            <a:pPr indent="0" marL="0">
+              <a:buNone/>
+            </a:pPr>
+            <a:endParaRPr lang="en-US" dirty="0"/>
+          </a:p>
+        </p:txBody>
+      </p:sp>
+      <p:sp>
+        <p:nvSpPr>
+          <p:cNvPr id="3" name="Text 1"/>
+          <p:cNvSpPr/>
+          <p:nvPr/>
+        </p:nvSpPr>
+        <p:spPr>
+          <a:xfrm>
+            <a:off x="406301" y="457051"/>
+            <a:ext cx="8498026" cy="274290"/>
+          </a:xfrm>
+          <a:prstGeom prst="rect">
+            <a:avLst/>
+          </a:prstGeom>
+          <a:noFill/>
+          <a:ln/>
+        </p:spPr>
+        <p:txBody>
+          <a:bodyPr wrap="square" lIns="0" tIns="0" rIns="0" bIns="0" rtlCol="0" anchor="t"/>
+          <a:lstStyle/>
+          <a:p>
+            <a:pPr algn="l" indent="0" marL="0">
+              <a:lnSpc>
+                <a:spcPts val="2160"/>
+              </a:lnSpc>
+              <a:spcBef>
+                <a:spcPts val="600"/>
+              </a:spcBef>
+              <a:spcAft>
+                <a:spcPts val="800"/>
+              </a:spcAft>
+              <a:buNone/>
+            </a:pPr>
+            <a:r>
+              <a:rPr lang="en-US" sz="1800" b="1" dirty="0">
+                <a:solidFill>
+                  <a:srgbClr val="FE4447"/>
+                </a:solidFill>
+                <a:latin typeface="Georgia" pitchFamily="34" charset="0"/>
+                <a:ea typeface="Georgia" pitchFamily="34" charset="-122"/>
+                <a:cs typeface="Georgia" pitchFamily="34" charset="-120"/>
+              </a:rPr>
+              <a:t>Teacher notes</a:t>
+            </a:r>
+            <a:endParaRPr lang="en-US" sz="1800" dirty="0"/>
+          </a:p>
+        </p:txBody>
+      </p:sp>
+      <p:sp>
+        <p:nvSpPr>
+          <p:cNvPr id="4" name="Text 2"/>
+          <p:cNvSpPr/>
+          <p:nvPr/>
+        </p:nvSpPr>
+        <p:spPr>
+          <a:xfrm>
+            <a:off x="634901" y="883593"/>
+            <a:ext cx="8102798" cy="1180802"/>
+          </a:xfrm>
+          <a:prstGeom prst="rect">
+            <a:avLst/>
+          </a:prstGeom>
+          <a:noFill/>
+          <a:ln/>
+        </p:spPr>
+        <p:txBody>
+          <a:bodyPr wrap="square" lIns="0" tIns="0" rIns="0" bIns="0" rtlCol="0" anchor="t"/>
+          <a:lstStyle/>
+          <a:p>
+            <a:pPr algn="l" marL="342900" indent="-342900">
+              <a:lnSpc>
+                <a:spcPts val="1620"/>
+              </a:lnSpc>
+              <a:spcAft>
+                <a:spcPts val="300"/>
+              </a:spcAft>
+              <a:buSzPct val="100000"/>
+              <a:buChar char="•"/>
+            </a:pPr>
+            <a:r>
+              <a:rPr lang="en-US" sz="1200" dirty="0">
+                <a:solidFill>
+                  <a:srgbClr val="1C2833"/>
+                </a:solidFill>
+                <a:latin typeface="Arial" pitchFamily="34" charset="0"/>
+                <a:ea typeface="Arial" pitchFamily="34" charset="-122"/>
+                <a:cs typeface="Arial" pitchFamily="34" charset="-120"/>
+              </a:rPr>
+              <a:t>The right-to-left direction for carry handling is the key procedural insight. Some students will try left-to-right and run into trouble; redirect them.</a:t>
+            </a:r>
+            <a:endParaRPr lang="en-US" sz="1200" dirty="0"/>
+          </a:p>
+          <a:p>
+            <a:pPr algn="l" marL="342900" indent="-342900">
+              <a:lnSpc>
+                <a:spcPts val="1620"/>
+              </a:lnSpc>
+              <a:spcAft>
+                <a:spcPts val="300"/>
+              </a:spcAft>
+              <a:buSzPct val="100000"/>
+              <a:buChar char="•"/>
+            </a:pPr>
+            <a:r>
+              <a:rPr lang="en-US" sz="1200" dirty="0">
+                <a:solidFill>
+                  <a:srgbClr val="1C2833"/>
+                </a:solidFill>
+                <a:latin typeface="Arial" pitchFamily="34" charset="0"/>
+                <a:ea typeface="Arial" pitchFamily="34" charset="-122"/>
+                <a:cs typeface="Arial" pitchFamily="34" charset="-120"/>
+              </a:rPr>
+              <a:t>For 567 × 11, the cascading carries (13 in tens, 12 in hundreds) are dramatic. Use that example.</a:t>
+            </a:r>
+            <a:endParaRPr lang="en-US" sz="1200" dirty="0"/>
+          </a:p>
+          <a:p>
+            <a:pPr algn="l" marL="342900" indent="-342900">
+              <a:lnSpc>
+                <a:spcPts val="1620"/>
+              </a:lnSpc>
+              <a:spcAft>
+                <a:spcPts val="300"/>
+              </a:spcAft>
+              <a:buSzPct val="100000"/>
+              <a:buChar char="•"/>
+            </a:pPr>
+            <a:r>
+              <a:rPr lang="en-US" sz="1200" dirty="0">
+                <a:solidFill>
+                  <a:srgbClr val="1C2833"/>
+                </a:solidFill>
+                <a:latin typeface="Arial" pitchFamily="34" charset="0"/>
+                <a:ea typeface="Arial" pitchFamily="34" charset="-122"/>
+                <a:cs typeface="Arial" pitchFamily="34" charset="-120"/>
+              </a:rPr>
+              <a:t>The pattern is sometimes taught with "underline carries" notation; we use right-to-left because it generalises better to </a:t>
+            </a:r>
+            <a:pPr algn="l" indent="0" marL="0">
+              <a:lnSpc>
+                <a:spcPts val="1620"/>
+              </a:lnSpc>
+              <a:spcAft>
+                <a:spcPts val="300"/>
+              </a:spcAft>
+              <a:buNone/>
+            </a:pPr>
+            <a:r>
+              <a:rPr lang="en-US" sz="1200" i="1" dirty="0">
+                <a:solidFill>
+                  <a:srgbClr val="1C2833"/>
+                </a:solidFill>
+                <a:latin typeface="Arial" pitchFamily="34" charset="0"/>
+                <a:ea typeface="Arial" pitchFamily="34" charset="-122"/>
+                <a:cs typeface="Arial" pitchFamily="34" charset="-120"/>
+              </a:rPr>
+              <a:t>n</a:t>
+            </a:r>
+            <a:pPr algn="l" indent="0" marL="0">
+              <a:lnSpc>
+                <a:spcPts val="1620"/>
+              </a:lnSpc>
+              <a:spcAft>
+                <a:spcPts val="300"/>
+              </a:spcAft>
+              <a:buNone/>
+            </a:pPr>
+            <a:r>
+              <a:rPr lang="en-US" sz="1200" dirty="0">
+                <a:solidFill>
+                  <a:srgbClr val="1C2833"/>
+                </a:solidFill>
+                <a:latin typeface="Arial" pitchFamily="34" charset="0"/>
+                <a:ea typeface="Arial" pitchFamily="34" charset="-122"/>
+                <a:cs typeface="Arial" pitchFamily="34" charset="-120"/>
+              </a:rPr>
+              <a:t>-digit numbers.</a:t>
+            </a:r>
+            <a:endParaRPr lang="en-US" sz="1200" dirty="0"/>
+          </a:p>
+        </p:txBody>
+      </p:sp>
+      <p:sp>
+        <p:nvSpPr>
+          <p:cNvPr id="5" name="Text 3"/>
           <p:cNvSpPr/>
           <p:nvPr/>
         </p:nvSpPr>
@@ -3473,7 +7280,7 @@
                 <a:ea typeface="Georgia" pitchFamily="34" charset="-122"/>
                 <a:cs typeface="Georgia" pitchFamily="34" charset="-120"/>
               </a:rPr>
-              <a:t>Materials</a:t>
+              <a:t>Learning objective</a:t>
             </a:r>
             <a:endParaRPr lang="en-US" sz="1800" dirty="0"/>
           </a:p>
@@ -3488,7 +7295,7 @@
         <p:spPr>
           <a:xfrm>
             <a:off x="406301" y="870942"/>
-            <a:ext cx="8498026" cy="222796"/>
+            <a:ext cx="8498026" cy="426541"/>
           </a:xfrm>
           <a:prstGeom prst="rect">
             <a:avLst/>
@@ -3521,8 +7328,33 @@
                 <a:ea typeface="Arial" pitchFamily="34" charset="-122"/>
                 <a:cs typeface="Arial" pitchFamily="34" charset="-120"/>
               </a:rPr>
-              <a:t>– Whiteboard. – Printed worksheet of 10 three-digit × 11 problems. – Formative quiz Part A (</a:t>
-            </a:r>
+              <a:t>By the end of this lesson, students will compute any 3-digit × 11 product using the running "neighbour-sum" pattern, including carry cases, and will complete Part A of the formative quiz.</a:t>
+            </a:r>
+            <a:endParaRPr lang="en-US" sz="1200" dirty="0"/>
+          </a:p>
+        </p:txBody>
+      </p:sp>
+      <p:sp>
+        <p:nvSpPr>
+          <p:cNvPr id="5" name="Text 3"/>
+          <p:cNvSpPr/>
+          <p:nvPr/>
+        </p:nvSpPr>
+        <p:spPr>
+          <a:xfrm>
+            <a:off x="406301" y="4434929"/>
+            <a:ext cx="8498026" cy="213271"/>
+          </a:xfrm>
+          <a:prstGeom prst="rect">
+            <a:avLst/>
+          </a:prstGeom>
+          <a:noFill/>
+          <a:ln/>
+        </p:spPr>
+        <p:txBody>
+          <a:bodyPr wrap="square" lIns="0" tIns="0" rIns="0" bIns="0" rtlCol="0" anchor="t"/>
+          <a:lstStyle/>
+          <a:p>
             <a:pPr algn="l" indent="0" marL="0">
               <a:lnSpc>
                 <a:spcPts val="1680"/>
@@ -3544,22 +7376,155 @@
                 <a:ea typeface="Arial" pitchFamily="34" charset="-122"/>
                 <a:cs typeface="Arial" pitchFamily="34" charset="-120"/>
               </a:rPr>
-              <a:t>quizzes/formative.md</a:t>
-            </a:r>
-            <a:pPr algn="l" indent="0" marL="0">
-              <a:lnSpc>
-                <a:spcPts val="1680"/>
+              <a:t>Middle ·  · IKS Curriculum</a:t>
+            </a:r>
+            <a:endParaRPr lang="en-US" sz="1200" dirty="0"/>
+          </a:p>
+        </p:txBody>
+      </p:sp>
+    </p:spTree>
+  </p:cSld>
+  <p:clrMapOvr>
+    <a:masterClrMapping/>
+  </p:clrMapOvr>
+</p:sld>
+</file>
+
+<file path=ppt/slides/slide20.xml><?xml version="1.0" encoding="utf-8"?>
+<p:sld xmlns:a="http://schemas.openxmlformats.org/drawingml/2006/main" xmlns:r="http://schemas.openxmlformats.org/officeDocument/2006/relationships" xmlns:p="http://schemas.openxmlformats.org/presentationml/2006/main">
+  <p:cSld name="Slide 20">
+    <p:bg>
+      <p:bgPr>
+        <a:solidFill>
+          <a:srgbClr val="FFFFFF"/>
+        </a:solidFill>
+      </p:bgPr>
+    </p:bg>
+    <p:spTree>
+      <p:nvGrpSpPr>
+        <p:cNvPr id="1" name=""/>
+        <p:cNvGrpSpPr/>
+        <p:nvPr/>
+      </p:nvGrpSpPr>
+      <p:grpSpPr>
+        <a:xfrm>
+          <a:off x="0" y="0"/>
+          <a:ext cx="0" cy="0"/>
+          <a:chOff x="0" y="0"/>
+          <a:chExt cx="0" cy="0"/>
+        </a:xfrm>
+      </p:grpSpPr>
+      <p:sp>
+        <p:nvSpPr>
+          <p:cNvPr id="2" name="Text 0"/>
+          <p:cNvSpPr/>
+          <p:nvPr/>
+        </p:nvSpPr>
+        <p:spPr>
+          <a:xfrm>
+            <a:off x="0" y="0"/>
+            <a:ext cx="9144000" cy="101501"/>
+          </a:xfrm>
+          <a:prstGeom prst="rect">
+            <a:avLst/>
+          </a:prstGeom>
+          <a:solidFill>
+            <a:srgbClr val="277884"/>
+          </a:solidFill>
+          <a:ln/>
+        </p:spPr>
+        <p:txBody>
+          <a:bodyPr wrap="square" rtlCol="0" anchor="ctr"/>
+          <a:lstStyle/>
+          <a:p>
+            <a:pPr indent="0" marL="0">
+              <a:buNone/>
+            </a:pPr>
+            <a:endParaRPr lang="en-US" dirty="0"/>
+          </a:p>
+        </p:txBody>
+      </p:sp>
+      <p:sp>
+        <p:nvSpPr>
+          <p:cNvPr id="3" name="Text 1"/>
+          <p:cNvSpPr/>
+          <p:nvPr/>
+        </p:nvSpPr>
+        <p:spPr>
+          <a:xfrm>
+            <a:off x="406301" y="457051"/>
+            <a:ext cx="8498026" cy="274290"/>
+          </a:xfrm>
+          <a:prstGeom prst="rect">
+            <a:avLst/>
+          </a:prstGeom>
+          <a:noFill/>
+          <a:ln/>
+        </p:spPr>
+        <p:txBody>
+          <a:bodyPr wrap="square" lIns="0" tIns="0" rIns="0" bIns="0" rtlCol="0" anchor="t"/>
+          <a:lstStyle/>
+          <a:p>
+            <a:pPr algn="l" indent="0" marL="0">
+              <a:lnSpc>
+                <a:spcPts val="2160"/>
               </a:lnSpc>
               <a:spcBef>
-                <a:spcPts val="300"/>
+                <a:spcPts val="600"/>
               </a:spcBef>
               <a:spcAft>
-                <a:spcPts val="300"/>
-              </a:spcAft>
-              <a:buNone/>
-            </a:pPr>
-            <a:r>
-              <a:rPr lang="en-US" sz="1200" dirty="0">
+                <a:spcPts val="800"/>
+              </a:spcAft>
+              <a:buNone/>
+            </a:pPr>
+            <a:r>
+              <a:rPr lang="en-US" sz="1800" b="1" dirty="0">
+                <a:solidFill>
+                  <a:srgbClr val="FE4447"/>
+                </a:solidFill>
+                <a:latin typeface="Georgia" pitchFamily="34" charset="0"/>
+                <a:ea typeface="Georgia" pitchFamily="34" charset="-122"/>
+                <a:cs typeface="Georgia" pitchFamily="34" charset="-120"/>
+              </a:rPr>
+              <a:t>Citation(s) used in this lesson</a:t>
+            </a:r>
+            <a:endParaRPr lang="en-US" sz="1800" dirty="0"/>
+          </a:p>
+        </p:txBody>
+      </p:sp>
+      <p:sp>
+        <p:nvSpPr>
+          <p:cNvPr id="4" name="Text 2"/>
+          <p:cNvSpPr/>
+          <p:nvPr/>
+        </p:nvSpPr>
+        <p:spPr>
+          <a:xfrm>
+            <a:off x="634901" y="883593"/>
+            <a:ext cx="8102798" cy="525661"/>
+          </a:xfrm>
+          <a:prstGeom prst="rect">
+            <a:avLst/>
+          </a:prstGeom>
+          <a:noFill/>
+          <a:ln/>
+        </p:spPr>
+        <p:txBody>
+          <a:bodyPr wrap="square" lIns="0" tIns="0" rIns="0" bIns="0" rtlCol="0" anchor="t"/>
+          <a:lstStyle/>
+          <a:p>
+            <a:pPr algn="l" marL="342900" indent="-342900">
+              <a:lnSpc>
+                <a:spcPts val="1620"/>
+              </a:lnSpc>
+              <a:spcAft>
+                <a:spcPts val="300"/>
+              </a:spcAft>
+              <a:buSzPct val="100000"/>
+              <a:buChar char="•"/>
+            </a:pPr>
+            <a:r>
+              <a:rPr lang="en-US" sz="1200" i="1" dirty="0">
                 <a:solidFill>
                   <a:srgbClr val="1C2833"/>
                 </a:solidFill>
@@ -3567,7 +7532,51 @@
                 <a:ea typeface="Arial" pitchFamily="34" charset="-122"/>
                 <a:cs typeface="Arial" pitchFamily="34" charset="-120"/>
               </a:rPr>
-              <a:t>).</a:t>
+              <a:t>Vedic_Maths.pdf</a:t>
+            </a:r>
+            <a:pPr algn="l" indent="0" marL="0">
+              <a:lnSpc>
+                <a:spcPts val="1620"/>
+              </a:lnSpc>
+              <a:spcAft>
+                <a:spcPts val="300"/>
+              </a:spcAft>
+              <a:buNone/>
+            </a:pPr>
+            <a:r>
+              <a:rPr lang="en-US" sz="1200" dirty="0">
+                <a:solidFill>
+                  <a:srgbClr val="1C2833"/>
+                </a:solidFill>
+                <a:latin typeface="Arial" pitchFamily="34" charset="0"/>
+                <a:ea typeface="Arial" pitchFamily="34" charset="-122"/>
+                <a:cs typeface="Arial" pitchFamily="34" charset="-120"/>
+              </a:rPr>
+              <a:t> (ISKCON Desire Tree) — practice problems.</a:t>
+            </a:r>
+            <a:endParaRPr lang="en-US" sz="1200" dirty="0"/>
+          </a:p>
+          <a:p>
+            <a:pPr algn="l" marL="342900" indent="-342900">
+              <a:lnSpc>
+                <a:spcPts val="1620"/>
+              </a:lnSpc>
+              <a:spcAft>
+                <a:spcPts val="300"/>
+              </a:spcAft>
+              <a:buSzPct val="100000"/>
+              <a:buChar char="•"/>
+            </a:pPr>
+            <a:r>
+              <a:rPr lang="en-US" sz="1200" dirty="0">
+                <a:solidFill>
+                  <a:srgbClr val="1C2833"/>
+                </a:solidFill>
+                <a:latin typeface="Arial" pitchFamily="34" charset="0"/>
+                <a:ea typeface="Arial" pitchFamily="34" charset="-122"/>
+                <a:cs typeface="Arial" pitchFamily="34" charset="-120"/>
+              </a:rPr>
+              <a:t>Tirthaji (1965), sūtra 1.</a:t>
             </a:r>
             <a:endParaRPr lang="en-US" sz="1200" dirty="0"/>
           </a:p>
@@ -3725,7 +7734,7 @@
                 <a:ea typeface="Georgia" pitchFamily="34" charset="-122"/>
                 <a:cs typeface="Georgia" pitchFamily="34" charset="-120"/>
               </a:rPr>
-              <a:t>Lesson flow</a:t>
+              <a:t>Materials</a:t>
             </a:r>
             <a:endParaRPr lang="en-US" sz="1800" dirty="0"/>
           </a:p>
@@ -3734,6 +7743,140 @@
       <p:sp>
         <p:nvSpPr>
           <p:cNvPr id="4" name="Text 2"/>
+          <p:cNvSpPr/>
+          <p:nvPr/>
+        </p:nvSpPr>
+        <p:spPr>
+          <a:xfrm>
+            <a:off x="634901" y="883593"/>
+            <a:ext cx="8102798" cy="788491"/>
+          </a:xfrm>
+          <a:prstGeom prst="rect">
+            <a:avLst/>
+          </a:prstGeom>
+          <a:noFill/>
+          <a:ln/>
+        </p:spPr>
+        <p:txBody>
+          <a:bodyPr wrap="square" lIns="0" tIns="0" rIns="0" bIns="0" rtlCol="0" anchor="t"/>
+          <a:lstStyle/>
+          <a:p>
+            <a:pPr algn="l" marL="342900" indent="-342900">
+              <a:lnSpc>
+                <a:spcPts val="1620"/>
+              </a:lnSpc>
+              <a:spcAft>
+                <a:spcPts val="300"/>
+              </a:spcAft>
+              <a:buSzPct val="100000"/>
+              <a:buChar char="•"/>
+            </a:pPr>
+            <a:r>
+              <a:rPr lang="en-US" sz="1200" dirty="0">
+                <a:solidFill>
+                  <a:srgbClr val="1C2833"/>
+                </a:solidFill>
+                <a:latin typeface="Arial" pitchFamily="34" charset="0"/>
+                <a:ea typeface="Arial" pitchFamily="34" charset="-122"/>
+                <a:cs typeface="Arial" pitchFamily="34" charset="-120"/>
+              </a:rPr>
+              <a:t>Whiteboard.</a:t>
+            </a:r>
+            <a:endParaRPr lang="en-US" sz="1200" dirty="0"/>
+          </a:p>
+          <a:p>
+            <a:pPr algn="l" marL="342900" indent="-342900">
+              <a:lnSpc>
+                <a:spcPts val="1620"/>
+              </a:lnSpc>
+              <a:spcAft>
+                <a:spcPts val="300"/>
+              </a:spcAft>
+              <a:buSzPct val="100000"/>
+              <a:buChar char="•"/>
+            </a:pPr>
+            <a:r>
+              <a:rPr lang="en-US" sz="1200" dirty="0">
+                <a:solidFill>
+                  <a:srgbClr val="1C2833"/>
+                </a:solidFill>
+                <a:latin typeface="Arial" pitchFamily="34" charset="0"/>
+                <a:ea typeface="Arial" pitchFamily="34" charset="-122"/>
+                <a:cs typeface="Arial" pitchFamily="34" charset="-120"/>
+              </a:rPr>
+              <a:t>Printed worksheet of 10 three-digit × 11 problems.</a:t>
+            </a:r>
+            <a:endParaRPr lang="en-US" sz="1200" dirty="0"/>
+          </a:p>
+          <a:p>
+            <a:pPr algn="l" marL="342900" indent="-342900">
+              <a:lnSpc>
+                <a:spcPts val="1620"/>
+              </a:lnSpc>
+              <a:spcAft>
+                <a:spcPts val="300"/>
+              </a:spcAft>
+              <a:buSzPct val="100000"/>
+              <a:buChar char="•"/>
+            </a:pPr>
+            <a:r>
+              <a:rPr lang="en-US" sz="1200" dirty="0">
+                <a:solidFill>
+                  <a:srgbClr val="1C2833"/>
+                </a:solidFill>
+                <a:latin typeface="Arial" pitchFamily="34" charset="0"/>
+                <a:ea typeface="Arial" pitchFamily="34" charset="-122"/>
+                <a:cs typeface="Arial" pitchFamily="34" charset="-120"/>
+              </a:rPr>
+              <a:t>Formative quiz Part A (</a:t>
+            </a:r>
+            <a:pPr algn="l" indent="0" marL="0">
+              <a:lnSpc>
+                <a:spcPts val="1620"/>
+              </a:lnSpc>
+              <a:spcAft>
+                <a:spcPts val="300"/>
+              </a:spcAft>
+              <a:buNone/>
+            </a:pPr>
+            <a:r>
+              <a:rPr lang="en-US" sz="1200" dirty="0">
+                <a:solidFill>
+                  <a:srgbClr val="1C2833"/>
+                </a:solidFill>
+                <a:latin typeface="Arial" pitchFamily="34" charset="0"/>
+                <a:ea typeface="Arial" pitchFamily="34" charset="-122"/>
+                <a:cs typeface="Arial" pitchFamily="34" charset="-120"/>
+              </a:rPr>
+              <a:t>quizzes/formative.md</a:t>
+            </a:r>
+            <a:pPr algn="l" indent="0" marL="0">
+              <a:lnSpc>
+                <a:spcPts val="1620"/>
+              </a:lnSpc>
+              <a:spcAft>
+                <a:spcPts val="300"/>
+              </a:spcAft>
+              <a:buNone/>
+            </a:pPr>
+            <a:r>
+              <a:rPr lang="en-US" sz="1200" dirty="0">
+                <a:solidFill>
+                  <a:srgbClr val="1C2833"/>
+                </a:solidFill>
+                <a:latin typeface="Arial" pitchFamily="34" charset="0"/>
+                <a:ea typeface="Arial" pitchFamily="34" charset="-122"/>
+                <a:cs typeface="Arial" pitchFamily="34" charset="-120"/>
+              </a:rPr>
+              <a:t>).</a:t>
+            </a:r>
+            <a:endParaRPr lang="en-US" sz="1200" dirty="0"/>
+          </a:p>
+        </p:txBody>
+      </p:sp>
+      <p:sp>
+        <p:nvSpPr>
+          <p:cNvPr id="5" name="Text 3"/>
           <p:cNvSpPr/>
           <p:nvPr/>
         </p:nvSpPr>
@@ -3883,7 +8026,7 @@
                 <a:ea typeface="Georgia" pitchFamily="34" charset="-122"/>
                 <a:cs typeface="Georgia" pitchFamily="34" charset="-120"/>
               </a:rPr>
-              <a:t>Warm-up (5 min)</a:t>
+              <a:t>Lesson flow</a:t>
             </a:r>
             <a:endParaRPr lang="en-US" sz="1800" dirty="0"/>
           </a:p>
@@ -3892,54 +8035,6 @@
       <p:sp>
         <p:nvSpPr>
           <p:cNvPr id="4" name="Text 2"/>
-          <p:cNvSpPr/>
-          <p:nvPr/>
-        </p:nvSpPr>
-        <p:spPr>
-          <a:xfrm>
-            <a:off x="406301" y="870942"/>
-            <a:ext cx="8498026" cy="213271"/>
-          </a:xfrm>
-          <a:prstGeom prst="rect">
-            <a:avLst/>
-          </a:prstGeom>
-          <a:noFill/>
-          <a:ln/>
-        </p:spPr>
-        <p:txBody>
-          <a:bodyPr wrap="square" lIns="0" tIns="0" rIns="0" bIns="0" rtlCol="0" anchor="t"/>
-          <a:lstStyle/>
-          <a:p>
-            <a:pPr algn="l" indent="0" marL="0">
-              <a:lnSpc>
-                <a:spcPts val="1680"/>
-              </a:lnSpc>
-              <a:spcBef>
-                <a:spcPts val="300"/>
-              </a:spcBef>
-              <a:spcAft>
-                <a:spcPts val="300"/>
-              </a:spcAft>
-              <a:buNone/>
-            </a:pPr>
-            <a:r>
-              <a:rPr lang="en-US" sz="1200" dirty="0">
-                <a:solidFill>
-                  <a:srgbClr val="1C2833"/>
-                </a:solidFill>
-                <a:latin typeface="Arial" pitchFamily="34" charset="0"/>
-                <a:ea typeface="Arial" pitchFamily="34" charset="-122"/>
-                <a:cs typeface="Arial" pitchFamily="34" charset="-120"/>
-              </a:rPr>
-              <a:t>– Neighbour-sum chorus: 10 quick 2-digit × 11 problems including carry cases. (Should be near-instant by now.)</a:t>
-            </a:r>
-            <a:endParaRPr lang="en-US" sz="1200" dirty="0"/>
-          </a:p>
-        </p:txBody>
-      </p:sp>
-      <p:sp>
-        <p:nvSpPr>
-          <p:cNvPr id="5" name="Text 3"/>
           <p:cNvSpPr/>
           <p:nvPr/>
         </p:nvSpPr>
@@ -4089,7 +8184,7 @@
                 <a:ea typeface="Georgia" pitchFamily="34" charset="-122"/>
                 <a:cs typeface="Georgia" pitchFamily="34" charset="-120"/>
               </a:rPr>
-              <a:t>Core (18 min) — The 3-digit pattern</a:t>
+              <a:t>Warm-up (5 min)</a:t>
             </a:r>
             <a:endParaRPr lang="en-US" sz="1800" dirty="0"/>
           </a:p>
@@ -4127,7 +8222,7 @@
               <a:buChar char="•"/>
             </a:pPr>
             <a:r>
-              <a:rPr lang="en-US" sz="1200" b="1" dirty="0">
+              <a:rPr lang="en-US" sz="1200" dirty="0">
                 <a:solidFill>
                   <a:srgbClr val="1C2833"/>
                 </a:solidFill>
@@ -4135,47 +8230,7 @@
                 <a:ea typeface="Arial" pitchFamily="34" charset="-122"/>
                 <a:cs typeface="Arial" pitchFamily="34" charset="-120"/>
               </a:rPr>
-              <a:t>Set up.</a:t>
-            </a:r>
-            <a:pPr algn="l" indent="0" marL="0">
-              <a:lnSpc>
-                <a:spcPts val="1620"/>
-              </a:lnSpc>
-              <a:spcAft>
-                <a:spcPts val="300"/>
-              </a:spcAft>
-              <a:buNone/>
-            </a:pPr>
-            <a:r>
-              <a:rPr lang="en-US" sz="1200" dirty="0">
-                <a:solidFill>
-                  <a:srgbClr val="1C2833"/>
-                </a:solidFill>
-                <a:latin typeface="Arial" pitchFamily="34" charset="0"/>
-                <a:ea typeface="Arial" pitchFamily="34" charset="-122"/>
-                <a:cs typeface="Arial" pitchFamily="34" charset="-120"/>
-              </a:rPr>
-              <a:t> </a:t>
-            </a:r>
-            <a:pPr algn="l" indent="0" marL="0">
-              <a:lnSpc>
-                <a:spcPts val="1620"/>
-              </a:lnSpc>
-              <a:spcAft>
-                <a:spcPts val="300"/>
-              </a:spcAft>
-              <a:buNone/>
-            </a:pPr>
-            <a:r>
-              <a:rPr lang="en-US" sz="1200" i="1" dirty="0">
-                <a:solidFill>
-                  <a:srgbClr val="1C2833"/>
-                </a:solidFill>
-                <a:latin typeface="Arial" pitchFamily="34" charset="0"/>
-                <a:ea typeface="Arial" pitchFamily="34" charset="-122"/>
-                <a:cs typeface="Arial" pitchFamily="34" charset="-120"/>
-              </a:rPr>
-              <a:t>"Yesterday we proved (10a+b)×11. What happens with a 3-digit number 100a + 10b + c?"</a:t>
+              <a:t>Neighbour-sum chorus: 10 quick 2-digit × 11 problems including carry cases. (Should be near-instant by now.)</a:t>
             </a:r>
             <a:endParaRPr lang="en-US" sz="1200" dirty="0"/>
           </a:p>
@@ -4189,1726 +8244,7 @@
         </p:nvSpPr>
         <p:spPr>
           <a:xfrm>
-            <a:off x="634901" y="1266974"/>
-            <a:ext cx="8102798" cy="281880"/>
-          </a:xfrm>
-          <a:prstGeom prst="rect">
-            <a:avLst/>
-          </a:prstGeom>
-          <a:noFill/>
-          <a:ln/>
-        </p:spPr>
-        <p:txBody>
-          <a:bodyPr wrap="square" lIns="0" tIns="0" rIns="0" bIns="0" rtlCol="0" anchor="t"/>
-          <a:lstStyle/>
-          <a:p>
-            <a:pPr algn="l" marL="342900" indent="-342900">
-              <a:lnSpc>
-                <a:spcPts val="1620"/>
-              </a:lnSpc>
-              <a:spcAft>
-                <a:spcPts val="300"/>
-              </a:spcAft>
-              <a:buSzPct val="100000"/>
-              <a:buChar char="•"/>
-            </a:pPr>
-            <a:r>
-              <a:rPr lang="en-US" sz="1200" b="1" dirty="0">
-                <a:solidFill>
-                  <a:srgbClr val="1C2833"/>
-                </a:solidFill>
-                <a:latin typeface="Arial" pitchFamily="34" charset="0"/>
-                <a:ea typeface="Arial" pitchFamily="34" charset="-122"/>
-                <a:cs typeface="Arial" pitchFamily="34" charset="-120"/>
-              </a:rPr>
-              <a:t>Derive together</a:t>
-            </a:r>
-            <a:pPr algn="l" indent="0" marL="0">
-              <a:lnSpc>
-                <a:spcPts val="1620"/>
-              </a:lnSpc>
-              <a:spcAft>
-                <a:spcPts val="300"/>
-              </a:spcAft>
-              <a:buNone/>
-            </a:pPr>
-            <a:r>
-              <a:rPr lang="en-US" sz="1200" dirty="0">
-                <a:solidFill>
-                  <a:srgbClr val="1C2833"/>
-                </a:solidFill>
-                <a:latin typeface="Arial" pitchFamily="34" charset="0"/>
-                <a:ea typeface="Arial" pitchFamily="34" charset="-122"/>
-                <a:cs typeface="Arial" pitchFamily="34" charset="-120"/>
-              </a:rPr>
-              <a:t> (or have students derive):</a:t>
-            </a:r>
-            <a:endParaRPr lang="en-US" sz="1200" dirty="0"/>
-          </a:p>
-        </p:txBody>
-      </p:sp>
-      <p:sp>
-        <p:nvSpPr>
-          <p:cNvPr id="6" name="Text 4"/>
-          <p:cNvSpPr/>
-          <p:nvPr/>
-        </p:nvSpPr>
-        <p:spPr>
-          <a:xfrm>
-            <a:off x="406301" y="1650355"/>
-            <a:ext cx="8331398" cy="952202"/>
-          </a:xfrm>
-          <a:prstGeom prst="rect">
-            <a:avLst/>
-          </a:prstGeom>
-          <a:solidFill>
-            <a:srgbClr val="F4F8F9"/>
-          </a:solidFill>
-          <a:ln/>
-        </p:spPr>
-        <p:txBody>
-          <a:bodyPr wrap="square" rtlCol="0" anchor="ctr"/>
-          <a:lstStyle/>
-          <a:p>
-            <a:pPr indent="0" marL="0">
-              <a:buNone/>
-            </a:pPr>
-            <a:endParaRPr lang="en-US" dirty="0"/>
-          </a:p>
-        </p:txBody>
-      </p:sp>
-      <p:sp>
-        <p:nvSpPr>
-          <p:cNvPr id="7" name="Shape 5"/>
-          <p:cNvSpPr/>
-          <p:nvPr/>
-        </p:nvSpPr>
-        <p:spPr>
-          <a:xfrm>
-            <a:off x="430113" y="1650355"/>
-            <a:ext cx="0" cy="952202"/>
-          </a:xfrm>
-          <a:prstGeom prst="line">
-            <a:avLst/>
-          </a:prstGeom>
-          <a:noFill/>
-          <a:ln w="47625">
-            <a:solidFill>
-              <a:srgbClr val="277884"/>
-            </a:solidFill>
-            <a:prstDash val="solid"/>
-          </a:ln>
-        </p:spPr>
-      </p:sp>
-      <p:sp>
-        <p:nvSpPr>
-          <p:cNvPr id="8" name="Text 6"/>
-          <p:cNvSpPr/>
-          <p:nvPr/>
-        </p:nvSpPr>
-        <p:spPr>
-          <a:xfrm>
-            <a:off x="631627" y="1777305"/>
-            <a:ext cx="8086939" cy="174575"/>
-          </a:xfrm>
-          <a:prstGeom prst="rect">
-            <a:avLst/>
-          </a:prstGeom>
-          <a:noFill/>
-          <a:ln/>
-        </p:spPr>
-        <p:txBody>
-          <a:bodyPr wrap="square" lIns="0" tIns="0" rIns="0" bIns="0" rtlCol="0" anchor="t"/>
-          <a:lstStyle/>
-          <a:p>
-            <a:pPr algn="l" indent="0" marL="0">
-              <a:lnSpc>
-                <a:spcPts val="1375"/>
-              </a:lnSpc>
-              <a:buNone/>
-            </a:pPr>
-            <a:r>
-              <a:rPr lang="en-US" sz="1100" dirty="0">
-                <a:solidFill>
-                  <a:srgbClr val="1C2833"/>
-                </a:solidFill>
-                <a:latin typeface="Courier New" pitchFamily="34" charset="0"/>
-                <a:ea typeface="Courier New" pitchFamily="34" charset="-122"/>
-                <a:cs typeface="Courier New" pitchFamily="34" charset="-120"/>
-              </a:rPr>
-              <a:t>(100a + 10b + c) × 11</a:t>
-            </a:r>
-            <a:endParaRPr lang="en-US" sz="1100" dirty="0"/>
-          </a:p>
-        </p:txBody>
-      </p:sp>
-      <p:sp>
-        <p:nvSpPr>
-          <p:cNvPr id="9" name="Text 7"/>
-          <p:cNvSpPr/>
-          <p:nvPr/>
-        </p:nvSpPr>
-        <p:spPr>
-          <a:xfrm>
-            <a:off x="631627" y="1951881"/>
-            <a:ext cx="8086939" cy="174575"/>
-          </a:xfrm>
-          <a:prstGeom prst="rect">
-            <a:avLst/>
-          </a:prstGeom>
-          <a:noFill/>
-          <a:ln/>
-        </p:spPr>
-        <p:txBody>
-          <a:bodyPr wrap="square" lIns="0" tIns="0" rIns="0" bIns="0" rtlCol="0" anchor="t"/>
-          <a:lstStyle/>
-          <a:p>
-            <a:pPr algn="l" indent="0" marL="0">
-              <a:lnSpc>
-                <a:spcPts val="1375"/>
-              </a:lnSpc>
-              <a:buNone/>
-            </a:pPr>
-            <a:r>
-              <a:rPr lang="en-US" sz="1100" dirty="0">
-                <a:solidFill>
-                  <a:srgbClr val="1C2833"/>
-                </a:solidFill>
-                <a:latin typeface="Courier New" pitchFamily="34" charset="0"/>
-                <a:ea typeface="Courier New" pitchFamily="34" charset="-122"/>
-                <a:cs typeface="Courier New" pitchFamily="34" charset="-120"/>
-              </a:rPr>
-              <a:t>= (100a + 10b + c)(10 + 1)</a:t>
-            </a:r>
-            <a:endParaRPr lang="en-US" sz="1100" dirty="0"/>
-          </a:p>
-        </p:txBody>
-      </p:sp>
-      <p:sp>
-        <p:nvSpPr>
-          <p:cNvPr id="10" name="Text 8"/>
-          <p:cNvSpPr/>
-          <p:nvPr/>
-        </p:nvSpPr>
-        <p:spPr>
-          <a:xfrm>
-            <a:off x="631627" y="2126456"/>
-            <a:ext cx="8086939" cy="174575"/>
-          </a:xfrm>
-          <a:prstGeom prst="rect">
-            <a:avLst/>
-          </a:prstGeom>
-          <a:noFill/>
-          <a:ln/>
-        </p:spPr>
-        <p:txBody>
-          <a:bodyPr wrap="square" lIns="0" tIns="0" rIns="0" bIns="0" rtlCol="0" anchor="t"/>
-          <a:lstStyle/>
-          <a:p>
-            <a:pPr algn="l" indent="0" marL="0">
-              <a:lnSpc>
-                <a:spcPts val="1375"/>
-              </a:lnSpc>
-              <a:buNone/>
-            </a:pPr>
-            <a:r>
-              <a:rPr lang="en-US" sz="1100" dirty="0">
-                <a:solidFill>
-                  <a:srgbClr val="1C2833"/>
-                </a:solidFill>
-                <a:latin typeface="Courier New" pitchFamily="34" charset="0"/>
-                <a:ea typeface="Courier New" pitchFamily="34" charset="-122"/>
-                <a:cs typeface="Courier New" pitchFamily="34" charset="-120"/>
-              </a:rPr>
-              <a:t>= 1000a + 100b + 10c + 100a + 10b + c</a:t>
-            </a:r>
-            <a:endParaRPr lang="en-US" sz="1100" dirty="0"/>
-          </a:p>
-        </p:txBody>
-      </p:sp>
-      <p:sp>
-        <p:nvSpPr>
-          <p:cNvPr id="11" name="Text 9"/>
-          <p:cNvSpPr/>
-          <p:nvPr/>
-        </p:nvSpPr>
-        <p:spPr>
-          <a:xfrm>
-            <a:off x="631627" y="2301032"/>
-            <a:ext cx="8086939" cy="174575"/>
-          </a:xfrm>
-          <a:prstGeom prst="rect">
-            <a:avLst/>
-          </a:prstGeom>
-          <a:noFill/>
-          <a:ln/>
-        </p:spPr>
-        <p:txBody>
-          <a:bodyPr wrap="square" lIns="0" tIns="0" rIns="0" bIns="0" rtlCol="0" anchor="t"/>
-          <a:lstStyle/>
-          <a:p>
-            <a:pPr algn="l" indent="0" marL="0">
-              <a:lnSpc>
-                <a:spcPts val="1375"/>
-              </a:lnSpc>
-              <a:buNone/>
-            </a:pPr>
-            <a:r>
-              <a:rPr lang="en-US" sz="1100" dirty="0">
-                <a:solidFill>
-                  <a:srgbClr val="1C2833"/>
-                </a:solidFill>
-                <a:latin typeface="Courier New" pitchFamily="34" charset="0"/>
-                <a:ea typeface="Courier New" pitchFamily="34" charset="-122"/>
-                <a:cs typeface="Courier New" pitchFamily="34" charset="-120"/>
-              </a:rPr>
-              <a:t>= 1000a + 100(a + b) + 10(b + c) + c</a:t>
-            </a:r>
-            <a:endParaRPr lang="en-US" sz="1100" dirty="0"/>
-          </a:p>
-        </p:txBody>
-      </p:sp>
-      <p:sp>
-        <p:nvSpPr>
-          <p:cNvPr id="12" name="Text 10"/>
-          <p:cNvSpPr/>
-          <p:nvPr/>
-        </p:nvSpPr>
-        <p:spPr>
-          <a:xfrm>
-            <a:off x="634901" y="2704058"/>
-            <a:ext cx="8102798" cy="281880"/>
-          </a:xfrm>
-          <a:prstGeom prst="rect">
-            <a:avLst/>
-          </a:prstGeom>
-          <a:noFill/>
-          <a:ln/>
-        </p:spPr>
-        <p:txBody>
-          <a:bodyPr wrap="square" lIns="0" tIns="0" rIns="0" bIns="0" rtlCol="0" anchor="t"/>
-          <a:lstStyle/>
-          <a:p>
-            <a:pPr algn="l" marL="342900" indent="-342900">
-              <a:lnSpc>
-                <a:spcPts val="1620"/>
-              </a:lnSpc>
-              <a:spcAft>
-                <a:spcPts val="300"/>
-              </a:spcAft>
-              <a:buSzPct val="100000"/>
-              <a:buChar char="•"/>
-            </a:pPr>
-            <a:r>
-              <a:rPr lang="en-US" sz="1200" b="1" dirty="0">
-                <a:solidFill>
-                  <a:srgbClr val="1C2833"/>
-                </a:solidFill>
-                <a:latin typeface="Arial" pitchFamily="34" charset="0"/>
-                <a:ea typeface="Arial" pitchFamily="34" charset="-122"/>
-                <a:cs typeface="Arial" pitchFamily="34" charset="-120"/>
-              </a:rPr>
-              <a:t>Read the result.</a:t>
-            </a:r>
-            <a:pPr algn="l" indent="0" marL="0">
-              <a:lnSpc>
-                <a:spcPts val="1620"/>
-              </a:lnSpc>
-              <a:spcAft>
-                <a:spcPts val="300"/>
-              </a:spcAft>
-              <a:buNone/>
-            </a:pPr>
-            <a:r>
-              <a:rPr lang="en-US" sz="1200" dirty="0">
-                <a:solidFill>
-                  <a:srgbClr val="1C2833"/>
-                </a:solidFill>
-                <a:latin typeface="Arial" pitchFamily="34" charset="0"/>
-                <a:ea typeface="Arial" pitchFamily="34" charset="-122"/>
-                <a:cs typeface="Arial" pitchFamily="34" charset="-120"/>
-              </a:rPr>
-              <a:t> </a:t>
-            </a:r>
-            <a:pPr algn="l" indent="0" marL="0">
-              <a:lnSpc>
-                <a:spcPts val="1620"/>
-              </a:lnSpc>
-              <a:spcAft>
-                <a:spcPts val="300"/>
-              </a:spcAft>
-              <a:buNone/>
-            </a:pPr>
-            <a:r>
-              <a:rPr lang="en-US" sz="1200" i="1" dirty="0">
-                <a:solidFill>
-                  <a:srgbClr val="1C2833"/>
-                </a:solidFill>
-                <a:latin typeface="Arial" pitchFamily="34" charset="0"/>
-                <a:ea typeface="Arial" pitchFamily="34" charset="-122"/>
-                <a:cs typeface="Arial" pitchFamily="34" charset="-120"/>
-              </a:rPr>
-              <a:t>"Thousands = a. Hundreds = a + b. Tens = b + c. Units = c."</a:t>
-            </a:r>
-            <a:endParaRPr lang="en-US" sz="1200" dirty="0"/>
-          </a:p>
-        </p:txBody>
-      </p:sp>
-      <p:sp>
-        <p:nvSpPr>
-          <p:cNvPr id="13" name="Text 11"/>
-          <p:cNvSpPr/>
-          <p:nvPr/>
-        </p:nvSpPr>
-        <p:spPr>
-          <a:xfrm>
-            <a:off x="406301" y="3074789"/>
-            <a:ext cx="8498026" cy="213271"/>
-          </a:xfrm>
-          <a:prstGeom prst="rect">
-            <a:avLst/>
-          </a:prstGeom>
-          <a:noFill/>
-          <a:ln/>
-        </p:spPr>
-        <p:txBody>
-          <a:bodyPr wrap="square" lIns="0" tIns="0" rIns="0" bIns="0" rtlCol="0" anchor="t"/>
-          <a:lstStyle/>
-          <a:p>
-            <a:pPr algn="l" indent="0" marL="0">
-              <a:lnSpc>
-                <a:spcPts val="1680"/>
-              </a:lnSpc>
-              <a:spcBef>
-                <a:spcPts val="300"/>
-              </a:spcBef>
-              <a:spcAft>
-                <a:spcPts val="300"/>
-              </a:spcAft>
-              <a:buNone/>
-            </a:pPr>
-            <a:r>
-              <a:rPr lang="en-US" sz="1200" dirty="0">
-                <a:solidFill>
-                  <a:srgbClr val="1C2833"/>
-                </a:solidFill>
-                <a:latin typeface="Arial" pitchFamily="34" charset="0"/>
-                <a:ea typeface="Arial" pitchFamily="34" charset="-122"/>
-                <a:cs typeface="Arial" pitchFamily="34" charset="-120"/>
-              </a:rPr>
-              <a:t>In words: </a:t>
-            </a:r>
-            <a:pPr algn="l" indent="0" marL="0">
-              <a:lnSpc>
-                <a:spcPts val="1680"/>
-              </a:lnSpc>
-              <a:spcBef>
-                <a:spcPts val="300"/>
-              </a:spcBef>
-              <a:spcAft>
-                <a:spcPts val="300"/>
-              </a:spcAft>
-              <a:buNone/>
-            </a:pPr>
-            <a:r>
-              <a:rPr lang="en-US" sz="1200" b="1" dirty="0">
-                <a:solidFill>
-                  <a:srgbClr val="1C2833"/>
-                </a:solidFill>
-                <a:latin typeface="Arial" pitchFamily="34" charset="0"/>
-                <a:ea typeface="Arial" pitchFamily="34" charset="-122"/>
-                <a:cs typeface="Arial" pitchFamily="34" charset="-120"/>
-              </a:rPr>
-              <a:t>first digit stays, then each pair of adjacent digits sums and slides into the gap, then the last digit stays.</a:t>
-            </a:r>
-            <a:endParaRPr lang="en-US" sz="1200" dirty="0"/>
-          </a:p>
-        </p:txBody>
-      </p:sp>
-      <p:sp>
-        <p:nvSpPr>
-          <p:cNvPr id="14" name="Text 12"/>
-          <p:cNvSpPr/>
-          <p:nvPr/>
-        </p:nvSpPr>
-        <p:spPr>
-          <a:xfrm>
-            <a:off x="634901" y="3376910"/>
-            <a:ext cx="8102798" cy="281880"/>
-          </a:xfrm>
-          <a:prstGeom prst="rect">
-            <a:avLst/>
-          </a:prstGeom>
-          <a:noFill/>
-          <a:ln/>
-        </p:spPr>
-        <p:txBody>
-          <a:bodyPr wrap="square" lIns="0" tIns="0" rIns="0" bIns="0" rtlCol="0" anchor="t"/>
-          <a:lstStyle/>
-          <a:p>
-            <a:pPr algn="l" marL="342900" indent="-342900">
-              <a:lnSpc>
-                <a:spcPts val="1620"/>
-              </a:lnSpc>
-              <a:spcAft>
-                <a:spcPts val="300"/>
-              </a:spcAft>
-              <a:buSzPct val="100000"/>
-              <a:buChar char="•"/>
-            </a:pPr>
-            <a:r>
-              <a:rPr lang="en-US" sz="1200" b="1" dirty="0">
-                <a:solidFill>
-                  <a:srgbClr val="1C2833"/>
-                </a:solidFill>
-                <a:latin typeface="Arial" pitchFamily="34" charset="0"/>
-                <a:ea typeface="Arial" pitchFamily="34" charset="-122"/>
-                <a:cs typeface="Arial" pitchFamily="34" charset="-120"/>
-              </a:rPr>
-              <a:t>Worked example: 234 × 11.</a:t>
-            </a:r>
-            <a:endParaRPr lang="en-US" sz="1200" dirty="0"/>
-          </a:p>
-        </p:txBody>
-      </p:sp>
-      <p:sp>
-        <p:nvSpPr>
-          <p:cNvPr id="15" name="Text 13"/>
-          <p:cNvSpPr/>
-          <p:nvPr/>
-        </p:nvSpPr>
-        <p:spPr>
-          <a:xfrm>
-            <a:off x="406301" y="3760291"/>
-            <a:ext cx="8331398" cy="1301353"/>
-          </a:xfrm>
-          <a:prstGeom prst="rect">
-            <a:avLst/>
-          </a:prstGeom>
-          <a:solidFill>
-            <a:srgbClr val="F4F8F9"/>
-          </a:solidFill>
-          <a:ln/>
-        </p:spPr>
-        <p:txBody>
-          <a:bodyPr wrap="square" rtlCol="0" anchor="ctr"/>
-          <a:lstStyle/>
-          <a:p>
-            <a:pPr indent="0" marL="0">
-              <a:buNone/>
-            </a:pPr>
-            <a:endParaRPr lang="en-US" dirty="0"/>
-          </a:p>
-        </p:txBody>
-      </p:sp>
-      <p:sp>
-        <p:nvSpPr>
-          <p:cNvPr id="16" name="Shape 14"/>
-          <p:cNvSpPr/>
-          <p:nvPr/>
-        </p:nvSpPr>
-        <p:spPr>
-          <a:xfrm>
-            <a:off x="430113" y="3760291"/>
-            <a:ext cx="0" cy="1301353"/>
-          </a:xfrm>
-          <a:prstGeom prst="line">
-            <a:avLst/>
-          </a:prstGeom>
-          <a:noFill/>
-          <a:ln w="47625">
-            <a:solidFill>
-              <a:srgbClr val="277884"/>
-            </a:solidFill>
-            <a:prstDash val="solid"/>
-          </a:ln>
-        </p:spPr>
-      </p:sp>
-      <p:sp>
-        <p:nvSpPr>
-          <p:cNvPr id="17" name="Text 15"/>
-          <p:cNvSpPr/>
-          <p:nvPr/>
-        </p:nvSpPr>
-        <p:spPr>
-          <a:xfrm>
-            <a:off x="631627" y="3887242"/>
-            <a:ext cx="8086939" cy="174575"/>
-          </a:xfrm>
-          <a:prstGeom prst="rect">
-            <a:avLst/>
-          </a:prstGeom>
-          <a:noFill/>
-          <a:ln/>
-        </p:spPr>
-        <p:txBody>
-          <a:bodyPr wrap="square" lIns="0" tIns="0" rIns="0" bIns="0" rtlCol="0" anchor="t"/>
-          <a:lstStyle/>
-          <a:p>
-            <a:pPr algn="l" indent="0" marL="0">
-              <a:lnSpc>
-                <a:spcPts val="1375"/>
-              </a:lnSpc>
-              <a:buNone/>
-            </a:pPr>
-            <a:r>
-              <a:rPr lang="en-US" sz="1100" dirty="0">
-                <a:solidFill>
-                  <a:srgbClr val="1C2833"/>
-                </a:solidFill>
-                <a:latin typeface="Courier New" pitchFamily="34" charset="0"/>
-                <a:ea typeface="Courier New" pitchFamily="34" charset="-122"/>
-                <a:cs typeface="Courier New" pitchFamily="34" charset="-120"/>
-              </a:rPr>
-              <a:t>Splits and gaps:    2  _  _  4</a:t>
-            </a:r>
-            <a:endParaRPr lang="en-US" sz="1100" dirty="0"/>
-          </a:p>
-        </p:txBody>
-      </p:sp>
-      <p:sp>
-        <p:nvSpPr>
-          <p:cNvPr id="18" name="Text 16"/>
-          <p:cNvSpPr/>
-          <p:nvPr/>
-        </p:nvSpPr>
-        <p:spPr>
-          <a:xfrm>
-            <a:off x="631627" y="4061817"/>
-            <a:ext cx="8086939" cy="174575"/>
-          </a:xfrm>
-          <a:prstGeom prst="rect">
-            <a:avLst/>
-          </a:prstGeom>
-          <a:noFill/>
-          <a:ln/>
-        </p:spPr>
-        <p:txBody>
-          <a:bodyPr wrap="square" lIns="0" tIns="0" rIns="0" bIns="0" rtlCol="0" anchor="t"/>
-          <a:lstStyle/>
-          <a:p>
-            <a:pPr algn="l" indent="0" marL="0">
-              <a:lnSpc>
-                <a:spcPts val="1375"/>
-              </a:lnSpc>
-              <a:buNone/>
-            </a:pPr>
-            <a:r>
-              <a:rPr lang="en-US" sz="1100" dirty="0">
-                <a:solidFill>
-                  <a:srgbClr val="1C2833"/>
-                </a:solidFill>
-                <a:latin typeface="Courier New" pitchFamily="34" charset="0"/>
-                <a:ea typeface="Courier New" pitchFamily="34" charset="-122"/>
-                <a:cs typeface="Courier New" pitchFamily="34" charset="-120"/>
-              </a:rPr>
-              <a:t>↑     ↑</a:t>
-            </a:r>
-            <a:endParaRPr lang="en-US" sz="1100" dirty="0"/>
-          </a:p>
-        </p:txBody>
-      </p:sp>
-      <p:sp>
-        <p:nvSpPr>
-          <p:cNvPr id="19" name="Text 17"/>
-          <p:cNvSpPr/>
-          <p:nvPr/>
-        </p:nvSpPr>
-        <p:spPr>
-          <a:xfrm>
-            <a:off x="631627" y="4236393"/>
-            <a:ext cx="8086939" cy="174575"/>
-          </a:xfrm>
-          <a:prstGeom prst="rect">
-            <a:avLst/>
-          </a:prstGeom>
-          <a:noFill/>
-          <a:ln/>
-        </p:spPr>
-        <p:txBody>
-          <a:bodyPr wrap="square" lIns="0" tIns="0" rIns="0" bIns="0" rtlCol="0" anchor="t"/>
-          <a:lstStyle/>
-          <a:p>
-            <a:pPr algn="l" indent="0" marL="0">
-              <a:lnSpc>
-                <a:spcPts val="1375"/>
-              </a:lnSpc>
-              <a:buNone/>
-            </a:pPr>
-            <a:r>
-              <a:rPr lang="en-US" sz="1100" dirty="0">
-                <a:solidFill>
-                  <a:srgbClr val="1C2833"/>
-                </a:solidFill>
-                <a:latin typeface="Courier New" pitchFamily="34" charset="0"/>
-                <a:ea typeface="Courier New" pitchFamily="34" charset="-122"/>
-                <a:cs typeface="Courier New" pitchFamily="34" charset="-120"/>
-              </a:rPr>
-              <a:t>(a+b) (b+c)</a:t>
-            </a:r>
-            <a:endParaRPr lang="en-US" sz="1100" dirty="0"/>
-          </a:p>
-        </p:txBody>
-      </p:sp>
-      <p:sp>
-        <p:nvSpPr>
-          <p:cNvPr id="20" name="Text 18"/>
-          <p:cNvSpPr/>
-          <p:nvPr/>
-        </p:nvSpPr>
-        <p:spPr>
-          <a:xfrm>
-            <a:off x="631627" y="4410968"/>
-            <a:ext cx="8086939" cy="174575"/>
-          </a:xfrm>
-          <a:prstGeom prst="rect">
-            <a:avLst/>
-          </a:prstGeom>
-          <a:noFill/>
-          <a:ln/>
-        </p:spPr>
-        <p:txBody>
-          <a:bodyPr wrap="square" lIns="0" tIns="0" rIns="0" bIns="0" rtlCol="0" anchor="t"/>
-          <a:lstStyle/>
-          <a:p>
-            <a:pPr algn="l" indent="0" marL="0">
-              <a:lnSpc>
-                <a:spcPts val="1375"/>
-              </a:lnSpc>
-              <a:buNone/>
-            </a:pPr>
-            <a:r>
-              <a:rPr lang="en-US" sz="1100" dirty="0">
-                <a:solidFill>
-                  <a:srgbClr val="1C2833"/>
-                </a:solidFill>
-                <a:latin typeface="Courier New" pitchFamily="34" charset="0"/>
-                <a:ea typeface="Courier New" pitchFamily="34" charset="-122"/>
-                <a:cs typeface="Courier New" pitchFamily="34" charset="-120"/>
-              </a:rPr>
-              <a:t>2 + 3 = 5</a:t>
-            </a:r>
-            <a:endParaRPr lang="en-US" sz="1100" dirty="0"/>
-          </a:p>
-        </p:txBody>
-      </p:sp>
-      <p:sp>
-        <p:nvSpPr>
-          <p:cNvPr id="21" name="Text 19"/>
-          <p:cNvSpPr/>
-          <p:nvPr/>
-        </p:nvSpPr>
-        <p:spPr>
-          <a:xfrm>
-            <a:off x="631627" y="4585543"/>
-            <a:ext cx="8086939" cy="174575"/>
-          </a:xfrm>
-          <a:prstGeom prst="rect">
-            <a:avLst/>
-          </a:prstGeom>
-          <a:noFill/>
-          <a:ln/>
-        </p:spPr>
-        <p:txBody>
-          <a:bodyPr wrap="square" lIns="0" tIns="0" rIns="0" bIns="0" rtlCol="0" anchor="t"/>
-          <a:lstStyle/>
-          <a:p>
-            <a:pPr algn="l" indent="0" marL="0">
-              <a:lnSpc>
-                <a:spcPts val="1375"/>
-              </a:lnSpc>
-              <a:buNone/>
-            </a:pPr>
-            <a:r>
-              <a:rPr lang="en-US" sz="1100" dirty="0">
-                <a:solidFill>
-                  <a:srgbClr val="1C2833"/>
-                </a:solidFill>
-                <a:latin typeface="Courier New" pitchFamily="34" charset="0"/>
-                <a:ea typeface="Courier New" pitchFamily="34" charset="-122"/>
-                <a:cs typeface="Courier New" pitchFamily="34" charset="-120"/>
-              </a:rPr>
-              <a:t>3 + 4 = 7</a:t>
-            </a:r>
-            <a:endParaRPr lang="en-US" sz="1100" dirty="0"/>
-          </a:p>
-        </p:txBody>
-      </p:sp>
-      <p:sp>
-        <p:nvSpPr>
-          <p:cNvPr id="22" name="Text 20"/>
-          <p:cNvSpPr/>
-          <p:nvPr/>
-        </p:nvSpPr>
-        <p:spPr>
-          <a:xfrm>
-            <a:off x="631627" y="4760119"/>
-            <a:ext cx="8086939" cy="174575"/>
-          </a:xfrm>
-          <a:prstGeom prst="rect">
-            <a:avLst/>
-          </a:prstGeom>
-          <a:noFill/>
-          <a:ln/>
-        </p:spPr>
-        <p:txBody>
-          <a:bodyPr wrap="square" lIns="0" tIns="0" rIns="0" bIns="0" rtlCol="0" anchor="t"/>
-          <a:lstStyle/>
-          <a:p>
-            <a:pPr algn="l" indent="0" marL="0">
-              <a:lnSpc>
-                <a:spcPts val="1375"/>
-              </a:lnSpc>
-              <a:buNone/>
-            </a:pPr>
-            <a:r>
-              <a:rPr lang="en-US" sz="1100" dirty="0">
-                <a:solidFill>
-                  <a:srgbClr val="1C2833"/>
-                </a:solidFill>
-                <a:latin typeface="Courier New" pitchFamily="34" charset="0"/>
-                <a:ea typeface="Courier New" pitchFamily="34" charset="-122"/>
-                <a:cs typeface="Courier New" pitchFamily="34" charset="-120"/>
-              </a:rPr>
-              <a:t>Answer:             2  5  7  4   →   2574.</a:t>
-            </a:r>
-            <a:endParaRPr lang="en-US" sz="1100" dirty="0"/>
-          </a:p>
-        </p:txBody>
-      </p:sp>
-      <p:sp>
-        <p:nvSpPr>
-          <p:cNvPr id="23" name="Text 21"/>
-          <p:cNvSpPr/>
-          <p:nvPr/>
-        </p:nvSpPr>
-        <p:spPr>
-          <a:xfrm>
-            <a:off x="406301" y="5150495"/>
-            <a:ext cx="8498026" cy="213271"/>
-          </a:xfrm>
-          <a:prstGeom prst="rect">
-            <a:avLst/>
-          </a:prstGeom>
-          <a:noFill/>
-          <a:ln/>
-        </p:spPr>
-        <p:txBody>
-          <a:bodyPr wrap="square" lIns="0" tIns="0" rIns="0" bIns="0" rtlCol="0" anchor="t"/>
-          <a:lstStyle/>
-          <a:p>
-            <a:pPr algn="l" indent="0" marL="0">
-              <a:lnSpc>
-                <a:spcPts val="1680"/>
-              </a:lnSpc>
-              <a:spcBef>
-                <a:spcPts val="300"/>
-              </a:spcBef>
-              <a:spcAft>
-                <a:spcPts val="300"/>
-              </a:spcAft>
-              <a:buNone/>
-            </a:pPr>
-            <a:r>
-              <a:rPr lang="en-US" sz="1200" dirty="0">
-                <a:solidFill>
-                  <a:srgbClr val="1C2833"/>
-                </a:solidFill>
-                <a:latin typeface="Arial" pitchFamily="34" charset="0"/>
-                <a:ea typeface="Arial" pitchFamily="34" charset="-122"/>
-                <a:cs typeface="Arial" pitchFamily="34" charset="-120"/>
-              </a:rPr>
-              <a:t>Check: 234 × 11 = 234 × 10 + 234 = 2340 + 234 = </a:t>
-            </a:r>
-            <a:pPr algn="l" indent="0" marL="0">
-              <a:lnSpc>
-                <a:spcPts val="1680"/>
-              </a:lnSpc>
-              <a:spcBef>
-                <a:spcPts val="300"/>
-              </a:spcBef>
-              <a:spcAft>
-                <a:spcPts val="300"/>
-              </a:spcAft>
-              <a:buNone/>
-            </a:pPr>
-            <a:r>
-              <a:rPr lang="en-US" sz="1200" b="1" dirty="0">
-                <a:solidFill>
-                  <a:srgbClr val="1C2833"/>
-                </a:solidFill>
-                <a:latin typeface="Arial" pitchFamily="34" charset="0"/>
-                <a:ea typeface="Arial" pitchFamily="34" charset="-122"/>
-                <a:cs typeface="Arial" pitchFamily="34" charset="-120"/>
-              </a:rPr>
-              <a:t>2574</a:t>
-            </a:r>
-            <a:pPr algn="l" indent="0" marL="0">
-              <a:lnSpc>
-                <a:spcPts val="1680"/>
-              </a:lnSpc>
-              <a:spcBef>
-                <a:spcPts val="300"/>
-              </a:spcBef>
-              <a:spcAft>
-                <a:spcPts val="300"/>
-              </a:spcAft>
-              <a:buNone/>
-            </a:pPr>
-            <a:r>
-              <a:rPr lang="en-US" sz="1200" dirty="0">
-                <a:solidFill>
-                  <a:srgbClr val="1C2833"/>
-                </a:solidFill>
-                <a:latin typeface="Arial" pitchFamily="34" charset="0"/>
-                <a:ea typeface="Arial" pitchFamily="34" charset="-122"/>
-                <a:cs typeface="Arial" pitchFamily="34" charset="-120"/>
-              </a:rPr>
-              <a:t>. ✓</a:t>
-            </a:r>
-            <a:endParaRPr lang="en-US" sz="1200" dirty="0"/>
-          </a:p>
-        </p:txBody>
-      </p:sp>
-      <p:sp>
-        <p:nvSpPr>
-          <p:cNvPr id="24" name="Text 22"/>
-          <p:cNvSpPr/>
-          <p:nvPr/>
-        </p:nvSpPr>
-        <p:spPr>
-          <a:xfrm>
-            <a:off x="634901" y="5452616"/>
-            <a:ext cx="8102798" cy="281880"/>
-          </a:xfrm>
-          <a:prstGeom prst="rect">
-            <a:avLst/>
-          </a:prstGeom>
-          <a:noFill/>
-          <a:ln/>
-        </p:spPr>
-        <p:txBody>
-          <a:bodyPr wrap="square" lIns="0" tIns="0" rIns="0" bIns="0" rtlCol="0" anchor="t"/>
-          <a:lstStyle/>
-          <a:p>
-            <a:pPr algn="l" marL="342900" indent="-342900">
-              <a:lnSpc>
-                <a:spcPts val="1620"/>
-              </a:lnSpc>
-              <a:spcAft>
-                <a:spcPts val="300"/>
-              </a:spcAft>
-              <a:buSzPct val="100000"/>
-              <a:buChar char="•"/>
-            </a:pPr>
-            <a:r>
-              <a:rPr lang="en-US" sz="1200" b="1" dirty="0">
-                <a:solidFill>
-                  <a:srgbClr val="1C2833"/>
-                </a:solidFill>
-                <a:latin typeface="Arial" pitchFamily="34" charset="0"/>
-                <a:ea typeface="Arial" pitchFamily="34" charset="-122"/>
-                <a:cs typeface="Arial" pitchFamily="34" charset="-120"/>
-              </a:rPr>
-              <a:t>Worked example with carry: 567 × 11.</a:t>
-            </a:r>
-            <a:endParaRPr lang="en-US" sz="1200" dirty="0"/>
-          </a:p>
-        </p:txBody>
-      </p:sp>
-      <p:sp>
-        <p:nvSpPr>
-          <p:cNvPr id="25" name="Text 23"/>
-          <p:cNvSpPr/>
-          <p:nvPr/>
-        </p:nvSpPr>
-        <p:spPr>
-          <a:xfrm>
-            <a:off x="406301" y="5835997"/>
-            <a:ext cx="8331398" cy="777627"/>
-          </a:xfrm>
-          <a:prstGeom prst="rect">
-            <a:avLst/>
-          </a:prstGeom>
-          <a:solidFill>
-            <a:srgbClr val="F4F8F9"/>
-          </a:solidFill>
-          <a:ln/>
-        </p:spPr>
-        <p:txBody>
-          <a:bodyPr wrap="square" rtlCol="0" anchor="ctr"/>
-          <a:lstStyle/>
-          <a:p>
-            <a:pPr indent="0" marL="0">
-              <a:buNone/>
-            </a:pPr>
-            <a:endParaRPr lang="en-US" dirty="0"/>
-          </a:p>
-        </p:txBody>
-      </p:sp>
-      <p:sp>
-        <p:nvSpPr>
-          <p:cNvPr id="26" name="Shape 24"/>
-          <p:cNvSpPr/>
-          <p:nvPr/>
-        </p:nvSpPr>
-        <p:spPr>
-          <a:xfrm>
-            <a:off x="430113" y="5835997"/>
-            <a:ext cx="0" cy="777627"/>
-          </a:xfrm>
-          <a:prstGeom prst="line">
-            <a:avLst/>
-          </a:prstGeom>
-          <a:noFill/>
-          <a:ln w="47625">
-            <a:solidFill>
-              <a:srgbClr val="277884"/>
-            </a:solidFill>
-            <a:prstDash val="solid"/>
-          </a:ln>
-        </p:spPr>
-      </p:sp>
-      <p:sp>
-        <p:nvSpPr>
-          <p:cNvPr id="27" name="Text 25"/>
-          <p:cNvSpPr/>
-          <p:nvPr/>
-        </p:nvSpPr>
-        <p:spPr>
-          <a:xfrm>
-            <a:off x="631627" y="5962948"/>
-            <a:ext cx="8086939" cy="174575"/>
-          </a:xfrm>
-          <a:prstGeom prst="rect">
-            <a:avLst/>
-          </a:prstGeom>
-          <a:noFill/>
-          <a:ln/>
-        </p:spPr>
-        <p:txBody>
-          <a:bodyPr wrap="square" lIns="0" tIns="0" rIns="0" bIns="0" rtlCol="0" anchor="t"/>
-          <a:lstStyle/>
-          <a:p>
-            <a:pPr algn="l" indent="0" marL="0">
-              <a:lnSpc>
-                <a:spcPts val="1375"/>
-              </a:lnSpc>
-              <a:buNone/>
-            </a:pPr>
-            <a:r>
-              <a:rPr lang="en-US" sz="1100" dirty="0">
-                <a:solidFill>
-                  <a:srgbClr val="1C2833"/>
-                </a:solidFill>
-                <a:latin typeface="Courier New" pitchFamily="34" charset="0"/>
-                <a:ea typeface="Courier New" pitchFamily="34" charset="-122"/>
-                <a:cs typeface="Courier New" pitchFamily="34" charset="-120"/>
-              </a:rPr>
-              <a:t>5  _  _  7</a:t>
-            </a:r>
-            <a:endParaRPr lang="en-US" sz="1100" dirty="0"/>
-          </a:p>
-        </p:txBody>
-      </p:sp>
-      <p:sp>
-        <p:nvSpPr>
-          <p:cNvPr id="28" name="Text 26"/>
-          <p:cNvSpPr/>
-          <p:nvPr/>
-        </p:nvSpPr>
-        <p:spPr>
-          <a:xfrm>
-            <a:off x="631627" y="6137523"/>
-            <a:ext cx="8086939" cy="174575"/>
-          </a:xfrm>
-          <a:prstGeom prst="rect">
-            <a:avLst/>
-          </a:prstGeom>
-          <a:noFill/>
-          <a:ln/>
-        </p:spPr>
-        <p:txBody>
-          <a:bodyPr wrap="square" lIns="0" tIns="0" rIns="0" bIns="0" rtlCol="0" anchor="t"/>
-          <a:lstStyle/>
-          <a:p>
-            <a:pPr algn="l" indent="0" marL="0">
-              <a:lnSpc>
-                <a:spcPts val="1375"/>
-              </a:lnSpc>
-              <a:buNone/>
-            </a:pPr>
-            <a:r>
-              <a:rPr lang="en-US" sz="1100" dirty="0">
-                <a:solidFill>
-                  <a:srgbClr val="1C2833"/>
-                </a:solidFill>
-                <a:latin typeface="Courier New" pitchFamily="34" charset="0"/>
-                <a:ea typeface="Courier New" pitchFamily="34" charset="-122"/>
-                <a:cs typeface="Courier New" pitchFamily="34" charset="-120"/>
-              </a:rPr>
-              <a:t>5 + 6 = 11   ← carry case</a:t>
-            </a:r>
-            <a:endParaRPr lang="en-US" sz="1100" dirty="0"/>
-          </a:p>
-        </p:txBody>
-      </p:sp>
-      <p:sp>
-        <p:nvSpPr>
-          <p:cNvPr id="29" name="Text 27"/>
-          <p:cNvSpPr/>
-          <p:nvPr/>
-        </p:nvSpPr>
-        <p:spPr>
-          <a:xfrm>
-            <a:off x="631627" y="6312098"/>
-            <a:ext cx="8086939" cy="174575"/>
-          </a:xfrm>
-          <a:prstGeom prst="rect">
-            <a:avLst/>
-          </a:prstGeom>
-          <a:noFill/>
-          <a:ln/>
-        </p:spPr>
-        <p:txBody>
-          <a:bodyPr wrap="square" lIns="0" tIns="0" rIns="0" bIns="0" rtlCol="0" anchor="t"/>
-          <a:lstStyle/>
-          <a:p>
-            <a:pPr algn="l" indent="0" marL="0">
-              <a:lnSpc>
-                <a:spcPts val="1375"/>
-              </a:lnSpc>
-              <a:buNone/>
-            </a:pPr>
-            <a:r>
-              <a:rPr lang="en-US" sz="1100" dirty="0">
-                <a:solidFill>
-                  <a:srgbClr val="1C2833"/>
-                </a:solidFill>
-                <a:latin typeface="Courier New" pitchFamily="34" charset="0"/>
-                <a:ea typeface="Courier New" pitchFamily="34" charset="-122"/>
-                <a:cs typeface="Courier New" pitchFamily="34" charset="-120"/>
-              </a:rPr>
-              <a:t>6 + 7 = 13   ← carry case</a:t>
-            </a:r>
-            <a:endParaRPr lang="en-US" sz="1100" dirty="0"/>
-          </a:p>
-        </p:txBody>
-      </p:sp>
-      <p:sp>
-        <p:nvSpPr>
-          <p:cNvPr id="30" name="Text 28"/>
-          <p:cNvSpPr/>
-          <p:nvPr/>
-        </p:nvSpPr>
-        <p:spPr>
-          <a:xfrm>
-            <a:off x="406301" y="6702475"/>
-            <a:ext cx="8498026" cy="213271"/>
-          </a:xfrm>
-          <a:prstGeom prst="rect">
-            <a:avLst/>
-          </a:prstGeom>
-          <a:noFill/>
-          <a:ln/>
-        </p:spPr>
-        <p:txBody>
-          <a:bodyPr wrap="square" lIns="0" tIns="0" rIns="0" bIns="0" rtlCol="0" anchor="t"/>
-          <a:lstStyle/>
-          <a:p>
-            <a:pPr algn="l" indent="0" marL="0">
-              <a:lnSpc>
-                <a:spcPts val="1680"/>
-              </a:lnSpc>
-              <a:spcBef>
-                <a:spcPts val="300"/>
-              </a:spcBef>
-              <a:spcAft>
-                <a:spcPts val="300"/>
-              </a:spcAft>
-              <a:buNone/>
-            </a:pPr>
-            <a:r>
-              <a:rPr lang="en-US" sz="1200" dirty="0">
-                <a:solidFill>
-                  <a:srgbClr val="1C2833"/>
-                </a:solidFill>
-                <a:latin typeface="Arial" pitchFamily="34" charset="0"/>
-                <a:ea typeface="Arial" pitchFamily="34" charset="-122"/>
-                <a:cs typeface="Arial" pitchFamily="34" charset="-120"/>
-              </a:rPr>
-              <a:t>Strategy: work </a:t>
-            </a:r>
-            <a:pPr algn="l" indent="0" marL="0">
-              <a:lnSpc>
-                <a:spcPts val="1680"/>
-              </a:lnSpc>
-              <a:spcBef>
-                <a:spcPts val="300"/>
-              </a:spcBef>
-              <a:spcAft>
-                <a:spcPts val="300"/>
-              </a:spcAft>
-              <a:buNone/>
-            </a:pPr>
-            <a:r>
-              <a:rPr lang="en-US" sz="1200" b="1" dirty="0">
-                <a:solidFill>
-                  <a:srgbClr val="1C2833"/>
-                </a:solidFill>
-                <a:latin typeface="Arial" pitchFamily="34" charset="0"/>
-                <a:ea typeface="Arial" pitchFamily="34" charset="-122"/>
-                <a:cs typeface="Arial" pitchFamily="34" charset="-120"/>
-              </a:rPr>
-              <a:t>right to left</a:t>
-            </a:r>
-            <a:pPr algn="l" indent="0" marL="0">
-              <a:lnSpc>
-                <a:spcPts val="1680"/>
-              </a:lnSpc>
-              <a:spcBef>
-                <a:spcPts val="300"/>
-              </a:spcBef>
-              <a:spcAft>
-                <a:spcPts val="300"/>
-              </a:spcAft>
-              <a:buNone/>
-            </a:pPr>
-            <a:r>
-              <a:rPr lang="en-US" sz="1200" dirty="0">
-                <a:solidFill>
-                  <a:srgbClr val="1C2833"/>
-                </a:solidFill>
-                <a:latin typeface="Arial" pitchFamily="34" charset="0"/>
-                <a:ea typeface="Arial" pitchFamily="34" charset="-122"/>
-                <a:cs typeface="Arial" pitchFamily="34" charset="-120"/>
-              </a:rPr>
-              <a:t> to handle carries properly.</a:t>
-            </a:r>
-            <a:endParaRPr lang="en-US" sz="1200" dirty="0"/>
-          </a:p>
-        </p:txBody>
-      </p:sp>
-      <p:sp>
-        <p:nvSpPr>
-          <p:cNvPr id="31" name="Text 29"/>
-          <p:cNvSpPr/>
-          <p:nvPr/>
-        </p:nvSpPr>
-        <p:spPr>
-          <a:xfrm>
-            <a:off x="406301" y="7004596"/>
-            <a:ext cx="8331398" cy="1126778"/>
-          </a:xfrm>
-          <a:prstGeom prst="rect">
-            <a:avLst/>
-          </a:prstGeom>
-          <a:solidFill>
-            <a:srgbClr val="F4F8F9"/>
-          </a:solidFill>
-          <a:ln/>
-        </p:spPr>
-        <p:txBody>
-          <a:bodyPr wrap="square" rtlCol="0" anchor="ctr"/>
-          <a:lstStyle/>
-          <a:p>
-            <a:pPr indent="0" marL="0">
-              <a:buNone/>
-            </a:pPr>
-            <a:endParaRPr lang="en-US" dirty="0"/>
-          </a:p>
-        </p:txBody>
-      </p:sp>
-      <p:sp>
-        <p:nvSpPr>
-          <p:cNvPr id="32" name="Shape 30"/>
-          <p:cNvSpPr/>
-          <p:nvPr/>
-        </p:nvSpPr>
-        <p:spPr>
-          <a:xfrm>
-            <a:off x="430113" y="7004596"/>
-            <a:ext cx="0" cy="1126778"/>
-          </a:xfrm>
-          <a:prstGeom prst="line">
-            <a:avLst/>
-          </a:prstGeom>
-          <a:noFill/>
-          <a:ln w="47625">
-            <a:solidFill>
-              <a:srgbClr val="277884"/>
-            </a:solidFill>
-            <a:prstDash val="solid"/>
-          </a:ln>
-        </p:spPr>
-      </p:sp>
-      <p:sp>
-        <p:nvSpPr>
-          <p:cNvPr id="33" name="Text 31"/>
-          <p:cNvSpPr/>
-          <p:nvPr/>
-        </p:nvSpPr>
-        <p:spPr>
-          <a:xfrm>
-            <a:off x="631627" y="7131546"/>
-            <a:ext cx="8086939" cy="174575"/>
-          </a:xfrm>
-          <a:prstGeom prst="rect">
-            <a:avLst/>
-          </a:prstGeom>
-          <a:noFill/>
-          <a:ln/>
-        </p:spPr>
-        <p:txBody>
-          <a:bodyPr wrap="square" lIns="0" tIns="0" rIns="0" bIns="0" rtlCol="0" anchor="t"/>
-          <a:lstStyle/>
-          <a:p>
-            <a:pPr algn="l" indent="0" marL="0">
-              <a:lnSpc>
-                <a:spcPts val="1375"/>
-              </a:lnSpc>
-              <a:buNone/>
-            </a:pPr>
-            <a:r>
-              <a:rPr lang="en-US" sz="1100" dirty="0">
-                <a:solidFill>
-                  <a:srgbClr val="1C2833"/>
-                </a:solidFill>
-                <a:latin typeface="Courier New" pitchFamily="34" charset="0"/>
-                <a:ea typeface="Courier New" pitchFamily="34" charset="-122"/>
-                <a:cs typeface="Courier New" pitchFamily="34" charset="-120"/>
-              </a:rPr>
-              <a:t>Units: 7.</a:t>
-            </a:r>
-            <a:endParaRPr lang="en-US" sz="1100" dirty="0"/>
-          </a:p>
-        </p:txBody>
-      </p:sp>
-      <p:sp>
-        <p:nvSpPr>
-          <p:cNvPr id="34" name="Text 32"/>
-          <p:cNvSpPr/>
-          <p:nvPr/>
-        </p:nvSpPr>
-        <p:spPr>
-          <a:xfrm>
-            <a:off x="631627" y="7306121"/>
-            <a:ext cx="8086939" cy="174575"/>
-          </a:xfrm>
-          <a:prstGeom prst="rect">
-            <a:avLst/>
-          </a:prstGeom>
-          <a:noFill/>
-          <a:ln/>
-        </p:spPr>
-        <p:txBody>
-          <a:bodyPr wrap="square" lIns="0" tIns="0" rIns="0" bIns="0" rtlCol="0" anchor="t"/>
-          <a:lstStyle/>
-          <a:p>
-            <a:pPr algn="l" indent="0" marL="0">
-              <a:lnSpc>
-                <a:spcPts val="1375"/>
-              </a:lnSpc>
-              <a:buNone/>
-            </a:pPr>
-            <a:r>
-              <a:rPr lang="en-US" sz="1100" dirty="0">
-                <a:solidFill>
-                  <a:srgbClr val="1C2833"/>
-                </a:solidFill>
-                <a:latin typeface="Courier New" pitchFamily="34" charset="0"/>
-                <a:ea typeface="Courier New" pitchFamily="34" charset="-122"/>
-                <a:cs typeface="Courier New" pitchFamily="34" charset="-120"/>
-              </a:rPr>
-              <a:t>Tens: b + c = 6 + 7 = 13. Write 3, carry 1.</a:t>
-            </a:r>
-            <a:endParaRPr lang="en-US" sz="1100" dirty="0"/>
-          </a:p>
-        </p:txBody>
-      </p:sp>
-      <p:sp>
-        <p:nvSpPr>
-          <p:cNvPr id="35" name="Text 33"/>
-          <p:cNvSpPr/>
-          <p:nvPr/>
-        </p:nvSpPr>
-        <p:spPr>
-          <a:xfrm>
-            <a:off x="631627" y="7480697"/>
-            <a:ext cx="8086939" cy="174575"/>
-          </a:xfrm>
-          <a:prstGeom prst="rect">
-            <a:avLst/>
-          </a:prstGeom>
-          <a:noFill/>
-          <a:ln/>
-        </p:spPr>
-        <p:txBody>
-          <a:bodyPr wrap="square" lIns="0" tIns="0" rIns="0" bIns="0" rtlCol="0" anchor="t"/>
-          <a:lstStyle/>
-          <a:p>
-            <a:pPr algn="l" indent="0" marL="0">
-              <a:lnSpc>
-                <a:spcPts val="1375"/>
-              </a:lnSpc>
-              <a:buNone/>
-            </a:pPr>
-            <a:r>
-              <a:rPr lang="en-US" sz="1100" dirty="0">
-                <a:solidFill>
-                  <a:srgbClr val="1C2833"/>
-                </a:solidFill>
-                <a:latin typeface="Courier New" pitchFamily="34" charset="0"/>
-                <a:ea typeface="Courier New" pitchFamily="34" charset="-122"/>
-                <a:cs typeface="Courier New" pitchFamily="34" charset="-120"/>
-              </a:rPr>
-              <a:t>Hundreds: a + b + carry = 5 + 6 + 1 = 12. Write 2, carry 1.</a:t>
-            </a:r>
-            <a:endParaRPr lang="en-US" sz="1100" dirty="0"/>
-          </a:p>
-        </p:txBody>
-      </p:sp>
-      <p:sp>
-        <p:nvSpPr>
-          <p:cNvPr id="36" name="Text 34"/>
-          <p:cNvSpPr/>
-          <p:nvPr/>
-        </p:nvSpPr>
-        <p:spPr>
-          <a:xfrm>
-            <a:off x="631627" y="7655272"/>
-            <a:ext cx="8086939" cy="174575"/>
-          </a:xfrm>
-          <a:prstGeom prst="rect">
-            <a:avLst/>
-          </a:prstGeom>
-          <a:noFill/>
-          <a:ln/>
-        </p:spPr>
-        <p:txBody>
-          <a:bodyPr wrap="square" lIns="0" tIns="0" rIns="0" bIns="0" rtlCol="0" anchor="t"/>
-          <a:lstStyle/>
-          <a:p>
-            <a:pPr algn="l" indent="0" marL="0">
-              <a:lnSpc>
-                <a:spcPts val="1375"/>
-              </a:lnSpc>
-              <a:buNone/>
-            </a:pPr>
-            <a:r>
-              <a:rPr lang="en-US" sz="1100" dirty="0">
-                <a:solidFill>
-                  <a:srgbClr val="1C2833"/>
-                </a:solidFill>
-                <a:latin typeface="Courier New" pitchFamily="34" charset="0"/>
-                <a:ea typeface="Courier New" pitchFamily="34" charset="-122"/>
-                <a:cs typeface="Courier New" pitchFamily="34" charset="-120"/>
-              </a:rPr>
-              <a:t>Thousands: a + carry = 5 + 1 = 6.</a:t>
-            </a:r>
-            <a:endParaRPr lang="en-US" sz="1100" dirty="0"/>
-          </a:p>
-        </p:txBody>
-      </p:sp>
-      <p:sp>
-        <p:nvSpPr>
-          <p:cNvPr id="37" name="Text 35"/>
-          <p:cNvSpPr/>
-          <p:nvPr/>
-        </p:nvSpPr>
-        <p:spPr>
-          <a:xfrm>
-            <a:off x="631627" y="7829848"/>
-            <a:ext cx="8086939" cy="174575"/>
-          </a:xfrm>
-          <a:prstGeom prst="rect">
-            <a:avLst/>
-          </a:prstGeom>
-          <a:noFill/>
-          <a:ln/>
-        </p:spPr>
-        <p:txBody>
-          <a:bodyPr wrap="square" lIns="0" tIns="0" rIns="0" bIns="0" rtlCol="0" anchor="t"/>
-          <a:lstStyle/>
-          <a:p>
-            <a:pPr algn="l" indent="0" marL="0">
-              <a:lnSpc>
-                <a:spcPts val="1375"/>
-              </a:lnSpc>
-              <a:buNone/>
-            </a:pPr>
-            <a:r>
-              <a:rPr lang="en-US" sz="1100" dirty="0">
-                <a:solidFill>
-                  <a:srgbClr val="1C2833"/>
-                </a:solidFill>
-                <a:latin typeface="Courier New" pitchFamily="34" charset="0"/>
-                <a:ea typeface="Courier New" pitchFamily="34" charset="-122"/>
-                <a:cs typeface="Courier New" pitchFamily="34" charset="-120"/>
-              </a:rPr>
-              <a:t>Answer:    6  2  3  7   →   6237.</a:t>
-            </a:r>
-            <a:endParaRPr lang="en-US" sz="1100" dirty="0"/>
-          </a:p>
-        </p:txBody>
-      </p:sp>
-      <p:sp>
-        <p:nvSpPr>
-          <p:cNvPr id="38" name="Text 36"/>
-          <p:cNvSpPr/>
-          <p:nvPr/>
-        </p:nvSpPr>
-        <p:spPr>
-          <a:xfrm>
-            <a:off x="406301" y="8220224"/>
-            <a:ext cx="8498026" cy="213271"/>
-          </a:xfrm>
-          <a:prstGeom prst="rect">
-            <a:avLst/>
-          </a:prstGeom>
-          <a:noFill/>
-          <a:ln/>
-        </p:spPr>
-        <p:txBody>
-          <a:bodyPr wrap="square" lIns="0" tIns="0" rIns="0" bIns="0" rtlCol="0" anchor="t"/>
-          <a:lstStyle/>
-          <a:p>
-            <a:pPr algn="l" indent="0" marL="0">
-              <a:lnSpc>
-                <a:spcPts val="1680"/>
-              </a:lnSpc>
-              <a:spcBef>
-                <a:spcPts val="300"/>
-              </a:spcBef>
-              <a:spcAft>
-                <a:spcPts val="300"/>
-              </a:spcAft>
-              <a:buNone/>
-            </a:pPr>
-            <a:r>
-              <a:rPr lang="en-US" sz="1200" dirty="0">
-                <a:solidFill>
-                  <a:srgbClr val="1C2833"/>
-                </a:solidFill>
-                <a:latin typeface="Arial" pitchFamily="34" charset="0"/>
-                <a:ea typeface="Arial" pitchFamily="34" charset="-122"/>
-                <a:cs typeface="Arial" pitchFamily="34" charset="-120"/>
-              </a:rPr>
-              <a:t>Check: 567 × 11 = 5670 + 567 = </a:t>
-            </a:r>
-            <a:pPr algn="l" indent="0" marL="0">
-              <a:lnSpc>
-                <a:spcPts val="1680"/>
-              </a:lnSpc>
-              <a:spcBef>
-                <a:spcPts val="300"/>
-              </a:spcBef>
-              <a:spcAft>
-                <a:spcPts val="300"/>
-              </a:spcAft>
-              <a:buNone/>
-            </a:pPr>
-            <a:r>
-              <a:rPr lang="en-US" sz="1200" b="1" dirty="0">
-                <a:solidFill>
-                  <a:srgbClr val="1C2833"/>
-                </a:solidFill>
-                <a:latin typeface="Arial" pitchFamily="34" charset="0"/>
-                <a:ea typeface="Arial" pitchFamily="34" charset="-122"/>
-                <a:cs typeface="Arial" pitchFamily="34" charset="-120"/>
-              </a:rPr>
-              <a:t>6237</a:t>
-            </a:r>
-            <a:pPr algn="l" indent="0" marL="0">
-              <a:lnSpc>
-                <a:spcPts val="1680"/>
-              </a:lnSpc>
-              <a:spcBef>
-                <a:spcPts val="300"/>
-              </a:spcBef>
-              <a:spcAft>
-                <a:spcPts val="300"/>
-              </a:spcAft>
-              <a:buNone/>
-            </a:pPr>
-            <a:r>
-              <a:rPr lang="en-US" sz="1200" dirty="0">
-                <a:solidFill>
-                  <a:srgbClr val="1C2833"/>
-                </a:solidFill>
-                <a:latin typeface="Arial" pitchFamily="34" charset="0"/>
-                <a:ea typeface="Arial" pitchFamily="34" charset="-122"/>
-                <a:cs typeface="Arial" pitchFamily="34" charset="-120"/>
-              </a:rPr>
-              <a:t>. ✓</a:t>
-            </a:r>
-            <a:endParaRPr lang="en-US" sz="1200" dirty="0"/>
-          </a:p>
-        </p:txBody>
-      </p:sp>
-      <p:sp>
-        <p:nvSpPr>
-          <p:cNvPr id="39" name="Text 37"/>
-          <p:cNvSpPr/>
-          <p:nvPr/>
-        </p:nvSpPr>
-        <p:spPr>
-          <a:xfrm>
-            <a:off x="634901" y="8522345"/>
-            <a:ext cx="8102798" cy="281880"/>
-          </a:xfrm>
-          <a:prstGeom prst="rect">
-            <a:avLst/>
-          </a:prstGeom>
-          <a:noFill/>
-          <a:ln/>
-        </p:spPr>
-        <p:txBody>
-          <a:bodyPr wrap="square" lIns="0" tIns="0" rIns="0" bIns="0" rtlCol="0" anchor="t"/>
-          <a:lstStyle/>
-          <a:p>
-            <a:pPr algn="l" marL="342900" indent="-342900">
-              <a:lnSpc>
-                <a:spcPts val="1620"/>
-              </a:lnSpc>
-              <a:spcAft>
-                <a:spcPts val="300"/>
-              </a:spcAft>
-              <a:buSzPct val="100000"/>
-              <a:buChar char="•"/>
-            </a:pPr>
-            <a:r>
-              <a:rPr lang="en-US" sz="1200" b="1" dirty="0">
-                <a:solidFill>
-                  <a:srgbClr val="1C2833"/>
-                </a:solidFill>
-                <a:latin typeface="Arial" pitchFamily="34" charset="0"/>
-                <a:ea typeface="Arial" pitchFamily="34" charset="-122"/>
-                <a:cs typeface="Arial" pitchFamily="34" charset="-120"/>
-              </a:rPr>
-              <a:t>Generalisation.</a:t>
-            </a:r>
-            <a:pPr algn="l" indent="0" marL="0">
-              <a:lnSpc>
-                <a:spcPts val="1620"/>
-              </a:lnSpc>
-              <a:spcAft>
-                <a:spcPts val="300"/>
-              </a:spcAft>
-              <a:buNone/>
-            </a:pPr>
-            <a:r>
-              <a:rPr lang="en-US" sz="1200" dirty="0">
-                <a:solidFill>
-                  <a:srgbClr val="1C2833"/>
-                </a:solidFill>
-                <a:latin typeface="Arial" pitchFamily="34" charset="0"/>
-                <a:ea typeface="Arial" pitchFamily="34" charset="-122"/>
-                <a:cs typeface="Arial" pitchFamily="34" charset="-120"/>
-              </a:rPr>
-              <a:t> For an </a:t>
-            </a:r>
-            <a:pPr algn="l" indent="0" marL="0">
-              <a:lnSpc>
-                <a:spcPts val="1620"/>
-              </a:lnSpc>
-              <a:spcAft>
-                <a:spcPts val="300"/>
-              </a:spcAft>
-              <a:buNone/>
-            </a:pPr>
-            <a:r>
-              <a:rPr lang="en-US" sz="1200" i="1" dirty="0">
-                <a:solidFill>
-                  <a:srgbClr val="1C2833"/>
-                </a:solidFill>
-                <a:latin typeface="Arial" pitchFamily="34" charset="0"/>
-                <a:ea typeface="Arial" pitchFamily="34" charset="-122"/>
-                <a:cs typeface="Arial" pitchFamily="34" charset="-120"/>
-              </a:rPr>
-              <a:t>n</a:t>
-            </a:r>
-            <a:pPr algn="l" indent="0" marL="0">
-              <a:lnSpc>
-                <a:spcPts val="1620"/>
-              </a:lnSpc>
-              <a:spcAft>
-                <a:spcPts val="300"/>
-              </a:spcAft>
-              <a:buNone/>
-            </a:pPr>
-            <a:r>
-              <a:rPr lang="en-US" sz="1200" dirty="0">
-                <a:solidFill>
-                  <a:srgbClr val="1C2833"/>
-                </a:solidFill>
-                <a:latin typeface="Arial" pitchFamily="34" charset="0"/>
-                <a:ea typeface="Arial" pitchFamily="34" charset="-122"/>
-                <a:cs typeface="Arial" pitchFamily="34" charset="-120"/>
-              </a:rPr>
-              <a:t>-digit number, the trick is the same pattern:</a:t>
-            </a:r>
-            <a:endParaRPr lang="en-US" sz="1200" dirty="0"/>
-          </a:p>
-        </p:txBody>
-      </p:sp>
-      <p:sp>
-        <p:nvSpPr>
-          <p:cNvPr id="40" name="Text 38"/>
-          <p:cNvSpPr/>
-          <p:nvPr/>
-        </p:nvSpPr>
-        <p:spPr>
-          <a:xfrm>
-            <a:off x="406301" y="8893076"/>
-            <a:ext cx="8498026" cy="426541"/>
-          </a:xfrm>
-          <a:prstGeom prst="rect">
-            <a:avLst/>
-          </a:prstGeom>
-          <a:noFill/>
-          <a:ln/>
-        </p:spPr>
-        <p:txBody>
-          <a:bodyPr wrap="square" lIns="0" tIns="0" rIns="0" bIns="0" rtlCol="0" anchor="t"/>
-          <a:lstStyle/>
-          <a:p>
-            <a:pPr algn="l" indent="0" marL="0">
-              <a:lnSpc>
-                <a:spcPts val="1680"/>
-              </a:lnSpc>
-              <a:spcBef>
-                <a:spcPts val="300"/>
-              </a:spcBef>
-              <a:spcAft>
-                <a:spcPts val="300"/>
-              </a:spcAft>
-              <a:buNone/>
-            </a:pPr>
-            <a:r>
-              <a:rPr lang="en-US" sz="1200" dirty="0">
-                <a:solidFill>
-                  <a:srgbClr val="1C2833"/>
-                </a:solidFill>
-                <a:latin typeface="Arial" pitchFamily="34" charset="0"/>
-                <a:ea typeface="Arial" pitchFamily="34" charset="-122"/>
-                <a:cs typeface="Arial" pitchFamily="34" charset="-120"/>
-              </a:rPr>
-              <a:t>– Outer digits stay.    – Every interior digit becomes the sum of the two original digits flanking that position.    – Carries cascade from right to left.</a:t>
-            </a:r>
-            <a:endParaRPr lang="en-US" sz="1200" dirty="0"/>
-          </a:p>
-        </p:txBody>
-      </p:sp>
-      <p:sp>
-        <p:nvSpPr>
-          <p:cNvPr id="41" name="Text 39"/>
-          <p:cNvSpPr/>
-          <p:nvPr/>
-        </p:nvSpPr>
-        <p:spPr>
-          <a:xfrm>
-            <a:off x="406301" y="9472017"/>
+            <a:off x="406301" y="4434929"/>
             <a:ext cx="8498026" cy="213271"/>
           </a:xfrm>
           <a:prstGeom prst="rect">
@@ -6052,7 +8388,7 @@
                 <a:ea typeface="Georgia" pitchFamily="34" charset="-122"/>
                 <a:cs typeface="Georgia" pitchFamily="34" charset="-120"/>
               </a:rPr>
-              <a:t>Activity (15 min) — Worksheet</a:t>
+              <a:t>Core (18 min) — The 3-digit pattern</a:t>
             </a:r>
             <a:endParaRPr lang="en-US" sz="1800" dirty="0"/>
           </a:p>
@@ -6066,8 +8402,8 @@
         </p:nvSpPr>
         <p:spPr>
           <a:xfrm>
-            <a:off x="406301" y="870942"/>
-            <a:ext cx="8498026" cy="213271"/>
+            <a:off x="634901" y="883593"/>
+            <a:ext cx="8102798" cy="281880"/>
           </a:xfrm>
           <a:prstGeom prst="rect">
             <a:avLst/>
@@ -6079,20 +8415,18 @@
           <a:bodyPr wrap="square" lIns="0" tIns="0" rIns="0" bIns="0" rtlCol="0" anchor="t"/>
           <a:lstStyle/>
           <a:p>
-            <a:pPr algn="l" indent="0" marL="0">
-              <a:lnSpc>
-                <a:spcPts val="1680"/>
-              </a:lnSpc>
-              <a:spcBef>
-                <a:spcPts val="300"/>
-              </a:spcBef>
-              <a:spcAft>
-                <a:spcPts val="300"/>
-              </a:spcAft>
-              <a:buNone/>
-            </a:pPr>
-            <a:r>
-              <a:rPr lang="en-US" sz="1200" dirty="0">
+            <a:pPr algn="l" marL="342900" indent="-342900">
+              <a:lnSpc>
+                <a:spcPts val="1620"/>
+              </a:lnSpc>
+              <a:spcAft>
+                <a:spcPts val="300"/>
+              </a:spcAft>
+              <a:buSzPct val="100000"/>
+              <a:buChar char="•"/>
+            </a:pPr>
+            <a:r>
+              <a:rPr lang="en-US" sz="1200" b="1" dirty="0">
                 <a:solidFill>
                   <a:srgbClr val="1C2833"/>
                 </a:solidFill>
@@ -6100,177 +8434,12 @@
                 <a:ea typeface="Arial" pitchFamily="34" charset="-122"/>
                 <a:cs typeface="Arial" pitchFamily="34" charset="-120"/>
               </a:rPr>
-              <a:t>– 10 problems mixing 3-digit no-carry and carry cases:</a:t>
-            </a:r>
-            <a:endParaRPr lang="en-US" sz="1200" dirty="0"/>
-          </a:p>
-        </p:txBody>
-      </p:sp>
-      <p:sp>
-        <p:nvSpPr>
-          <p:cNvPr id="5" name="Text 3"/>
-          <p:cNvSpPr/>
-          <p:nvPr/>
-        </p:nvSpPr>
-        <p:spPr>
-          <a:xfrm>
-            <a:off x="406301" y="1173063"/>
-            <a:ext cx="8331398" cy="603052"/>
-          </a:xfrm>
-          <a:prstGeom prst="rect">
-            <a:avLst/>
-          </a:prstGeom>
-          <a:solidFill>
-            <a:srgbClr val="F4F8F9"/>
-          </a:solidFill>
-          <a:ln/>
-        </p:spPr>
-        <p:txBody>
-          <a:bodyPr wrap="square" rtlCol="0" anchor="ctr"/>
-          <a:lstStyle/>
-          <a:p>
-            <a:pPr indent="0" marL="0">
-              <a:buNone/>
-            </a:pPr>
-            <a:endParaRPr lang="en-US" dirty="0"/>
-          </a:p>
-        </p:txBody>
-      </p:sp>
-      <p:sp>
-        <p:nvSpPr>
-          <p:cNvPr id="6" name="Shape 4"/>
-          <p:cNvSpPr/>
-          <p:nvPr/>
-        </p:nvSpPr>
-        <p:spPr>
-          <a:xfrm>
-            <a:off x="430113" y="1173063"/>
-            <a:ext cx="0" cy="603052"/>
-          </a:xfrm>
-          <a:prstGeom prst="line">
-            <a:avLst/>
-          </a:prstGeom>
-          <a:noFill/>
-          <a:ln w="47625">
-            <a:solidFill>
-              <a:srgbClr val="277884"/>
-            </a:solidFill>
-            <a:prstDash val="solid"/>
-          </a:ln>
-        </p:spPr>
-      </p:sp>
-      <p:sp>
-        <p:nvSpPr>
-          <p:cNvPr id="7" name="Text 5"/>
-          <p:cNvSpPr/>
-          <p:nvPr/>
-        </p:nvSpPr>
-        <p:spPr>
-          <a:xfrm>
-            <a:off x="631627" y="1300014"/>
-            <a:ext cx="8086939" cy="174575"/>
-          </a:xfrm>
-          <a:prstGeom prst="rect">
-            <a:avLst/>
-          </a:prstGeom>
-          <a:noFill/>
-          <a:ln/>
-        </p:spPr>
-        <p:txBody>
-          <a:bodyPr wrap="square" lIns="0" tIns="0" rIns="0" bIns="0" rtlCol="0" anchor="t"/>
-          <a:lstStyle/>
-          <a:p>
-            <a:pPr algn="l" indent="0" marL="0">
-              <a:lnSpc>
-                <a:spcPts val="1375"/>
-              </a:lnSpc>
-              <a:buNone/>
-            </a:pPr>
-            <a:r>
-              <a:rPr lang="en-US" sz="1100" dirty="0">
-                <a:solidFill>
-                  <a:srgbClr val="1C2833"/>
-                </a:solidFill>
-                <a:latin typeface="Courier New" pitchFamily="34" charset="0"/>
-                <a:ea typeface="Courier New" pitchFamily="34" charset="-122"/>
-                <a:cs typeface="Courier New" pitchFamily="34" charset="-120"/>
-              </a:rPr>
-              <a:t>123 × 11    234 × 11    345 × 11    456 × 11    142 × 11</a:t>
-            </a:r>
-            <a:endParaRPr lang="en-US" sz="1100" dirty="0"/>
-          </a:p>
-        </p:txBody>
-      </p:sp>
-      <p:sp>
-        <p:nvSpPr>
-          <p:cNvPr id="8" name="Text 6"/>
-          <p:cNvSpPr/>
-          <p:nvPr/>
-        </p:nvSpPr>
-        <p:spPr>
-          <a:xfrm>
-            <a:off x="631627" y="1474589"/>
-            <a:ext cx="8086939" cy="174575"/>
-          </a:xfrm>
-          <a:prstGeom prst="rect">
-            <a:avLst/>
-          </a:prstGeom>
-          <a:noFill/>
-          <a:ln/>
-        </p:spPr>
-        <p:txBody>
-          <a:bodyPr wrap="square" lIns="0" tIns="0" rIns="0" bIns="0" rtlCol="0" anchor="t"/>
-          <a:lstStyle/>
-          <a:p>
-            <a:pPr algn="l" indent="0" marL="0">
-              <a:lnSpc>
-                <a:spcPts val="1375"/>
-              </a:lnSpc>
-              <a:buNone/>
-            </a:pPr>
-            <a:r>
-              <a:rPr lang="en-US" sz="1100" dirty="0">
-                <a:solidFill>
-                  <a:srgbClr val="1C2833"/>
-                </a:solidFill>
-                <a:latin typeface="Courier New" pitchFamily="34" charset="0"/>
-                <a:ea typeface="Courier New" pitchFamily="34" charset="-122"/>
-                <a:cs typeface="Courier New" pitchFamily="34" charset="-120"/>
-              </a:rPr>
-              <a:t>365 × 11    478 × 11    529 × 11    687 × 11    818 × 11</a:t>
-            </a:r>
-            <a:endParaRPr lang="en-US" sz="1100" dirty="0"/>
-          </a:p>
-        </p:txBody>
-      </p:sp>
-      <p:sp>
-        <p:nvSpPr>
-          <p:cNvPr id="9" name="Text 7"/>
-          <p:cNvSpPr/>
-          <p:nvPr/>
-        </p:nvSpPr>
-        <p:spPr>
-          <a:xfrm>
-            <a:off x="406301" y="1864965"/>
-            <a:ext cx="8498026" cy="213271"/>
-          </a:xfrm>
-          <a:prstGeom prst="rect">
-            <a:avLst/>
-          </a:prstGeom>
-          <a:noFill/>
-          <a:ln/>
-        </p:spPr>
-        <p:txBody>
-          <a:bodyPr wrap="square" lIns="0" tIns="0" rIns="0" bIns="0" rtlCol="0" anchor="t"/>
-          <a:lstStyle/>
-          <a:p>
-            <a:pPr algn="l" indent="0" marL="0">
-              <a:lnSpc>
-                <a:spcPts val="1680"/>
-              </a:lnSpc>
-              <a:spcBef>
-                <a:spcPts val="300"/>
-              </a:spcBef>
+              <a:t>Set up.</a:t>
+            </a:r>
+            <a:pPr algn="l" indent="0" marL="0">
+              <a:lnSpc>
+                <a:spcPts val="1620"/>
+              </a:lnSpc>
               <a:spcAft>
                 <a:spcPts val="300"/>
               </a:spcAft>
@@ -6285,7 +8454,27 @@
                 <a:ea typeface="Arial" pitchFamily="34" charset="-122"/>
                 <a:cs typeface="Arial" pitchFamily="34" charset="-120"/>
               </a:rPr>
-              <a:t>– Pair work, self-check by long multiplication on any 3.</a:t>
+              <a:t> </a:t>
+            </a:r>
+            <a:pPr algn="l" indent="0" marL="0">
+              <a:lnSpc>
+                <a:spcPts val="1620"/>
+              </a:lnSpc>
+              <a:spcAft>
+                <a:spcPts val="300"/>
+              </a:spcAft>
+              <a:buNone/>
+            </a:pPr>
+            <a:r>
+              <a:rPr lang="en-US" sz="1200" i="1" dirty="0">
+                <a:solidFill>
+                  <a:srgbClr val="1C2833"/>
+                </a:solidFill>
+                <a:latin typeface="Arial" pitchFamily="34" charset="0"/>
+                <a:ea typeface="Arial" pitchFamily="34" charset="-122"/>
+                <a:cs typeface="Arial" pitchFamily="34" charset="-120"/>
+              </a:rPr>
+              <a:t>"Yesterday we proved (10a+b)×11. What happens with a 3-digit number 100a + 10b + c?"</a:t>
             </a:r>
             <a:endParaRPr lang="en-US" sz="1200" dirty="0"/>
           </a:p>
@@ -6293,7 +8482,73 @@
       </p:sp>
       <p:sp>
         <p:nvSpPr>
-          <p:cNvPr id="10" name="Text 8"/>
+          <p:cNvPr id="5" name="Text 3"/>
+          <p:cNvSpPr/>
+          <p:nvPr/>
+        </p:nvSpPr>
+        <p:spPr>
+          <a:xfrm>
+            <a:off x="634901" y="1266974"/>
+            <a:ext cx="8102798" cy="281880"/>
+          </a:xfrm>
+          <a:prstGeom prst="rect">
+            <a:avLst/>
+          </a:prstGeom>
+          <a:noFill/>
+          <a:ln/>
+        </p:spPr>
+        <p:txBody>
+          <a:bodyPr wrap="square" lIns="0" tIns="0" rIns="0" bIns="0" rtlCol="0" anchor="t"/>
+          <a:lstStyle/>
+          <a:p>
+            <a:pPr algn="l" marL="342900" indent="-342900">
+              <a:lnSpc>
+                <a:spcPts val="1620"/>
+              </a:lnSpc>
+              <a:spcAft>
+                <a:spcPts val="300"/>
+              </a:spcAft>
+              <a:buSzPct val="100000"/>
+              <a:buChar char="•"/>
+            </a:pPr>
+            <a:r>
+              <a:rPr lang="en-US" sz="1200" b="1" dirty="0">
+                <a:solidFill>
+                  <a:srgbClr val="1C2833"/>
+                </a:solidFill>
+                <a:latin typeface="Arial" pitchFamily="34" charset="0"/>
+                <a:ea typeface="Arial" pitchFamily="34" charset="-122"/>
+                <a:cs typeface="Arial" pitchFamily="34" charset="-120"/>
+              </a:rPr>
+              <a:t>Derive together</a:t>
+            </a:r>
+            <a:pPr algn="l" indent="0" marL="0">
+              <a:lnSpc>
+                <a:spcPts val="1620"/>
+              </a:lnSpc>
+              <a:spcAft>
+                <a:spcPts val="300"/>
+              </a:spcAft>
+              <a:buNone/>
+            </a:pPr>
+            <a:r>
+              <a:rPr lang="en-US" sz="1200" dirty="0">
+                <a:solidFill>
+                  <a:srgbClr val="1C2833"/>
+                </a:solidFill>
+                <a:latin typeface="Arial" pitchFamily="34" charset="0"/>
+                <a:ea typeface="Arial" pitchFamily="34" charset="-122"/>
+                <a:cs typeface="Arial" pitchFamily="34" charset="-120"/>
+              </a:rPr>
+              <a:t> (or have students derive):</a:t>
+            </a:r>
+            <a:endParaRPr lang="en-US" sz="1200" dirty="0"/>
+          </a:p>
+        </p:txBody>
+      </p:sp>
+      <p:sp>
+        <p:nvSpPr>
+          <p:cNvPr id="6" name="Text 4"/>
           <p:cNvSpPr/>
           <p:nvPr/>
         </p:nvSpPr>
@@ -6443,7 +8698,7 @@
                 <a:ea typeface="Georgia" pitchFamily="34" charset="-122"/>
                 <a:cs typeface="Georgia" pitchFamily="34" charset="-120"/>
               </a:rPr>
-              <a:t>Formative Quiz Part A (5 min)</a:t>
+              <a:t>Core (18 min) — The 3-digit pattern (cont.)</a:t>
             </a:r>
             <a:endParaRPr lang="en-US" sz="1800" dirty="0"/>
           </a:p>
@@ -6457,13 +8712,66 @@
         </p:nvSpPr>
         <p:spPr>
           <a:xfrm>
-            <a:off x="406301" y="870942"/>
-            <a:ext cx="8498026" cy="222796"/>
-          </a:xfrm>
-          <a:prstGeom prst="rect">
+            <a:off x="406301" y="883593"/>
+            <a:ext cx="8331398" cy="952202"/>
+          </a:xfrm>
+          <a:prstGeom prst="rect">
+            <a:avLst/>
+          </a:prstGeom>
+          <a:solidFill>
+            <a:srgbClr val="F4F8F9"/>
+          </a:solidFill>
+          <a:ln/>
+        </p:spPr>
+        <p:txBody>
+          <a:bodyPr wrap="square" rtlCol="0" anchor="ctr"/>
+          <a:lstStyle/>
+          <a:p>
+            <a:pPr indent="0" marL="0">
+              <a:buNone/>
+            </a:pPr>
+            <a:endParaRPr lang="en-US" dirty="0"/>
+          </a:p>
+        </p:txBody>
+      </p:sp>
+      <p:sp>
+        <p:nvSpPr>
+          <p:cNvPr id="5" name="Shape 3"/>
+          <p:cNvSpPr/>
+          <p:nvPr/>
+        </p:nvSpPr>
+        <p:spPr>
+          <a:xfrm>
+            <a:off x="430113" y="883593"/>
+            <a:ext cx="0" cy="952202"/>
+          </a:xfrm>
+          <a:prstGeom prst="line">
             <a:avLst/>
           </a:prstGeom>
           <a:noFill/>
+          <a:ln w="47625">
+            <a:solidFill>
+              <a:srgbClr val="277884"/>
+            </a:solidFill>
+            <a:prstDash val="solid"/>
+          </a:ln>
+        </p:spPr>
+      </p:sp>
+      <p:sp>
+        <p:nvSpPr>
+          <p:cNvPr id="6" name="Text 4"/>
+          <p:cNvSpPr/>
+          <p:nvPr/>
+        </p:nvSpPr>
+        <p:spPr>
+          <a:xfrm>
+            <a:off x="631627" y="1010543"/>
+            <a:ext cx="8086939" cy="174575"/>
+          </a:xfrm>
+          <a:prstGeom prst="rect">
+            <a:avLst/>
+          </a:prstGeom>
+          <a:noFill/>
           <a:ln/>
         </p:spPr>
         <p:txBody>
@@ -6472,18 +8780,184 @@
           <a:p>
             <a:pPr algn="l" indent="0" marL="0">
               <a:lnSpc>
-                <a:spcPts val="1680"/>
-              </a:lnSpc>
-              <a:spcBef>
-                <a:spcPts val="300"/>
-              </a:spcBef>
-              <a:spcAft>
-                <a:spcPts val="300"/>
-              </a:spcAft>
-              <a:buNone/>
-            </a:pPr>
-            <a:r>
-              <a:rPr lang="en-US" sz="1200" dirty="0">
+                <a:spcPts val="1375"/>
+              </a:lnSpc>
+              <a:buNone/>
+            </a:pPr>
+            <a:r>
+              <a:rPr lang="en-US" sz="1100" dirty="0">
+                <a:solidFill>
+                  <a:srgbClr val="1C2833"/>
+                </a:solidFill>
+                <a:latin typeface="Courier New" pitchFamily="34" charset="0"/>
+                <a:ea typeface="Courier New" pitchFamily="34" charset="-122"/>
+                <a:cs typeface="Courier New" pitchFamily="34" charset="-120"/>
+              </a:rPr>
+              <a:t>(100a + 10b + c) × 11</a:t>
+            </a:r>
+            <a:endParaRPr lang="en-US" sz="1100" dirty="0"/>
+          </a:p>
+        </p:txBody>
+      </p:sp>
+      <p:sp>
+        <p:nvSpPr>
+          <p:cNvPr id="7" name="Text 5"/>
+          <p:cNvSpPr/>
+          <p:nvPr/>
+        </p:nvSpPr>
+        <p:spPr>
+          <a:xfrm>
+            <a:off x="631627" y="1185118"/>
+            <a:ext cx="8086939" cy="174575"/>
+          </a:xfrm>
+          <a:prstGeom prst="rect">
+            <a:avLst/>
+          </a:prstGeom>
+          <a:noFill/>
+          <a:ln/>
+        </p:spPr>
+        <p:txBody>
+          <a:bodyPr wrap="square" lIns="0" tIns="0" rIns="0" bIns="0" rtlCol="0" anchor="t"/>
+          <a:lstStyle/>
+          <a:p>
+            <a:pPr algn="l" indent="0" marL="0">
+              <a:lnSpc>
+                <a:spcPts val="1375"/>
+              </a:lnSpc>
+              <a:buNone/>
+            </a:pPr>
+            <a:r>
+              <a:rPr lang="en-US" sz="1100" dirty="0">
+                <a:solidFill>
+                  <a:srgbClr val="1C2833"/>
+                </a:solidFill>
+                <a:latin typeface="Courier New" pitchFamily="34" charset="0"/>
+                <a:ea typeface="Courier New" pitchFamily="34" charset="-122"/>
+                <a:cs typeface="Courier New" pitchFamily="34" charset="-120"/>
+              </a:rPr>
+              <a:t>= (100a + 10b + c)(10 + 1)</a:t>
+            </a:r>
+            <a:endParaRPr lang="en-US" sz="1100" dirty="0"/>
+          </a:p>
+        </p:txBody>
+      </p:sp>
+      <p:sp>
+        <p:nvSpPr>
+          <p:cNvPr id="8" name="Text 6"/>
+          <p:cNvSpPr/>
+          <p:nvPr/>
+        </p:nvSpPr>
+        <p:spPr>
+          <a:xfrm>
+            <a:off x="631627" y="1359694"/>
+            <a:ext cx="8086939" cy="174575"/>
+          </a:xfrm>
+          <a:prstGeom prst="rect">
+            <a:avLst/>
+          </a:prstGeom>
+          <a:noFill/>
+          <a:ln/>
+        </p:spPr>
+        <p:txBody>
+          <a:bodyPr wrap="square" lIns="0" tIns="0" rIns="0" bIns="0" rtlCol="0" anchor="t"/>
+          <a:lstStyle/>
+          <a:p>
+            <a:pPr algn="l" indent="0" marL="0">
+              <a:lnSpc>
+                <a:spcPts val="1375"/>
+              </a:lnSpc>
+              <a:buNone/>
+            </a:pPr>
+            <a:r>
+              <a:rPr lang="en-US" sz="1100" dirty="0">
+                <a:solidFill>
+                  <a:srgbClr val="1C2833"/>
+                </a:solidFill>
+                <a:latin typeface="Courier New" pitchFamily="34" charset="0"/>
+                <a:ea typeface="Courier New" pitchFamily="34" charset="-122"/>
+                <a:cs typeface="Courier New" pitchFamily="34" charset="-120"/>
+              </a:rPr>
+              <a:t>= 1000a + 100b + 10c + 100a + 10b + c</a:t>
+            </a:r>
+            <a:endParaRPr lang="en-US" sz="1100" dirty="0"/>
+          </a:p>
+        </p:txBody>
+      </p:sp>
+      <p:sp>
+        <p:nvSpPr>
+          <p:cNvPr id="9" name="Text 7"/>
+          <p:cNvSpPr/>
+          <p:nvPr/>
+        </p:nvSpPr>
+        <p:spPr>
+          <a:xfrm>
+            <a:off x="631627" y="1534269"/>
+            <a:ext cx="8086939" cy="174575"/>
+          </a:xfrm>
+          <a:prstGeom prst="rect">
+            <a:avLst/>
+          </a:prstGeom>
+          <a:noFill/>
+          <a:ln/>
+        </p:spPr>
+        <p:txBody>
+          <a:bodyPr wrap="square" lIns="0" tIns="0" rIns="0" bIns="0" rtlCol="0" anchor="t"/>
+          <a:lstStyle/>
+          <a:p>
+            <a:pPr algn="l" indent="0" marL="0">
+              <a:lnSpc>
+                <a:spcPts val="1375"/>
+              </a:lnSpc>
+              <a:buNone/>
+            </a:pPr>
+            <a:r>
+              <a:rPr lang="en-US" sz="1100" dirty="0">
+                <a:solidFill>
+                  <a:srgbClr val="1C2833"/>
+                </a:solidFill>
+                <a:latin typeface="Courier New" pitchFamily="34" charset="0"/>
+                <a:ea typeface="Courier New" pitchFamily="34" charset="-122"/>
+                <a:cs typeface="Courier New" pitchFamily="34" charset="-120"/>
+              </a:rPr>
+              <a:t>= 1000a + 100(a + b) + 10(b + c) + c</a:t>
+            </a:r>
+            <a:endParaRPr lang="en-US" sz="1100" dirty="0"/>
+          </a:p>
+        </p:txBody>
+      </p:sp>
+      <p:sp>
+        <p:nvSpPr>
+          <p:cNvPr id="10" name="Text 8"/>
+          <p:cNvSpPr/>
+          <p:nvPr/>
+        </p:nvSpPr>
+        <p:spPr>
+          <a:xfrm>
+            <a:off x="634901" y="1937296"/>
+            <a:ext cx="8102798" cy="281880"/>
+          </a:xfrm>
+          <a:prstGeom prst="rect">
+            <a:avLst/>
+          </a:prstGeom>
+          <a:noFill/>
+          <a:ln/>
+        </p:spPr>
+        <p:txBody>
+          <a:bodyPr wrap="square" lIns="0" tIns="0" rIns="0" bIns="0" rtlCol="0" anchor="t"/>
+          <a:lstStyle/>
+          <a:p>
+            <a:pPr algn="l" marL="342900" indent="-342900">
+              <a:lnSpc>
+                <a:spcPts val="1620"/>
+              </a:lnSpc>
+              <a:spcAft>
+                <a:spcPts val="300"/>
+              </a:spcAft>
+              <a:buSzPct val="100000"/>
+              <a:buChar char="•"/>
+            </a:pPr>
+            <a:r>
+              <a:rPr lang="en-US" sz="1200" b="1" dirty="0">
                 <a:solidFill>
                   <a:srgbClr val="1C2833"/>
                 </a:solidFill>
@@ -6491,15 +8965,12 @@
                 <a:ea typeface="Arial" pitchFamily="34" charset="-122"/>
                 <a:cs typeface="Arial" pitchFamily="34" charset="-120"/>
               </a:rPr>
-              <a:t>– Distribute </a:t>
-            </a:r>
-            <a:pPr algn="l" indent="0" marL="0">
-              <a:lnSpc>
-                <a:spcPts val="1680"/>
-              </a:lnSpc>
-              <a:spcBef>
-                <a:spcPts val="300"/>
-              </a:spcBef>
+              <a:t>Read the result.</a:t>
+            </a:r>
+            <a:pPr algn="l" indent="0" marL="0">
+              <a:lnSpc>
+                <a:spcPts val="1620"/>
+              </a:lnSpc>
               <a:spcAft>
                 <a:spcPts val="300"/>
               </a:spcAft>
@@ -6514,22 +8985,19 @@
                 <a:ea typeface="Arial" pitchFamily="34" charset="-122"/>
                 <a:cs typeface="Arial" pitchFamily="34" charset="-120"/>
               </a:rPr>
-              <a:t>quizzes/formative.md</a:t>
-            </a:r>
-            <a:pPr algn="l" indent="0" marL="0">
-              <a:lnSpc>
-                <a:spcPts val="1680"/>
-              </a:lnSpc>
-              <a:spcBef>
-                <a:spcPts val="300"/>
-              </a:spcBef>
-              <a:spcAft>
-                <a:spcPts val="300"/>
-              </a:spcAft>
-              <a:buNone/>
-            </a:pPr>
-            <a:r>
-              <a:rPr lang="en-US" sz="1200" dirty="0">
+              <a:t> </a:t>
+            </a:r>
+            <a:pPr algn="l" indent="0" marL="0">
+              <a:lnSpc>
+                <a:spcPts val="1620"/>
+              </a:lnSpc>
+              <a:spcAft>
+                <a:spcPts val="300"/>
+              </a:spcAft>
+              <a:buNone/>
+            </a:pPr>
+            <a:r>
+              <a:rPr lang="en-US" sz="1200" i="1" dirty="0">
                 <a:solidFill>
                   <a:srgbClr val="1C2833"/>
                 </a:solidFill>
@@ -6537,7 +9005,7 @@
                 <a:ea typeface="Arial" pitchFamily="34" charset="-122"/>
                 <a:cs typeface="Arial" pitchFamily="34" charset="-120"/>
               </a:rPr>
-              <a:t> Part A. – 5 quick problems, mixed 2- and 3-digit × 11. Closed-notebook.</a:t>
+              <a:t>"Thousands = a. Hundreds = a + b. Tens = b + c. Units = c."</a:t>
             </a:r>
             <a:endParaRPr lang="en-US" sz="1200" dirty="0"/>
           </a:p>
@@ -6545,7 +9013,7 @@
       </p:sp>
       <p:sp>
         <p:nvSpPr>
-          <p:cNvPr id="5" name="Text 3"/>
+          <p:cNvPr id="11" name="Text 9"/>
           <p:cNvSpPr/>
           <p:nvPr/>
         </p:nvSpPr>
@@ -6695,7 +9163,7 @@
                 <a:ea typeface="Georgia" pitchFamily="34" charset="-122"/>
                 <a:cs typeface="Georgia" pitchFamily="34" charset="-120"/>
               </a:rPr>
-              <a:t>Wrap-up (2 min)</a:t>
+              <a:t>Core (18 min) — The 3-digit pattern (cont.)</a:t>
             </a:r>
             <a:endParaRPr lang="en-US" sz="1800" dirty="0"/>
           </a:p>
@@ -6743,7 +9211,7 @@
                 <a:ea typeface="Arial" pitchFamily="34" charset="-122"/>
                 <a:cs typeface="Arial" pitchFamily="34" charset="-120"/>
               </a:rPr>
-              <a:t>– Preview Day 5: </a:t>
+              <a:t>In words: </a:t>
             </a:r>
             <a:pPr algn="l" indent="0" marL="0">
               <a:lnSpc>
@@ -6758,7 +9226,7 @@
               <a:buNone/>
             </a:pPr>
             <a:r>
-              <a:rPr lang="en-US" sz="1200" i="1" dirty="0">
+              <a:rPr lang="en-US" sz="1200" b="1" dirty="0">
                 <a:solidFill>
                   <a:srgbClr val="1C2833"/>
                 </a:solidFill>
@@ -6766,7 +9234,7 @@
                 <a:ea typeface="Arial" pitchFamily="34" charset="-122"/>
                 <a:cs typeface="Arial" pitchFamily="34" charset="-120"/>
               </a:rPr>
-              <a:t>"Tomorrow — speed day. We'll retest your Day 1 problem (73 × 11) using the trick."</a:t>
+              <a:t>first digit stays, then each pair of adjacent digits sums and slides into the gap, then the last digit stays.</a:t>
             </a:r>
             <a:endParaRPr lang="en-US" sz="1200" dirty="0"/>
           </a:p>
@@ -6775,6 +9243,52 @@
       <p:sp>
         <p:nvSpPr>
           <p:cNvPr id="5" name="Text 3"/>
+          <p:cNvSpPr/>
+          <p:nvPr/>
+        </p:nvSpPr>
+        <p:spPr>
+          <a:xfrm>
+            <a:off x="634901" y="1173063"/>
+            <a:ext cx="8102798" cy="281880"/>
+          </a:xfrm>
+          <a:prstGeom prst="rect">
+            <a:avLst/>
+          </a:prstGeom>
+          <a:noFill/>
+          <a:ln/>
+        </p:spPr>
+        <p:txBody>
+          <a:bodyPr wrap="square" lIns="0" tIns="0" rIns="0" bIns="0" rtlCol="0" anchor="t"/>
+          <a:lstStyle/>
+          <a:p>
+            <a:pPr algn="l" marL="342900" indent="-342900">
+              <a:lnSpc>
+                <a:spcPts val="1620"/>
+              </a:lnSpc>
+              <a:spcAft>
+                <a:spcPts val="300"/>
+              </a:spcAft>
+              <a:buSzPct val="100000"/>
+              <a:buChar char="•"/>
+            </a:pPr>
+            <a:r>
+              <a:rPr lang="en-US" sz="1200" b="1" dirty="0">
+                <a:solidFill>
+                  <a:srgbClr val="1C2833"/>
+                </a:solidFill>
+                <a:latin typeface="Arial" pitchFamily="34" charset="0"/>
+                <a:ea typeface="Arial" pitchFamily="34" charset="-122"/>
+                <a:cs typeface="Arial" pitchFamily="34" charset="-120"/>
+              </a:rPr>
+              <a:t>Worked example: 234 × 11.</a:t>
+            </a:r>
+            <a:endParaRPr lang="en-US" sz="1200" dirty="0"/>
+          </a:p>
+        </p:txBody>
+      </p:sp>
+      <p:sp>
+        <p:nvSpPr>
+          <p:cNvPr id="6" name="Text 4"/>
           <p:cNvSpPr/>
           <p:nvPr/>
         </p:nvSpPr>
@@ -6924,7 +9438,7 @@
                 <a:ea typeface="Georgia" pitchFamily="34" charset="-122"/>
                 <a:cs typeface="Georgia" pitchFamily="34" charset="-120"/>
               </a:rPr>
-              <a:t>Student-facing content</a:t>
+              <a:t>Core (18 min) — The 3-digit pattern (cont.)</a:t>
             </a:r>
             <a:endParaRPr lang="en-US" sz="1800" dirty="0"/>
           </a:p>
@@ -6939,7 +9453,7 @@
         <p:spPr>
           <a:xfrm>
             <a:off x="406301" y="883593"/>
-            <a:ext cx="8331398" cy="1650206"/>
+            <a:ext cx="8331398" cy="1301353"/>
           </a:xfrm>
           <a:prstGeom prst="rect">
             <a:avLst/>
@@ -6968,16 +9482,16 @@
         </p:nvSpPr>
         <p:spPr>
           <a:xfrm>
-            <a:off x="434876" y="883593"/>
-            <a:ext cx="0" cy="1650206"/>
+            <a:off x="430113" y="883593"/>
+            <a:ext cx="0" cy="1301353"/>
           </a:xfrm>
           <a:prstGeom prst="line">
             <a:avLst/>
           </a:prstGeom>
           <a:noFill/>
-          <a:ln w="57150">
+          <a:ln w="47625">
             <a:solidFill>
-              <a:srgbClr val="FE4447"/>
+              <a:srgbClr val="277884"/>
             </a:solidFill>
             <a:prstDash val="solid"/>
           </a:ln>
@@ -6991,8 +9505,8 @@
         </p:nvSpPr>
         <p:spPr>
           <a:xfrm>
-            <a:off x="692051" y="1074093"/>
-            <a:ext cx="7973389" cy="230981"/>
+            <a:off x="631627" y="1010543"/>
+            <a:ext cx="8086939" cy="174575"/>
           </a:xfrm>
           <a:prstGeom prst="rect">
             <a:avLst/>
@@ -7006,7 +9520,259 @@
           <a:p>
             <a:pPr algn="l" indent="0" marL="0">
               <a:lnSpc>
-                <a:spcPts val="1820"/>
+                <a:spcPts val="1375"/>
+              </a:lnSpc>
+              <a:buNone/>
+            </a:pPr>
+            <a:r>
+              <a:rPr lang="en-US" sz="1100" dirty="0">
+                <a:solidFill>
+                  <a:srgbClr val="1C2833"/>
+                </a:solidFill>
+                <a:latin typeface="Courier New" pitchFamily="34" charset="0"/>
+                <a:ea typeface="Courier New" pitchFamily="34" charset="-122"/>
+                <a:cs typeface="Courier New" pitchFamily="34" charset="-120"/>
+              </a:rPr>
+              <a:t>Splits and gaps:    2  _  _  4</a:t>
+            </a:r>
+            <a:endParaRPr lang="en-US" sz="1100" dirty="0"/>
+          </a:p>
+        </p:txBody>
+      </p:sp>
+      <p:sp>
+        <p:nvSpPr>
+          <p:cNvPr id="7" name="Text 5"/>
+          <p:cNvSpPr/>
+          <p:nvPr/>
+        </p:nvSpPr>
+        <p:spPr>
+          <a:xfrm>
+            <a:off x="631627" y="1185118"/>
+            <a:ext cx="8086939" cy="174575"/>
+          </a:xfrm>
+          <a:prstGeom prst="rect">
+            <a:avLst/>
+          </a:prstGeom>
+          <a:noFill/>
+          <a:ln/>
+        </p:spPr>
+        <p:txBody>
+          <a:bodyPr wrap="square" lIns="0" tIns="0" rIns="0" bIns="0" rtlCol="0" anchor="t"/>
+          <a:lstStyle/>
+          <a:p>
+            <a:pPr algn="l" indent="0" marL="0">
+              <a:lnSpc>
+                <a:spcPts val="1375"/>
+              </a:lnSpc>
+              <a:buNone/>
+            </a:pPr>
+            <a:r>
+              <a:rPr lang="en-US" sz="1100" dirty="0">
+                <a:solidFill>
+                  <a:srgbClr val="1C2833"/>
+                </a:solidFill>
+                <a:latin typeface="Courier New" pitchFamily="34" charset="0"/>
+                <a:ea typeface="Courier New" pitchFamily="34" charset="-122"/>
+                <a:cs typeface="Courier New" pitchFamily="34" charset="-120"/>
+              </a:rPr>
+              <a:t>↑     ↑</a:t>
+            </a:r>
+            <a:endParaRPr lang="en-US" sz="1100" dirty="0"/>
+          </a:p>
+        </p:txBody>
+      </p:sp>
+      <p:sp>
+        <p:nvSpPr>
+          <p:cNvPr id="8" name="Text 6"/>
+          <p:cNvSpPr/>
+          <p:nvPr/>
+        </p:nvSpPr>
+        <p:spPr>
+          <a:xfrm>
+            <a:off x="631627" y="1359694"/>
+            <a:ext cx="8086939" cy="174575"/>
+          </a:xfrm>
+          <a:prstGeom prst="rect">
+            <a:avLst/>
+          </a:prstGeom>
+          <a:noFill/>
+          <a:ln/>
+        </p:spPr>
+        <p:txBody>
+          <a:bodyPr wrap="square" lIns="0" tIns="0" rIns="0" bIns="0" rtlCol="0" anchor="t"/>
+          <a:lstStyle/>
+          <a:p>
+            <a:pPr algn="l" indent="0" marL="0">
+              <a:lnSpc>
+                <a:spcPts val="1375"/>
+              </a:lnSpc>
+              <a:buNone/>
+            </a:pPr>
+            <a:r>
+              <a:rPr lang="en-US" sz="1100" dirty="0">
+                <a:solidFill>
+                  <a:srgbClr val="1C2833"/>
+                </a:solidFill>
+                <a:latin typeface="Courier New" pitchFamily="34" charset="0"/>
+                <a:ea typeface="Courier New" pitchFamily="34" charset="-122"/>
+                <a:cs typeface="Courier New" pitchFamily="34" charset="-120"/>
+              </a:rPr>
+              <a:t>(a+b) (b+c)</a:t>
+            </a:r>
+            <a:endParaRPr lang="en-US" sz="1100" dirty="0"/>
+          </a:p>
+        </p:txBody>
+      </p:sp>
+      <p:sp>
+        <p:nvSpPr>
+          <p:cNvPr id="9" name="Text 7"/>
+          <p:cNvSpPr/>
+          <p:nvPr/>
+        </p:nvSpPr>
+        <p:spPr>
+          <a:xfrm>
+            <a:off x="631627" y="1534269"/>
+            <a:ext cx="8086939" cy="174575"/>
+          </a:xfrm>
+          <a:prstGeom prst="rect">
+            <a:avLst/>
+          </a:prstGeom>
+          <a:noFill/>
+          <a:ln/>
+        </p:spPr>
+        <p:txBody>
+          <a:bodyPr wrap="square" lIns="0" tIns="0" rIns="0" bIns="0" rtlCol="0" anchor="t"/>
+          <a:lstStyle/>
+          <a:p>
+            <a:pPr algn="l" indent="0" marL="0">
+              <a:lnSpc>
+                <a:spcPts val="1375"/>
+              </a:lnSpc>
+              <a:buNone/>
+            </a:pPr>
+            <a:r>
+              <a:rPr lang="en-US" sz="1100" dirty="0">
+                <a:solidFill>
+                  <a:srgbClr val="1C2833"/>
+                </a:solidFill>
+                <a:latin typeface="Courier New" pitchFamily="34" charset="0"/>
+                <a:ea typeface="Courier New" pitchFamily="34" charset="-122"/>
+                <a:cs typeface="Courier New" pitchFamily="34" charset="-120"/>
+              </a:rPr>
+              <a:t>2 + 3 = 5</a:t>
+            </a:r>
+            <a:endParaRPr lang="en-US" sz="1100" dirty="0"/>
+          </a:p>
+        </p:txBody>
+      </p:sp>
+      <p:sp>
+        <p:nvSpPr>
+          <p:cNvPr id="10" name="Text 8"/>
+          <p:cNvSpPr/>
+          <p:nvPr/>
+        </p:nvSpPr>
+        <p:spPr>
+          <a:xfrm>
+            <a:off x="631627" y="1708845"/>
+            <a:ext cx="8086939" cy="174575"/>
+          </a:xfrm>
+          <a:prstGeom prst="rect">
+            <a:avLst/>
+          </a:prstGeom>
+          <a:noFill/>
+          <a:ln/>
+        </p:spPr>
+        <p:txBody>
+          <a:bodyPr wrap="square" lIns="0" tIns="0" rIns="0" bIns="0" rtlCol="0" anchor="t"/>
+          <a:lstStyle/>
+          <a:p>
+            <a:pPr algn="l" indent="0" marL="0">
+              <a:lnSpc>
+                <a:spcPts val="1375"/>
+              </a:lnSpc>
+              <a:buNone/>
+            </a:pPr>
+            <a:r>
+              <a:rPr lang="en-US" sz="1100" dirty="0">
+                <a:solidFill>
+                  <a:srgbClr val="1C2833"/>
+                </a:solidFill>
+                <a:latin typeface="Courier New" pitchFamily="34" charset="0"/>
+                <a:ea typeface="Courier New" pitchFamily="34" charset="-122"/>
+                <a:cs typeface="Courier New" pitchFamily="34" charset="-120"/>
+              </a:rPr>
+              <a:t>3 + 4 = 7</a:t>
+            </a:r>
+            <a:endParaRPr lang="en-US" sz="1100" dirty="0"/>
+          </a:p>
+        </p:txBody>
+      </p:sp>
+      <p:sp>
+        <p:nvSpPr>
+          <p:cNvPr id="11" name="Text 9"/>
+          <p:cNvSpPr/>
+          <p:nvPr/>
+        </p:nvSpPr>
+        <p:spPr>
+          <a:xfrm>
+            <a:off x="631627" y="1883420"/>
+            <a:ext cx="8086939" cy="174575"/>
+          </a:xfrm>
+          <a:prstGeom prst="rect">
+            <a:avLst/>
+          </a:prstGeom>
+          <a:noFill/>
+          <a:ln/>
+        </p:spPr>
+        <p:txBody>
+          <a:bodyPr wrap="square" lIns="0" tIns="0" rIns="0" bIns="0" rtlCol="0" anchor="t"/>
+          <a:lstStyle/>
+          <a:p>
+            <a:pPr algn="l" indent="0" marL="0">
+              <a:lnSpc>
+                <a:spcPts val="1375"/>
+              </a:lnSpc>
+              <a:buNone/>
+            </a:pPr>
+            <a:r>
+              <a:rPr lang="en-US" sz="1100" dirty="0">
+                <a:solidFill>
+                  <a:srgbClr val="1C2833"/>
+                </a:solidFill>
+                <a:latin typeface="Courier New" pitchFamily="34" charset="0"/>
+                <a:ea typeface="Courier New" pitchFamily="34" charset="-122"/>
+                <a:cs typeface="Courier New" pitchFamily="34" charset="-120"/>
+              </a:rPr>
+              <a:t>Answer:             2  5  7  4   →   2574.</a:t>
+            </a:r>
+            <a:endParaRPr lang="en-US" sz="1100" dirty="0"/>
+          </a:p>
+        </p:txBody>
+      </p:sp>
+      <p:sp>
+        <p:nvSpPr>
+          <p:cNvPr id="12" name="Text 10"/>
+          <p:cNvSpPr/>
+          <p:nvPr/>
+        </p:nvSpPr>
+        <p:spPr>
+          <a:xfrm>
+            <a:off x="406301" y="2273796"/>
+            <a:ext cx="8498026" cy="213271"/>
+          </a:xfrm>
+          <a:prstGeom prst="rect">
+            <a:avLst/>
+          </a:prstGeom>
+          <a:noFill/>
+          <a:ln/>
+        </p:spPr>
+        <p:txBody>
+          <a:bodyPr wrap="square" lIns="0" tIns="0" rIns="0" bIns="0" rtlCol="0" anchor="t"/>
+          <a:lstStyle/>
+          <a:p>
+            <a:pPr algn="l" indent="0" marL="0">
+              <a:lnSpc>
+                <a:spcPts val="1680"/>
               </a:lnSpc>
               <a:spcBef>
                 <a:spcPts val="300"/>
@@ -7017,44 +9783,19 @@
               <a:buNone/>
             </a:pPr>
             <a:r>
-              <a:rPr lang="en-US" sz="1300" b="1" i="1" dirty="0">
-                <a:solidFill>
-                  <a:srgbClr val="1C2833"/>
-                </a:solidFill>
-                <a:latin typeface="Georgia" pitchFamily="34" charset="0"/>
-                <a:ea typeface="Georgia" pitchFamily="34" charset="-122"/>
-                <a:cs typeface="Georgia" pitchFamily="34" charset="-120"/>
-              </a:rPr>
-              <a:t>3-digit × 11</a:t>
-            </a:r>
-            <a:endParaRPr lang="en-US" sz="1300" dirty="0"/>
-          </a:p>
-        </p:txBody>
-      </p:sp>
-      <p:sp>
-        <p:nvSpPr>
-          <p:cNvPr id="7" name="Text 5"/>
-          <p:cNvSpPr/>
-          <p:nvPr/>
-        </p:nvSpPr>
-        <p:spPr>
-          <a:xfrm>
-            <a:off x="692051" y="1343174"/>
-            <a:ext cx="7973389" cy="461963"/>
-          </a:xfrm>
-          <a:prstGeom prst="rect">
-            <a:avLst/>
-          </a:prstGeom>
-          <a:noFill/>
-          <a:ln/>
-        </p:spPr>
-        <p:txBody>
-          <a:bodyPr wrap="square" lIns="0" tIns="0" rIns="0" bIns="0" rtlCol="0" anchor="t"/>
-          <a:lstStyle/>
-          <a:p>
-            <a:pPr algn="l" indent="0" marL="0">
-              <a:lnSpc>
-                <a:spcPts val="1820"/>
+              <a:rPr lang="en-US" sz="1200" dirty="0">
+                <a:solidFill>
+                  <a:srgbClr val="1C2833"/>
+                </a:solidFill>
+                <a:latin typeface="Arial" pitchFamily="34" charset="0"/>
+                <a:ea typeface="Arial" pitchFamily="34" charset="-122"/>
+                <a:cs typeface="Arial" pitchFamily="34" charset="-120"/>
+              </a:rPr>
+              <a:t>Check: 234 × 11 = 234 × 10 + 234 = 2340 + 234 = </a:t>
+            </a:r>
+            <a:pPr algn="l" indent="0" marL="0">
+              <a:lnSpc>
+                <a:spcPts val="1680"/>
               </a:lnSpc>
               <a:spcBef>
                 <a:spcPts val="300"/>
@@ -7065,19 +9806,19 @@
               <a:buNone/>
             </a:pPr>
             <a:r>
-              <a:rPr lang="en-US" sz="1300" dirty="0">
-                <a:solidFill>
-                  <a:srgbClr val="1C2833"/>
-                </a:solidFill>
-                <a:latin typeface="Georgia" pitchFamily="34" charset="0"/>
-                <a:ea typeface="Georgia" pitchFamily="34" charset="-122"/>
-                <a:cs typeface="Georgia" pitchFamily="34" charset="-120"/>
-              </a:rPr>
-              <a:t>For a number </a:t>
-            </a:r>
-            <a:pPr algn="l" indent="0" marL="0">
-              <a:lnSpc>
-                <a:spcPts val="1820"/>
+              <a:rPr lang="en-US" sz="1200" b="1" dirty="0">
+                <a:solidFill>
+                  <a:srgbClr val="1C2833"/>
+                </a:solidFill>
+                <a:latin typeface="Arial" pitchFamily="34" charset="0"/>
+                <a:ea typeface="Arial" pitchFamily="34" charset="-122"/>
+                <a:cs typeface="Arial" pitchFamily="34" charset="-120"/>
+              </a:rPr>
+              <a:t>2574</a:t>
+            </a:r>
+            <a:pPr algn="l" indent="0" marL="0">
+              <a:lnSpc>
+                <a:spcPts val="1680"/>
               </a:lnSpc>
               <a:spcBef>
                 <a:spcPts val="300"/>
@@ -7088,786 +9829,23 @@
               <a:buNone/>
             </a:pPr>
             <a:r>
-              <a:rPr lang="en-US" sz="1300" i="1" dirty="0">
-                <a:solidFill>
-                  <a:srgbClr val="1C2833"/>
-                </a:solidFill>
-                <a:latin typeface="Georgia" pitchFamily="34" charset="0"/>
-                <a:ea typeface="Georgia" pitchFamily="34" charset="-122"/>
-                <a:cs typeface="Georgia" pitchFamily="34" charset="-120"/>
-              </a:rPr>
-              <a:t>abc</a:t>
-            </a:r>
-            <a:pPr algn="l" indent="0" marL="0">
-              <a:lnSpc>
-                <a:spcPts val="1820"/>
-              </a:lnSpc>
-              <a:spcBef>
-                <a:spcPts val="300"/>
-              </a:spcBef>
-              <a:spcAft>
-                <a:spcPts val="300"/>
-              </a:spcAft>
-              <a:buNone/>
-            </a:pPr>
-            <a:r>
-              <a:rPr lang="en-US" sz="1300" dirty="0">
-                <a:solidFill>
-                  <a:srgbClr val="1C2833"/>
-                </a:solidFill>
-                <a:latin typeface="Georgia" pitchFamily="34" charset="0"/>
-                <a:ea typeface="Georgia" pitchFamily="34" charset="-122"/>
-                <a:cs typeface="Georgia" pitchFamily="34" charset="-120"/>
-              </a:rPr>
-              <a:t> × 11: 1. Write </a:t>
-            </a:r>
-            <a:pPr algn="l" indent="0" marL="0">
-              <a:lnSpc>
-                <a:spcPts val="1820"/>
-              </a:lnSpc>
-              <a:spcBef>
-                <a:spcPts val="300"/>
-              </a:spcBef>
-              <a:spcAft>
-                <a:spcPts val="300"/>
-              </a:spcAft>
-              <a:buNone/>
-            </a:pPr>
-            <a:r>
-              <a:rPr lang="en-US" sz="1300" i="1" dirty="0">
-                <a:solidFill>
-                  <a:srgbClr val="1C2833"/>
-                </a:solidFill>
-                <a:latin typeface="Georgia" pitchFamily="34" charset="0"/>
-                <a:ea typeface="Georgia" pitchFamily="34" charset="-122"/>
-                <a:cs typeface="Georgia" pitchFamily="34" charset="-120"/>
-              </a:rPr>
-              <a:t>a _ _ c</a:t>
-            </a:r>
-            <a:pPr algn="l" indent="0" marL="0">
-              <a:lnSpc>
-                <a:spcPts val="1820"/>
-              </a:lnSpc>
-              <a:spcBef>
-                <a:spcPts val="300"/>
-              </a:spcBef>
-              <a:spcAft>
-                <a:spcPts val="300"/>
-              </a:spcAft>
-              <a:buNone/>
-            </a:pPr>
-            <a:r>
-              <a:rPr lang="en-US" sz="1300" dirty="0">
-                <a:solidFill>
-                  <a:srgbClr val="1C2833"/>
-                </a:solidFill>
-                <a:latin typeface="Georgia" pitchFamily="34" charset="0"/>
-                <a:ea typeface="Georgia" pitchFamily="34" charset="-122"/>
-                <a:cs typeface="Georgia" pitchFamily="34" charset="-120"/>
-              </a:rPr>
-              <a:t> (outer digits unchanged). 2. Fill the first gap with </a:t>
-            </a:r>
-            <a:pPr algn="l" indent="0" marL="0">
-              <a:lnSpc>
-                <a:spcPts val="1820"/>
-              </a:lnSpc>
-              <a:spcBef>
-                <a:spcPts val="300"/>
-              </a:spcBef>
-              <a:spcAft>
-                <a:spcPts val="300"/>
-              </a:spcAft>
-              <a:buNone/>
-            </a:pPr>
-            <a:r>
-              <a:rPr lang="en-US" sz="1300" i="1" dirty="0">
-                <a:solidFill>
-                  <a:srgbClr val="1C2833"/>
-                </a:solidFill>
-                <a:latin typeface="Georgia" pitchFamily="34" charset="0"/>
-                <a:ea typeface="Georgia" pitchFamily="34" charset="-122"/>
-                <a:cs typeface="Georgia" pitchFamily="34" charset="-120"/>
-              </a:rPr>
-              <a:t>a</a:t>
-            </a:r>
-            <a:pPr algn="l" indent="0" marL="0">
-              <a:lnSpc>
-                <a:spcPts val="1820"/>
-              </a:lnSpc>
-              <a:spcBef>
-                <a:spcPts val="300"/>
-              </a:spcBef>
-              <a:spcAft>
-                <a:spcPts val="300"/>
-              </a:spcAft>
-              <a:buNone/>
-            </a:pPr>
-            <a:r>
-              <a:rPr lang="en-US" sz="1300" dirty="0">
-                <a:solidFill>
-                  <a:srgbClr val="1C2833"/>
-                </a:solidFill>
-                <a:latin typeface="Georgia" pitchFamily="34" charset="0"/>
-                <a:ea typeface="Georgia" pitchFamily="34" charset="-122"/>
-                <a:cs typeface="Georgia" pitchFamily="34" charset="-120"/>
-              </a:rPr>
-              <a:t> + </a:t>
-            </a:r>
-            <a:pPr algn="l" indent="0" marL="0">
-              <a:lnSpc>
-                <a:spcPts val="1820"/>
-              </a:lnSpc>
-              <a:spcBef>
-                <a:spcPts val="300"/>
-              </a:spcBef>
-              <a:spcAft>
-                <a:spcPts val="300"/>
-              </a:spcAft>
-              <a:buNone/>
-            </a:pPr>
-            <a:r>
-              <a:rPr lang="en-US" sz="1300" i="1" dirty="0">
-                <a:solidFill>
-                  <a:srgbClr val="1C2833"/>
-                </a:solidFill>
-                <a:latin typeface="Georgia" pitchFamily="34" charset="0"/>
-                <a:ea typeface="Georgia" pitchFamily="34" charset="-122"/>
-                <a:cs typeface="Georgia" pitchFamily="34" charset="-120"/>
-              </a:rPr>
-              <a:t>b</a:t>
-            </a:r>
-            <a:pPr algn="l" indent="0" marL="0">
-              <a:lnSpc>
-                <a:spcPts val="1820"/>
-              </a:lnSpc>
-              <a:spcBef>
-                <a:spcPts val="300"/>
-              </a:spcBef>
-              <a:spcAft>
-                <a:spcPts val="300"/>
-              </a:spcAft>
-              <a:buNone/>
-            </a:pPr>
-            <a:r>
-              <a:rPr lang="en-US" sz="1300" dirty="0">
-                <a:solidFill>
-                  <a:srgbClr val="1C2833"/>
-                </a:solidFill>
-                <a:latin typeface="Georgia" pitchFamily="34" charset="0"/>
-                <a:ea typeface="Georgia" pitchFamily="34" charset="-122"/>
-                <a:cs typeface="Georgia" pitchFamily="34" charset="-120"/>
-              </a:rPr>
-              <a:t>. 3. Fill the second gap with </a:t>
-            </a:r>
-            <a:pPr algn="l" indent="0" marL="0">
-              <a:lnSpc>
-                <a:spcPts val="1820"/>
-              </a:lnSpc>
-              <a:spcBef>
-                <a:spcPts val="300"/>
-              </a:spcBef>
-              <a:spcAft>
-                <a:spcPts val="300"/>
-              </a:spcAft>
-              <a:buNone/>
-            </a:pPr>
-            <a:r>
-              <a:rPr lang="en-US" sz="1300" i="1" dirty="0">
-                <a:solidFill>
-                  <a:srgbClr val="1C2833"/>
-                </a:solidFill>
-                <a:latin typeface="Georgia" pitchFamily="34" charset="0"/>
-                <a:ea typeface="Georgia" pitchFamily="34" charset="-122"/>
-                <a:cs typeface="Georgia" pitchFamily="34" charset="-120"/>
-              </a:rPr>
-              <a:t>b</a:t>
-            </a:r>
-            <a:pPr algn="l" indent="0" marL="0">
-              <a:lnSpc>
-                <a:spcPts val="1820"/>
-              </a:lnSpc>
-              <a:spcBef>
-                <a:spcPts val="300"/>
-              </a:spcBef>
-              <a:spcAft>
-                <a:spcPts val="300"/>
-              </a:spcAft>
-              <a:buNone/>
-            </a:pPr>
-            <a:r>
-              <a:rPr lang="en-US" sz="1300" dirty="0">
-                <a:solidFill>
-                  <a:srgbClr val="1C2833"/>
-                </a:solidFill>
-                <a:latin typeface="Georgia" pitchFamily="34" charset="0"/>
-                <a:ea typeface="Georgia" pitchFamily="34" charset="-122"/>
-                <a:cs typeface="Georgia" pitchFamily="34" charset="-120"/>
-              </a:rPr>
-              <a:t> + </a:t>
-            </a:r>
-            <a:pPr algn="l" indent="0" marL="0">
-              <a:lnSpc>
-                <a:spcPts val="1820"/>
-              </a:lnSpc>
-              <a:spcBef>
-                <a:spcPts val="300"/>
-              </a:spcBef>
-              <a:spcAft>
-                <a:spcPts val="300"/>
-              </a:spcAft>
-              <a:buNone/>
-            </a:pPr>
-            <a:r>
-              <a:rPr lang="en-US" sz="1300" i="1" dirty="0">
-                <a:solidFill>
-                  <a:srgbClr val="1C2833"/>
-                </a:solidFill>
-                <a:latin typeface="Georgia" pitchFamily="34" charset="0"/>
-                <a:ea typeface="Georgia" pitchFamily="34" charset="-122"/>
-                <a:cs typeface="Georgia" pitchFamily="34" charset="-120"/>
-              </a:rPr>
-              <a:t>c</a:t>
-            </a:r>
-            <a:pPr algn="l" indent="0" marL="0">
-              <a:lnSpc>
-                <a:spcPts val="1820"/>
-              </a:lnSpc>
-              <a:spcBef>
-                <a:spcPts val="300"/>
-              </a:spcBef>
-              <a:spcAft>
-                <a:spcPts val="300"/>
-              </a:spcAft>
-              <a:buNone/>
-            </a:pPr>
-            <a:r>
-              <a:rPr lang="en-US" sz="1300" dirty="0">
-                <a:solidFill>
-                  <a:srgbClr val="1C2833"/>
-                </a:solidFill>
-                <a:latin typeface="Georgia" pitchFamily="34" charset="0"/>
-                <a:ea typeface="Georgia" pitchFamily="34" charset="-122"/>
-                <a:cs typeface="Georgia" pitchFamily="34" charset="-120"/>
-              </a:rPr>
-              <a:t>. 4. Handle carries right to left.</a:t>
-            </a:r>
-            <a:endParaRPr lang="en-US" sz="1300" dirty="0"/>
-          </a:p>
-        </p:txBody>
-      </p:sp>
-      <p:sp>
-        <p:nvSpPr>
-          <p:cNvPr id="8" name="Text 6"/>
-          <p:cNvSpPr/>
-          <p:nvPr/>
-        </p:nvSpPr>
-        <p:spPr>
-          <a:xfrm>
-            <a:off x="692051" y="1843236"/>
-            <a:ext cx="7973389" cy="230981"/>
-          </a:xfrm>
-          <a:prstGeom prst="rect">
-            <a:avLst/>
-          </a:prstGeom>
-          <a:noFill/>
-          <a:ln/>
-        </p:spPr>
-        <p:txBody>
-          <a:bodyPr wrap="square" lIns="0" tIns="0" rIns="0" bIns="0" rtlCol="0" anchor="t"/>
-          <a:lstStyle/>
-          <a:p>
-            <a:pPr algn="l" indent="0" marL="0">
-              <a:lnSpc>
-                <a:spcPts val="1820"/>
-              </a:lnSpc>
-              <a:spcBef>
-                <a:spcPts val="300"/>
-              </a:spcBef>
-              <a:spcAft>
-                <a:spcPts val="300"/>
-              </a:spcAft>
-              <a:buNone/>
-            </a:pPr>
-            <a:r>
-              <a:rPr lang="en-US" sz="1300" i="1" dirty="0">
-                <a:solidFill>
-                  <a:srgbClr val="1C2833"/>
-                </a:solidFill>
-                <a:latin typeface="Georgia" pitchFamily="34" charset="0"/>
-                <a:ea typeface="Georgia" pitchFamily="34" charset="-122"/>
-                <a:cs typeface="Georgia" pitchFamily="34" charset="-120"/>
-              </a:rPr>
-              <a:t>Example: 234 × 11 → 2 _ _ 4 → 2 (2+3) (3+4) 4 → 2574.</a:t>
-            </a:r>
-            <a:endParaRPr lang="en-US" sz="1300" dirty="0"/>
-          </a:p>
-        </p:txBody>
-      </p:sp>
-      <p:sp>
-        <p:nvSpPr>
-          <p:cNvPr id="9" name="Text 7"/>
-          <p:cNvSpPr/>
-          <p:nvPr/>
-        </p:nvSpPr>
-        <p:spPr>
-          <a:xfrm>
-            <a:off x="692051" y="2112318"/>
-            <a:ext cx="7973389" cy="230981"/>
-          </a:xfrm>
-          <a:prstGeom prst="rect">
-            <a:avLst/>
-          </a:prstGeom>
-          <a:noFill/>
-          <a:ln/>
-        </p:spPr>
-        <p:txBody>
-          <a:bodyPr wrap="square" lIns="0" tIns="0" rIns="0" bIns="0" rtlCol="0" anchor="t"/>
-          <a:lstStyle/>
-          <a:p>
-            <a:pPr algn="l" indent="0" marL="0">
-              <a:lnSpc>
-                <a:spcPts val="1820"/>
-              </a:lnSpc>
-              <a:spcBef>
-                <a:spcPts val="300"/>
-              </a:spcBef>
-              <a:spcAft>
-                <a:spcPts val="300"/>
-              </a:spcAft>
-              <a:buNone/>
-            </a:pPr>
-            <a:r>
-              <a:rPr lang="en-US" sz="1300" dirty="0">
-                <a:solidFill>
-                  <a:srgbClr val="1C2833"/>
-                </a:solidFill>
-                <a:latin typeface="Georgia" pitchFamily="34" charset="0"/>
-                <a:ea typeface="Georgia" pitchFamily="34" charset="-122"/>
-                <a:cs typeface="Georgia" pitchFamily="34" charset="-120"/>
-              </a:rPr>
-              <a:t>The algebraic identity: (100</a:t>
-            </a:r>
-            <a:pPr algn="l" indent="0" marL="0">
-              <a:lnSpc>
-                <a:spcPts val="1820"/>
-              </a:lnSpc>
-              <a:spcBef>
-                <a:spcPts val="300"/>
-              </a:spcBef>
-              <a:spcAft>
-                <a:spcPts val="300"/>
-              </a:spcAft>
-              <a:buNone/>
-            </a:pPr>
-            <a:r>
-              <a:rPr lang="en-US" sz="1300" i="1" dirty="0">
-                <a:solidFill>
-                  <a:srgbClr val="1C2833"/>
-                </a:solidFill>
-                <a:latin typeface="Georgia" pitchFamily="34" charset="0"/>
-                <a:ea typeface="Georgia" pitchFamily="34" charset="-122"/>
-                <a:cs typeface="Georgia" pitchFamily="34" charset="-120"/>
-              </a:rPr>
-              <a:t>a</a:t>
-            </a:r>
-            <a:pPr algn="l" indent="0" marL="0">
-              <a:lnSpc>
-                <a:spcPts val="1820"/>
-              </a:lnSpc>
-              <a:spcBef>
-                <a:spcPts val="300"/>
-              </a:spcBef>
-              <a:spcAft>
-                <a:spcPts val="300"/>
-              </a:spcAft>
-              <a:buNone/>
-            </a:pPr>
-            <a:r>
-              <a:rPr lang="en-US" sz="1300" dirty="0">
-                <a:solidFill>
-                  <a:srgbClr val="1C2833"/>
-                </a:solidFill>
-                <a:latin typeface="Georgia" pitchFamily="34" charset="0"/>
-                <a:ea typeface="Georgia" pitchFamily="34" charset="-122"/>
-                <a:cs typeface="Georgia" pitchFamily="34" charset="-120"/>
-              </a:rPr>
-              <a:t> + 10</a:t>
-            </a:r>
-            <a:pPr algn="l" indent="0" marL="0">
-              <a:lnSpc>
-                <a:spcPts val="1820"/>
-              </a:lnSpc>
-              <a:spcBef>
-                <a:spcPts val="300"/>
-              </a:spcBef>
-              <a:spcAft>
-                <a:spcPts val="300"/>
-              </a:spcAft>
-              <a:buNone/>
-            </a:pPr>
-            <a:r>
-              <a:rPr lang="en-US" sz="1300" i="1" dirty="0">
-                <a:solidFill>
-                  <a:srgbClr val="1C2833"/>
-                </a:solidFill>
-                <a:latin typeface="Georgia" pitchFamily="34" charset="0"/>
-                <a:ea typeface="Georgia" pitchFamily="34" charset="-122"/>
-                <a:cs typeface="Georgia" pitchFamily="34" charset="-120"/>
-              </a:rPr>
-              <a:t>b</a:t>
-            </a:r>
-            <a:pPr algn="l" indent="0" marL="0">
-              <a:lnSpc>
-                <a:spcPts val="1820"/>
-              </a:lnSpc>
-              <a:spcBef>
-                <a:spcPts val="300"/>
-              </a:spcBef>
-              <a:spcAft>
-                <a:spcPts val="300"/>
-              </a:spcAft>
-              <a:buNone/>
-            </a:pPr>
-            <a:r>
-              <a:rPr lang="en-US" sz="1300" dirty="0">
-                <a:solidFill>
-                  <a:srgbClr val="1C2833"/>
-                </a:solidFill>
-                <a:latin typeface="Georgia" pitchFamily="34" charset="0"/>
-                <a:ea typeface="Georgia" pitchFamily="34" charset="-122"/>
-                <a:cs typeface="Georgia" pitchFamily="34" charset="-120"/>
-              </a:rPr>
-              <a:t> + </a:t>
-            </a:r>
-            <a:pPr algn="l" indent="0" marL="0">
-              <a:lnSpc>
-                <a:spcPts val="1820"/>
-              </a:lnSpc>
-              <a:spcBef>
-                <a:spcPts val="300"/>
-              </a:spcBef>
-              <a:spcAft>
-                <a:spcPts val="300"/>
-              </a:spcAft>
-              <a:buNone/>
-            </a:pPr>
-            <a:r>
-              <a:rPr lang="en-US" sz="1300" i="1" dirty="0">
-                <a:solidFill>
-                  <a:srgbClr val="1C2833"/>
-                </a:solidFill>
-                <a:latin typeface="Georgia" pitchFamily="34" charset="0"/>
-                <a:ea typeface="Georgia" pitchFamily="34" charset="-122"/>
-                <a:cs typeface="Georgia" pitchFamily="34" charset="-120"/>
-              </a:rPr>
-              <a:t>c</a:t>
-            </a:r>
-            <a:pPr algn="l" indent="0" marL="0">
-              <a:lnSpc>
-                <a:spcPts val="1820"/>
-              </a:lnSpc>
-              <a:spcBef>
-                <a:spcPts val="300"/>
-              </a:spcBef>
-              <a:spcAft>
-                <a:spcPts val="300"/>
-              </a:spcAft>
-              <a:buNone/>
-            </a:pPr>
-            <a:r>
-              <a:rPr lang="en-US" sz="1300" dirty="0">
-                <a:solidFill>
-                  <a:srgbClr val="1C2833"/>
-                </a:solidFill>
-                <a:latin typeface="Georgia" pitchFamily="34" charset="0"/>
-                <a:ea typeface="Georgia" pitchFamily="34" charset="-122"/>
-                <a:cs typeface="Georgia" pitchFamily="34" charset="-120"/>
-              </a:rPr>
-              <a:t>) × 11 = 1000</a:t>
-            </a:r>
-            <a:pPr algn="l" indent="0" marL="0">
-              <a:lnSpc>
-                <a:spcPts val="1820"/>
-              </a:lnSpc>
-              <a:spcBef>
-                <a:spcPts val="300"/>
-              </a:spcBef>
-              <a:spcAft>
-                <a:spcPts val="300"/>
-              </a:spcAft>
-              <a:buNone/>
-            </a:pPr>
-            <a:r>
-              <a:rPr lang="en-US" sz="1300" i="1" dirty="0">
-                <a:solidFill>
-                  <a:srgbClr val="1C2833"/>
-                </a:solidFill>
-                <a:latin typeface="Georgia" pitchFamily="34" charset="0"/>
-                <a:ea typeface="Georgia" pitchFamily="34" charset="-122"/>
-                <a:cs typeface="Georgia" pitchFamily="34" charset="-120"/>
-              </a:rPr>
-              <a:t>a</a:t>
-            </a:r>
-            <a:pPr algn="l" indent="0" marL="0">
-              <a:lnSpc>
-                <a:spcPts val="1820"/>
-              </a:lnSpc>
-              <a:spcBef>
-                <a:spcPts val="300"/>
-              </a:spcBef>
-              <a:spcAft>
-                <a:spcPts val="300"/>
-              </a:spcAft>
-              <a:buNone/>
-            </a:pPr>
-            <a:r>
-              <a:rPr lang="en-US" sz="1300" dirty="0">
-                <a:solidFill>
-                  <a:srgbClr val="1C2833"/>
-                </a:solidFill>
-                <a:latin typeface="Georgia" pitchFamily="34" charset="0"/>
-                <a:ea typeface="Georgia" pitchFamily="34" charset="-122"/>
-                <a:cs typeface="Georgia" pitchFamily="34" charset="-120"/>
-              </a:rPr>
-              <a:t> + 100(</a:t>
-            </a:r>
-            <a:pPr algn="l" indent="0" marL="0">
-              <a:lnSpc>
-                <a:spcPts val="1820"/>
-              </a:lnSpc>
-              <a:spcBef>
-                <a:spcPts val="300"/>
-              </a:spcBef>
-              <a:spcAft>
-                <a:spcPts val="300"/>
-              </a:spcAft>
-              <a:buNone/>
-            </a:pPr>
-            <a:r>
-              <a:rPr lang="en-US" sz="1300" i="1" dirty="0">
-                <a:solidFill>
-                  <a:srgbClr val="1C2833"/>
-                </a:solidFill>
-                <a:latin typeface="Georgia" pitchFamily="34" charset="0"/>
-                <a:ea typeface="Georgia" pitchFamily="34" charset="-122"/>
-                <a:cs typeface="Georgia" pitchFamily="34" charset="-120"/>
-              </a:rPr>
-              <a:t>a</a:t>
-            </a:r>
-            <a:pPr algn="l" indent="0" marL="0">
-              <a:lnSpc>
-                <a:spcPts val="1820"/>
-              </a:lnSpc>
-              <a:spcBef>
-                <a:spcPts val="300"/>
-              </a:spcBef>
-              <a:spcAft>
-                <a:spcPts val="300"/>
-              </a:spcAft>
-              <a:buNone/>
-            </a:pPr>
-            <a:r>
-              <a:rPr lang="en-US" sz="1300" dirty="0">
-                <a:solidFill>
-                  <a:srgbClr val="1C2833"/>
-                </a:solidFill>
-                <a:latin typeface="Georgia" pitchFamily="34" charset="0"/>
-                <a:ea typeface="Georgia" pitchFamily="34" charset="-122"/>
-                <a:cs typeface="Georgia" pitchFamily="34" charset="-120"/>
-              </a:rPr>
-              <a:t>+</a:t>
-            </a:r>
-            <a:pPr algn="l" indent="0" marL="0">
-              <a:lnSpc>
-                <a:spcPts val="1820"/>
-              </a:lnSpc>
-              <a:spcBef>
-                <a:spcPts val="300"/>
-              </a:spcBef>
-              <a:spcAft>
-                <a:spcPts val="300"/>
-              </a:spcAft>
-              <a:buNone/>
-            </a:pPr>
-            <a:r>
-              <a:rPr lang="en-US" sz="1300" i="1" dirty="0">
-                <a:solidFill>
-                  <a:srgbClr val="1C2833"/>
-                </a:solidFill>
-                <a:latin typeface="Georgia" pitchFamily="34" charset="0"/>
-                <a:ea typeface="Georgia" pitchFamily="34" charset="-122"/>
-                <a:cs typeface="Georgia" pitchFamily="34" charset="-120"/>
-              </a:rPr>
-              <a:t>b</a:t>
-            </a:r>
-            <a:pPr algn="l" indent="0" marL="0">
-              <a:lnSpc>
-                <a:spcPts val="1820"/>
-              </a:lnSpc>
-              <a:spcBef>
-                <a:spcPts val="300"/>
-              </a:spcBef>
-              <a:spcAft>
-                <a:spcPts val="300"/>
-              </a:spcAft>
-              <a:buNone/>
-            </a:pPr>
-            <a:r>
-              <a:rPr lang="en-US" sz="1300" dirty="0">
-                <a:solidFill>
-                  <a:srgbClr val="1C2833"/>
-                </a:solidFill>
-                <a:latin typeface="Georgia" pitchFamily="34" charset="0"/>
-                <a:ea typeface="Georgia" pitchFamily="34" charset="-122"/>
-                <a:cs typeface="Georgia" pitchFamily="34" charset="-120"/>
-              </a:rPr>
-              <a:t>) + 10(</a:t>
-            </a:r>
-            <a:pPr algn="l" indent="0" marL="0">
-              <a:lnSpc>
-                <a:spcPts val="1820"/>
-              </a:lnSpc>
-              <a:spcBef>
-                <a:spcPts val="300"/>
-              </a:spcBef>
-              <a:spcAft>
-                <a:spcPts val="300"/>
-              </a:spcAft>
-              <a:buNone/>
-            </a:pPr>
-            <a:r>
-              <a:rPr lang="en-US" sz="1300" i="1" dirty="0">
-                <a:solidFill>
-                  <a:srgbClr val="1C2833"/>
-                </a:solidFill>
-                <a:latin typeface="Georgia" pitchFamily="34" charset="0"/>
-                <a:ea typeface="Georgia" pitchFamily="34" charset="-122"/>
-                <a:cs typeface="Georgia" pitchFamily="34" charset="-120"/>
-              </a:rPr>
-              <a:t>b</a:t>
-            </a:r>
-            <a:pPr algn="l" indent="0" marL="0">
-              <a:lnSpc>
-                <a:spcPts val="1820"/>
-              </a:lnSpc>
-              <a:spcBef>
-                <a:spcPts val="300"/>
-              </a:spcBef>
-              <a:spcAft>
-                <a:spcPts val="300"/>
-              </a:spcAft>
-              <a:buNone/>
-            </a:pPr>
-            <a:r>
-              <a:rPr lang="en-US" sz="1300" dirty="0">
-                <a:solidFill>
-                  <a:srgbClr val="1C2833"/>
-                </a:solidFill>
-                <a:latin typeface="Georgia" pitchFamily="34" charset="0"/>
-                <a:ea typeface="Georgia" pitchFamily="34" charset="-122"/>
-                <a:cs typeface="Georgia" pitchFamily="34" charset="-120"/>
-              </a:rPr>
-              <a:t>+</a:t>
-            </a:r>
-            <a:pPr algn="l" indent="0" marL="0">
-              <a:lnSpc>
-                <a:spcPts val="1820"/>
-              </a:lnSpc>
-              <a:spcBef>
-                <a:spcPts val="300"/>
-              </a:spcBef>
-              <a:spcAft>
-                <a:spcPts val="300"/>
-              </a:spcAft>
-              <a:buNone/>
-            </a:pPr>
-            <a:r>
-              <a:rPr lang="en-US" sz="1300" i="1" dirty="0">
-                <a:solidFill>
-                  <a:srgbClr val="1C2833"/>
-                </a:solidFill>
-                <a:latin typeface="Georgia" pitchFamily="34" charset="0"/>
-                <a:ea typeface="Georgia" pitchFamily="34" charset="-122"/>
-                <a:cs typeface="Georgia" pitchFamily="34" charset="-120"/>
-              </a:rPr>
-              <a:t>c</a:t>
-            </a:r>
-            <a:pPr algn="l" indent="0" marL="0">
-              <a:lnSpc>
-                <a:spcPts val="1820"/>
-              </a:lnSpc>
-              <a:spcBef>
-                <a:spcPts val="300"/>
-              </a:spcBef>
-              <a:spcAft>
-                <a:spcPts val="300"/>
-              </a:spcAft>
-              <a:buNone/>
-            </a:pPr>
-            <a:r>
-              <a:rPr lang="en-US" sz="1300" dirty="0">
-                <a:solidFill>
-                  <a:srgbClr val="1C2833"/>
-                </a:solidFill>
-                <a:latin typeface="Georgia" pitchFamily="34" charset="0"/>
-                <a:ea typeface="Georgia" pitchFamily="34" charset="-122"/>
-                <a:cs typeface="Georgia" pitchFamily="34" charset="-120"/>
-              </a:rPr>
-              <a:t>) + </a:t>
-            </a:r>
-            <a:pPr algn="l" indent="0" marL="0">
-              <a:lnSpc>
-                <a:spcPts val="1820"/>
-              </a:lnSpc>
-              <a:spcBef>
-                <a:spcPts val="300"/>
-              </a:spcBef>
-              <a:spcAft>
-                <a:spcPts val="300"/>
-              </a:spcAft>
-              <a:buNone/>
-            </a:pPr>
-            <a:r>
-              <a:rPr lang="en-US" sz="1300" i="1" dirty="0">
-                <a:solidFill>
-                  <a:srgbClr val="1C2833"/>
-                </a:solidFill>
-                <a:latin typeface="Georgia" pitchFamily="34" charset="0"/>
-                <a:ea typeface="Georgia" pitchFamily="34" charset="-122"/>
-                <a:cs typeface="Georgia" pitchFamily="34" charset="-120"/>
-              </a:rPr>
-              <a:t>c</a:t>
-            </a:r>
-            <a:pPr algn="l" indent="0" marL="0">
-              <a:lnSpc>
-                <a:spcPts val="1820"/>
-              </a:lnSpc>
-              <a:spcBef>
-                <a:spcPts val="300"/>
-              </a:spcBef>
-              <a:spcAft>
-                <a:spcPts val="300"/>
-              </a:spcAft>
-              <a:buNone/>
-            </a:pPr>
-            <a:r>
-              <a:rPr lang="en-US" sz="1300" dirty="0">
-                <a:solidFill>
-                  <a:srgbClr val="1C2833"/>
-                </a:solidFill>
-                <a:latin typeface="Georgia" pitchFamily="34" charset="0"/>
-                <a:ea typeface="Georgia" pitchFamily="34" charset="-122"/>
-                <a:cs typeface="Georgia" pitchFamily="34" charset="-120"/>
-              </a:rPr>
-              <a:t>.</a:t>
-            </a:r>
-            <a:endParaRPr lang="en-US" sz="1300" dirty="0"/>
-          </a:p>
-        </p:txBody>
-      </p:sp>
-      <p:sp>
-        <p:nvSpPr>
-          <p:cNvPr id="10" name="Text 8"/>
+              <a:rPr lang="en-US" sz="1200" dirty="0">
+                <a:solidFill>
+                  <a:srgbClr val="1C2833"/>
+                </a:solidFill>
+                <a:latin typeface="Arial" pitchFamily="34" charset="0"/>
+                <a:ea typeface="Arial" pitchFamily="34" charset="-122"/>
+                <a:cs typeface="Arial" pitchFamily="34" charset="-120"/>
+              </a:rPr>
+              <a:t>. ✓</a:t>
+            </a:r>
+            <a:endParaRPr lang="en-US" sz="1200" dirty="0"/>
+          </a:p>
+        </p:txBody>
+      </p:sp>
+      <p:sp>
+        <p:nvSpPr>
+          <p:cNvPr id="13" name="Text 11"/>
           <p:cNvSpPr/>
           <p:nvPr/>
         </p:nvSpPr>
